--- a/bloque0_ecosistema/csbc26_b0_ecosistema.pptx
+++ b/bloque0_ecosistema/csbc26_b0_ecosistema.pptx
@@ -6,17 +6,17 @@
   </p:sldMasterIdLst>
   <p:sldIdLst>
     <p:sldId id="256" r:id="rId7"/>
-    <p:sldId id="257" r:id="rId8"/>
-    <p:sldId id="258" r:id="rId9"/>
-    <p:sldId id="259" r:id="rId10"/>
-    <p:sldId id="260" r:id="rId11"/>
-    <p:sldId id="261" r:id="rId12"/>
-    <p:sldId id="262" r:id="rId13"/>
-    <p:sldId id="263" r:id="rId14"/>
-    <p:sldId id="264" r:id="rId15"/>
-    <p:sldId id="265" r:id="rId16"/>
-    <p:sldId id="266" r:id="rId17"/>
-    <p:sldId id="267" r:id="rId18"/>
+    <p:sldId id="257" r:id="rId9"/>
+    <p:sldId id="258" r:id="rId10"/>
+    <p:sldId id="259" r:id="rId11"/>
+    <p:sldId id="260" r:id="rId12"/>
+    <p:sldId id="261" r:id="rId13"/>
+    <p:sldId id="262" r:id="rId14"/>
+    <p:sldId id="263" r:id="rId15"/>
+    <p:sldId id="264" r:id="rId16"/>
+    <p:sldId id="265" r:id="rId17"/>
+    <p:sldId id="266" r:id="rId18"/>
+    <p:sldId id="267" r:id="rId19"/>
   </p:sldIdLst>
   <p:sldSz cx="12188952" cy="6858000" type="screen4x3"/>
   <p:notesSz cx="6858000" cy="9144000"/>
@@ -116,6 +116,1196 @@
     </a:lvl9pPr>
   </p:defaultTextStyle>
 </p:presentation>
+</file>
+
+<file path=ppt/notesMasters/notesMaster1.xml><?xml version="1.0" encoding="utf-8"?>
+<p:notesMaster xmlns:a="http://schemas.openxmlformats.org/drawingml/2006/main" xmlns:p="http://schemas.openxmlformats.org/presentationml/2006/main" xmlns:r="http://schemas.openxmlformats.org/officeDocument/2006/relationships">
+  <p:cSld>
+    <p:bg>
+      <p:bgRef idx="1001">
+        <a:schemeClr val="bg1"/>
+      </p:bgRef>
+    </p:bg>
+    <p:spTree>
+      <p:nvGrpSpPr>
+        <p:cNvPr id="1" name=""/>
+        <p:cNvGrpSpPr/>
+        <p:nvPr/>
+      </p:nvGrpSpPr>
+      <p:grpSpPr>
+        <a:xfrm>
+          <a:off x="0" y="0"/>
+          <a:ext cx="0" cy="0"/>
+          <a:chOff x="0" y="0"/>
+          <a:chExt cx="0" cy="0"/>
+        </a:xfrm>
+      </p:grpSpPr>
+      <p:sp>
+        <p:nvSpPr>
+          <p:cNvPr id="2" name="Header Placeholder 1"/>
+          <p:cNvSpPr>
+            <a:spLocks noGrp="1"/>
+          </p:cNvSpPr>
+          <p:nvPr>
+            <p:ph type="hdr" sz="quarter"/>
+          </p:nvPr>
+        </p:nvSpPr>
+        <p:spPr>
+          <a:xfrm>
+            <a:off x="0" y="0"/>
+            <a:ext cx="2971800" cy="457200"/>
+          </a:xfrm>
+          <a:prstGeom prst="rect">
+            <a:avLst/>
+          </a:prstGeom>
+        </p:spPr>
+        <p:txBody>
+          <a:bodyPr vert="horz" lIns="91440" tIns="45720" rIns="91440" bIns="45720" rtlCol="0"/>
+          <a:lstStyle>
+            <a:lvl1pPr algn="l">
+              <a:defRPr sz="1200"/>
+            </a:lvl1pPr>
+          </a:lstStyle>
+          <a:p>
+            <a:endParaRPr lang="en-US"/>
+          </a:p>
+        </p:txBody>
+      </p:sp>
+      <p:sp>
+        <p:nvSpPr>
+          <p:cNvPr id="3" name="Date Placeholder 2"/>
+          <p:cNvSpPr>
+            <a:spLocks noGrp="1"/>
+          </p:cNvSpPr>
+          <p:nvPr>
+            <p:ph type="dt" idx="1"/>
+          </p:nvPr>
+        </p:nvSpPr>
+        <p:spPr>
+          <a:xfrm>
+            <a:off x="3884613" y="0"/>
+            <a:ext cx="2971800" cy="457200"/>
+          </a:xfrm>
+          <a:prstGeom prst="rect">
+            <a:avLst/>
+          </a:prstGeom>
+        </p:spPr>
+        <p:txBody>
+          <a:bodyPr vert="horz" lIns="91440" tIns="45720" rIns="91440" bIns="45720" rtlCol="0"/>
+          <a:lstStyle>
+            <a:lvl1pPr algn="r">
+              <a:defRPr sz="1200"/>
+            </a:lvl1pPr>
+          </a:lstStyle>
+          <a:p>
+            <a:fld id="{0F89C1C7-3DCD-1040-A9CF-14679D8B5DDD}" type="datetimeFigureOut">
+              <a:rPr lang="en-US" smtClean="0"/>
+              <a:t>10/17/16</a:t>
+            </a:fld>
+            <a:endParaRPr lang="en-US"/>
+          </a:p>
+        </p:txBody>
+      </p:sp>
+      <p:sp>
+        <p:nvSpPr>
+          <p:cNvPr id="4" name="Slide Image Placeholder 3"/>
+          <p:cNvSpPr>
+            <a:spLocks noGrp="1" noRot="1" noChangeAspect="1"/>
+          </p:cNvSpPr>
+          <p:nvPr>
+            <p:ph type="sldImg" idx="2"/>
+          </p:nvPr>
+        </p:nvSpPr>
+        <p:spPr>
+          <a:xfrm>
+            <a:off x="1143000" y="685800"/>
+            <a:ext cx="4572000" cy="3429000"/>
+          </a:xfrm>
+          <a:prstGeom prst="rect">
+            <a:avLst/>
+          </a:prstGeom>
+          <a:noFill/>
+          <a:ln w="12700">
+            <a:solidFill>
+              <a:prstClr val="black"/>
+            </a:solidFill>
+          </a:ln>
+        </p:spPr>
+        <p:txBody>
+          <a:bodyPr vert="horz" lIns="91440" tIns="45720" rIns="91440" bIns="45720" rtlCol="0" anchor="ctr"/>
+          <a:lstStyle/>
+          <a:p>
+            <a:endParaRPr lang="en-US"/>
+          </a:p>
+        </p:txBody>
+      </p:sp>
+      <p:sp>
+        <p:nvSpPr>
+          <p:cNvPr id="5" name="Notes Placeholder 4"/>
+          <p:cNvSpPr>
+            <a:spLocks noGrp="1"/>
+          </p:cNvSpPr>
+          <p:nvPr>
+            <p:ph type="body" sz="quarter" idx="3"/>
+          </p:nvPr>
+        </p:nvSpPr>
+        <p:spPr>
+          <a:xfrm>
+            <a:off x="685800" y="4343400"/>
+            <a:ext cx="5486400" cy="4114800"/>
+          </a:xfrm>
+          <a:prstGeom prst="rect">
+            <a:avLst/>
+          </a:prstGeom>
+        </p:spPr>
+        <p:txBody>
+          <a:bodyPr vert="horz" lIns="91440" tIns="45720" rIns="91440" bIns="45720" rtlCol="0"/>
+          <a:lstStyle/>
+          <a:p>
+            <a:pPr lvl="0"/>
+            <a:r>
+              <a:rPr lang="en-US" smtClean="0"/>
+              <a:t>Click to edit Master text styles</a:t>
+            </a:r>
+          </a:p>
+          <a:p>
+            <a:pPr lvl="1"/>
+            <a:r>
+              <a:rPr lang="en-US" smtClean="0"/>
+              <a:t>Second level</a:t>
+            </a:r>
+          </a:p>
+          <a:p>
+            <a:pPr lvl="2"/>
+            <a:r>
+              <a:rPr lang="en-US" smtClean="0"/>
+              <a:t>Third level</a:t>
+            </a:r>
+          </a:p>
+          <a:p>
+            <a:pPr lvl="3"/>
+            <a:r>
+              <a:rPr lang="en-US" smtClean="0"/>
+              <a:t>Fourth level</a:t>
+            </a:r>
+          </a:p>
+          <a:p>
+            <a:pPr lvl="4"/>
+            <a:r>
+              <a:rPr lang="en-US" smtClean="0"/>
+              <a:t>Fifth level</a:t>
+            </a:r>
+            <a:endParaRPr lang="en-US"/>
+          </a:p>
+        </p:txBody>
+      </p:sp>
+      <p:sp>
+        <p:nvSpPr>
+          <p:cNvPr id="6" name="Footer Placeholder 5"/>
+          <p:cNvSpPr>
+            <a:spLocks noGrp="1"/>
+          </p:cNvSpPr>
+          <p:nvPr>
+            <p:ph type="ftr" sz="quarter" idx="4"/>
+          </p:nvPr>
+        </p:nvSpPr>
+        <p:spPr>
+          <a:xfrm>
+            <a:off x="0" y="8685213"/>
+            <a:ext cx="2971800" cy="457200"/>
+          </a:xfrm>
+          <a:prstGeom prst="rect">
+            <a:avLst/>
+          </a:prstGeom>
+        </p:spPr>
+        <p:txBody>
+          <a:bodyPr vert="horz" lIns="91440" tIns="45720" rIns="91440" bIns="45720" rtlCol="0" anchor="b"/>
+          <a:lstStyle>
+            <a:lvl1pPr algn="l">
+              <a:defRPr sz="1200"/>
+            </a:lvl1pPr>
+          </a:lstStyle>
+          <a:p>
+            <a:endParaRPr lang="en-US"/>
+          </a:p>
+        </p:txBody>
+      </p:sp>
+      <p:sp>
+        <p:nvSpPr>
+          <p:cNvPr id="7" name="Slide Number Placeholder 6"/>
+          <p:cNvSpPr>
+            <a:spLocks noGrp="1"/>
+          </p:cNvSpPr>
+          <p:nvPr>
+            <p:ph type="sldNum" sz="quarter" idx="5"/>
+          </p:nvPr>
+        </p:nvSpPr>
+        <p:spPr>
+          <a:xfrm>
+            <a:off x="3884613" y="8685213"/>
+            <a:ext cx="2971800" cy="457200"/>
+          </a:xfrm>
+          <a:prstGeom prst="rect">
+            <a:avLst/>
+          </a:prstGeom>
+        </p:spPr>
+        <p:txBody>
+          <a:bodyPr vert="horz" lIns="91440" tIns="45720" rIns="91440" bIns="45720" rtlCol="0" anchor="b"/>
+          <a:lstStyle>
+            <a:lvl1pPr algn="r">
+              <a:defRPr sz="1200"/>
+            </a:lvl1pPr>
+          </a:lstStyle>
+          <a:p>
+            <a:fld id="{BB5E49A5-4136-284D-997B-48E1D791AD67}" type="slidenum">
+              <a:rPr lang="en-US" smtClean="0"/>
+              <a:t>‹#›</a:t>
+            </a:fld>
+            <a:endParaRPr lang="en-US"/>
+          </a:p>
+        </p:txBody>
+      </p:sp>
+    </p:spTree>
+    <p:extLst>
+      <p:ext uri="{BB962C8B-B14F-4D97-AF65-F5344CB8AC3E}">
+        <p14:creationId xmlns:p14="http://schemas.microsoft.com/office/powerpoint/2010/main" val="2623252185"/>
+      </p:ext>
+    </p:extLst>
+  </p:cSld>
+  <p:clrMap bg1="lt1" tx1="dk1" bg2="lt2" tx2="dk2" accent1="accent1" accent2="accent2" accent3="accent3" accent4="accent4" accent5="accent5" accent6="accent6" hlink="hlink" folHlink="folHlink"/>
+  <p:notesStyle>
+    <a:lvl1pPr marL="0" algn="l" defTabSz="457200" rtl="0" eaLnBrk="1" latinLnBrk="0" hangingPunct="1">
+      <a:defRPr sz="1200" kern="1200">
+        <a:solidFill>
+          <a:schemeClr val="tx1"/>
+        </a:solidFill>
+        <a:latin typeface="+mn-lt"/>
+        <a:ea typeface="+mn-ea"/>
+        <a:cs typeface="+mn-cs"/>
+      </a:defRPr>
+    </a:lvl1pPr>
+    <a:lvl2pPr marL="457200" algn="l" defTabSz="457200" rtl="0" eaLnBrk="1" latinLnBrk="0" hangingPunct="1">
+      <a:defRPr sz="1200" kern="1200">
+        <a:solidFill>
+          <a:schemeClr val="tx1"/>
+        </a:solidFill>
+        <a:latin typeface="+mn-lt"/>
+        <a:ea typeface="+mn-ea"/>
+        <a:cs typeface="+mn-cs"/>
+      </a:defRPr>
+    </a:lvl2pPr>
+    <a:lvl3pPr marL="914400" algn="l" defTabSz="457200" rtl="0" eaLnBrk="1" latinLnBrk="0" hangingPunct="1">
+      <a:defRPr sz="1200" kern="1200">
+        <a:solidFill>
+          <a:schemeClr val="tx1"/>
+        </a:solidFill>
+        <a:latin typeface="+mn-lt"/>
+        <a:ea typeface="+mn-ea"/>
+        <a:cs typeface="+mn-cs"/>
+      </a:defRPr>
+    </a:lvl3pPr>
+    <a:lvl4pPr marL="1371600" algn="l" defTabSz="457200" rtl="0" eaLnBrk="1" latinLnBrk="0" hangingPunct="1">
+      <a:defRPr sz="1200" kern="1200">
+        <a:solidFill>
+          <a:schemeClr val="tx1"/>
+        </a:solidFill>
+        <a:latin typeface="+mn-lt"/>
+        <a:ea typeface="+mn-ea"/>
+        <a:cs typeface="+mn-cs"/>
+      </a:defRPr>
+    </a:lvl4pPr>
+    <a:lvl5pPr marL="1828800" algn="l" defTabSz="457200" rtl="0" eaLnBrk="1" latinLnBrk="0" hangingPunct="1">
+      <a:defRPr sz="1200" kern="1200">
+        <a:solidFill>
+          <a:schemeClr val="tx1"/>
+        </a:solidFill>
+        <a:latin typeface="+mn-lt"/>
+        <a:ea typeface="+mn-ea"/>
+        <a:cs typeface="+mn-cs"/>
+      </a:defRPr>
+    </a:lvl5pPr>
+    <a:lvl6pPr marL="2286000" algn="l" defTabSz="457200" rtl="0" eaLnBrk="1" latinLnBrk="0" hangingPunct="1">
+      <a:defRPr sz="1200" kern="1200">
+        <a:solidFill>
+          <a:schemeClr val="tx1"/>
+        </a:solidFill>
+        <a:latin typeface="+mn-lt"/>
+        <a:ea typeface="+mn-ea"/>
+        <a:cs typeface="+mn-cs"/>
+      </a:defRPr>
+    </a:lvl6pPr>
+    <a:lvl7pPr marL="2743200" algn="l" defTabSz="457200" rtl="0" eaLnBrk="1" latinLnBrk="0" hangingPunct="1">
+      <a:defRPr sz="1200" kern="1200">
+        <a:solidFill>
+          <a:schemeClr val="tx1"/>
+        </a:solidFill>
+        <a:latin typeface="+mn-lt"/>
+        <a:ea typeface="+mn-ea"/>
+        <a:cs typeface="+mn-cs"/>
+      </a:defRPr>
+    </a:lvl7pPr>
+    <a:lvl8pPr marL="3200400" algn="l" defTabSz="457200" rtl="0" eaLnBrk="1" latinLnBrk="0" hangingPunct="1">
+      <a:defRPr sz="1200" kern="1200">
+        <a:solidFill>
+          <a:schemeClr val="tx1"/>
+        </a:solidFill>
+        <a:latin typeface="+mn-lt"/>
+        <a:ea typeface="+mn-ea"/>
+        <a:cs typeface="+mn-cs"/>
+      </a:defRPr>
+    </a:lvl8pPr>
+    <a:lvl9pPr marL="3657600" algn="l" defTabSz="457200" rtl="0" eaLnBrk="1" latinLnBrk="0" hangingPunct="1">
+      <a:defRPr sz="1200" kern="1200">
+        <a:solidFill>
+          <a:schemeClr val="tx1"/>
+        </a:solidFill>
+        <a:latin typeface="+mn-lt"/>
+        <a:ea typeface="+mn-ea"/>
+        <a:cs typeface="+mn-cs"/>
+      </a:defRPr>
+    </a:lvl9pPr>
+  </p:notesStyle>
+</p:notesMaster>
+</file>
+
+<file path=ppt/notesSlides/notesSlide1.xml><?xml version="1.0" encoding="utf-8"?>
+<p:notes xmlns:a="http://schemas.openxmlformats.org/drawingml/2006/main" xmlns:p="http://schemas.openxmlformats.org/presentationml/2006/main" xmlns:r="http://schemas.openxmlformats.org/officeDocument/2006/relationships">
+  <p:cSld>
+    <p:spTree>
+      <p:nvGrpSpPr>
+        <p:cNvPr id="1" name=""/>
+        <p:cNvGrpSpPr/>
+        <p:nvPr/>
+      </p:nvGrpSpPr>
+      <p:grpSpPr>
+        <a:xfrm>
+          <a:off x="0" y="0"/>
+          <a:ext cx="0" cy="0"/>
+          <a:chOff x="0" y="0"/>
+          <a:chExt cx="0" cy="0"/>
+        </a:xfrm>
+      </p:grpSpPr>
+      <p:sp>
+        <p:nvSpPr>
+          <p:cNvPr id="2" name="Slide Image Placeholder 1"/>
+          <p:cNvSpPr>
+            <a:spLocks noGrp="1"/>
+          </p:cNvSpPr>
+          <p:nvPr>
+            <p:ph type="sldImg" idx="2"/>
+          </p:nvPr>
+        </p:nvSpPr>
+        <p:spPr/>
+      </p:sp>
+      <p:sp>
+        <p:nvSpPr>
+          <p:cNvPr id="3" name="Notes Placeholder 2"/>
+          <p:cNvSpPr>
+            <a:spLocks noGrp="1"/>
+          </p:cNvSpPr>
+          <p:nvPr>
+            <p:ph type="body" idx="3" sz="quarter"/>
+          </p:nvPr>
+        </p:nvSpPr>
+        <p:spPr/>
+        <p:txBody>
+          <a:bodyPr/>
+          <a:lstStyle/>
+          <a:p>
+            <a:r>
+              <a:t>Bienvenidos al bloque 0. Antes de tocar una sola línea de código vamos a entender de dónde sale realmente el material que vais a analizar: quién lo filtra, por qué canales circula y qué tipos de archivo os vais a encontrar. Esto no es teoría de relleno — si no entendéis el origen de un leak, vais a perder tiempo procesando basura o, peor, vais a malinterpretar los datos. En 45 minutos cubrimos tres bloques: origen, formato técnico, y el ecosistema como red que se vigila y se traiciona a sí misma.</a:t>
+            </a:r>
+          </a:p>
+        </p:txBody>
+      </p:sp>
+      <p:sp>
+        <p:nvSpPr>
+          <p:cNvPr id="4" name="Slide Number Placeholder 3"/>
+          <p:cNvSpPr>
+            <a:spLocks noGrp="1"/>
+          </p:cNvSpPr>
+          <p:nvPr>
+            <p:ph type="sldNum" idx="5" sz="quarter"/>
+          </p:nvPr>
+        </p:nvSpPr>
+        <p:spPr/>
+      </p:sp>
+    </p:spTree>
+  </p:cSld>
+  <p:clrMapOvr>
+    <a:masterClrMapping/>
+  </p:clrMapOvr>
+</p:notes>
+</file>
+
+<file path=ppt/notesSlides/notesSlide10.xml><?xml version="1.0" encoding="utf-8"?>
+<p:notes xmlns:a="http://schemas.openxmlformats.org/drawingml/2006/main" xmlns:p="http://schemas.openxmlformats.org/presentationml/2006/main" xmlns:r="http://schemas.openxmlformats.org/officeDocument/2006/relationships">
+  <p:cSld>
+    <p:spTree>
+      <p:nvGrpSpPr>
+        <p:cNvPr id="1" name=""/>
+        <p:cNvGrpSpPr/>
+        <p:nvPr/>
+      </p:nvGrpSpPr>
+      <p:grpSpPr>
+        <a:xfrm>
+          <a:off x="0" y="0"/>
+          <a:ext cx="0" cy="0"/>
+          <a:chOff x="0" y="0"/>
+          <a:chExt cx="0" cy="0"/>
+        </a:xfrm>
+      </p:grpSpPr>
+      <p:sp>
+        <p:nvSpPr>
+          <p:cNvPr id="2" name="Slide Image Placeholder 1"/>
+          <p:cNvSpPr>
+            <a:spLocks noGrp="1"/>
+          </p:cNvSpPr>
+          <p:nvPr>
+            <p:ph type="sldImg" idx="2"/>
+          </p:nvPr>
+        </p:nvSpPr>
+        <p:spPr/>
+      </p:sp>
+      <p:sp>
+        <p:nvSpPr>
+          <p:cNvPr id="3" name="Notes Placeholder 2"/>
+          <p:cNvSpPr>
+            <a:spLocks noGrp="1"/>
+          </p:cNvSpPr>
+          <p:nvPr>
+            <p:ph type="body" idx="3" sz="quarter"/>
+          </p:nvPr>
+        </p:nvSpPr>
+        <p:spPr/>
+        <p:txBody>
+          <a:bodyPr/>
+          <a:lstStyle/>
+          <a:p>
+            <a:r>
+              <a:t>Ya entendemos el origen y el formato técnico. Cerramos el bloque zoomando hacia afuera: cómo se comporta todo este ecosistema como red, y por qué los mismos actores que distribuyen leaks acaban siendo víctimas de otros leaks.</a:t>
+            </a:r>
+          </a:p>
+        </p:txBody>
+      </p:sp>
+      <p:sp>
+        <p:nvSpPr>
+          <p:cNvPr id="4" name="Slide Number Placeholder 3"/>
+          <p:cNvSpPr>
+            <a:spLocks noGrp="1"/>
+          </p:cNvSpPr>
+          <p:nvPr>
+            <p:ph type="sldNum" idx="5" sz="quarter"/>
+          </p:nvPr>
+        </p:nvSpPr>
+        <p:spPr/>
+      </p:sp>
+    </p:spTree>
+  </p:cSld>
+  <p:clrMapOvr>
+    <a:masterClrMapping/>
+  </p:clrMapOvr>
+</p:notes>
+</file>
+
+<file path=ppt/notesSlides/notesSlide11.xml><?xml version="1.0" encoding="utf-8"?>
+<p:notes xmlns:a="http://schemas.openxmlformats.org/drawingml/2006/main" xmlns:p="http://schemas.openxmlformats.org/presentationml/2006/main" xmlns:r="http://schemas.openxmlformats.org/officeDocument/2006/relationships">
+  <p:cSld>
+    <p:spTree>
+      <p:nvGrpSpPr>
+        <p:cNvPr id="1" name=""/>
+        <p:cNvGrpSpPr/>
+        <p:nvPr/>
+      </p:nvGrpSpPr>
+      <p:grpSpPr>
+        <a:xfrm>
+          <a:off x="0" y="0"/>
+          <a:ext cx="0" cy="0"/>
+          <a:chOff x="0" y="0"/>
+          <a:chExt cx="0" cy="0"/>
+        </a:xfrm>
+      </p:grpSpPr>
+      <p:sp>
+        <p:nvSpPr>
+          <p:cNvPr id="2" name="Slide Image Placeholder 1"/>
+          <p:cNvSpPr>
+            <a:spLocks noGrp="1"/>
+          </p:cNvSpPr>
+          <p:nvPr>
+            <p:ph type="sldImg" idx="2"/>
+          </p:nvPr>
+        </p:nvSpPr>
+        <p:spPr/>
+      </p:sp>
+      <p:sp>
+        <p:nvSpPr>
+          <p:cNvPr id="3" name="Notes Placeholder 2"/>
+          <p:cNvSpPr>
+            <a:spLocks noGrp="1"/>
+          </p:cNvSpPr>
+          <p:nvPr>
+            <p:ph type="body" idx="3" sz="quarter"/>
+          </p:nvPr>
+        </p:nvSpPr>
+        <p:spPr/>
+        <p:txBody>
+          <a:bodyPr/>
+          <a:lstStyle/>
+          <a:p>
+            <a:r>
+              <a:t>Este es probablemente el dato que más sorprende a quien empieza en este mundo: RaidForums distribuía breaches ajenos y terminó con su propia base de datos filtrada tras el seizure de Europol en 2022. BreachForums la sustituyó y corrió la misma suerte, no una sino dos veces, en 2023 y 2024. Preguntad a la audiencia: si vosotros fuerais un operador de este ecosistema, ¿cambiaríais de plataforma sabiendo que tarde o temprano os van a brechear también? La clave práctica es que los handles persisten aunque la plataforma muera, así que un mismo actor puede dejar rastro en cinco plataformas distintas — y eso es oro para quien investiga.</a:t>
+            </a:r>
+          </a:p>
+        </p:txBody>
+      </p:sp>
+      <p:sp>
+        <p:nvSpPr>
+          <p:cNvPr id="4" name="Slide Number Placeholder 3"/>
+          <p:cNvSpPr>
+            <a:spLocks noGrp="1"/>
+          </p:cNvSpPr>
+          <p:nvPr>
+            <p:ph type="sldNum" idx="5" sz="quarter"/>
+          </p:nvPr>
+        </p:nvSpPr>
+        <p:spPr/>
+      </p:sp>
+    </p:spTree>
+  </p:cSld>
+  <p:clrMapOvr>
+    <a:masterClrMapping/>
+  </p:clrMapOvr>
+</p:notes>
+</file>
+
+<file path=ppt/notesSlides/notesSlide12.xml><?xml version="1.0" encoding="utf-8"?>
+<p:notes xmlns:a="http://schemas.openxmlformats.org/drawingml/2006/main" xmlns:p="http://schemas.openxmlformats.org/presentationml/2006/main" xmlns:r="http://schemas.openxmlformats.org/officeDocument/2006/relationships">
+  <p:cSld>
+    <p:spTree>
+      <p:nvGrpSpPr>
+        <p:cNvPr id="1" name=""/>
+        <p:cNvGrpSpPr/>
+        <p:nvPr/>
+      </p:nvGrpSpPr>
+      <p:grpSpPr>
+        <a:xfrm>
+          <a:off x="0" y="0"/>
+          <a:ext cx="0" cy="0"/>
+          <a:chOff x="0" y="0"/>
+          <a:chExt cx="0" cy="0"/>
+        </a:xfrm>
+      </p:grpSpPr>
+      <p:sp>
+        <p:nvSpPr>
+          <p:cNvPr id="2" name="Slide Image Placeholder 1"/>
+          <p:cNvSpPr>
+            <a:spLocks noGrp="1"/>
+          </p:cNvSpPr>
+          <p:nvPr>
+            <p:ph type="sldImg" idx="2"/>
+          </p:nvPr>
+        </p:nvSpPr>
+        <p:spPr/>
+      </p:sp>
+      <p:sp>
+        <p:nvSpPr>
+          <p:cNvPr id="3" name="Notes Placeholder 2"/>
+          <p:cNvSpPr>
+            <a:spLocks noGrp="1"/>
+          </p:cNvSpPr>
+          <p:nvPr>
+            <p:ph type="body" idx="3" sz="quarter"/>
+          </p:nvPr>
+        </p:nvSpPr>
+        <p:spPr/>
+        <p:txBody>
+          <a:bodyPr/>
+          <a:lstStyle/>
+          <a:p>
+            <a:r>
+              <a:t>Terminamos distinguiendo dos formas de valor que no debéis mezclar al priorizar vuestro análisis. A la izquierda tenéis el valor táctico e inmediato — credenciales activas, IPs, dominios, cosas que caducan rápido y hay que explotar ya. A la derecha, el valor de inteligencia a largo plazo: patrones de comportamiento y redes de confianza que siguen siendo útiles meses o años después. La pregunta para cerrar el bloque es cuál de los dos vais a priorizar según el objetivo de vuestra investigación, porque no siempre coinciden. Con esto cerramos el bloque 0 y pasamos a la parte práctica.</a:t>
+            </a:r>
+          </a:p>
+        </p:txBody>
+      </p:sp>
+      <p:sp>
+        <p:nvSpPr>
+          <p:cNvPr id="4" name="Slide Number Placeholder 3"/>
+          <p:cNvSpPr>
+            <a:spLocks noGrp="1"/>
+          </p:cNvSpPr>
+          <p:nvPr>
+            <p:ph type="sldNum" idx="5" sz="quarter"/>
+          </p:nvPr>
+        </p:nvSpPr>
+        <p:spPr/>
+      </p:sp>
+    </p:spTree>
+  </p:cSld>
+  <p:clrMapOvr>
+    <a:masterClrMapping/>
+  </p:clrMapOvr>
+</p:notes>
+</file>
+
+<file path=ppt/notesSlides/notesSlide2.xml><?xml version="1.0" encoding="utf-8"?>
+<p:notes xmlns:a="http://schemas.openxmlformats.org/drawingml/2006/main" xmlns:p="http://schemas.openxmlformats.org/presentationml/2006/main" xmlns:r="http://schemas.openxmlformats.org/officeDocument/2006/relationships">
+  <p:cSld>
+    <p:spTree>
+      <p:nvGrpSpPr>
+        <p:cNvPr id="1" name=""/>
+        <p:cNvGrpSpPr/>
+        <p:nvPr/>
+      </p:nvGrpSpPr>
+      <p:grpSpPr>
+        <a:xfrm>
+          <a:off x="0" y="0"/>
+          <a:ext cx="0" cy="0"/>
+          <a:chOff x="0" y="0"/>
+          <a:chExt cx="0" cy="0"/>
+        </a:xfrm>
+      </p:grpSpPr>
+      <p:sp>
+        <p:nvSpPr>
+          <p:cNvPr id="2" name="Slide Image Placeholder 1"/>
+          <p:cNvSpPr>
+            <a:spLocks noGrp="1"/>
+          </p:cNvSpPr>
+          <p:nvPr>
+            <p:ph type="sldImg" idx="2"/>
+          </p:nvPr>
+        </p:nvSpPr>
+        <p:spPr/>
+      </p:sp>
+      <p:sp>
+        <p:nvSpPr>
+          <p:cNvPr id="3" name="Notes Placeholder 2"/>
+          <p:cNvSpPr>
+            <a:spLocks noGrp="1"/>
+          </p:cNvSpPr>
+          <p:nvPr>
+            <p:ph type="body" idx="3" sz="quarter"/>
+          </p:nvPr>
+        </p:nvSpPr>
+        <p:spPr/>
+        <p:txBody>
+          <a:bodyPr/>
+          <a:lstStyle/>
+          <a:p>
+            <a:r>
+              <a:t>Empezamos por el origen. No todos los leaks nacen igual, y saber cómo llegó un dump a vuestras manos os da pistas sobre su fiabilidad. Vamos a ver las tres vías principales y qué encontramos típicamente dentro de un leak.</a:t>
+            </a:r>
+          </a:p>
+        </p:txBody>
+      </p:sp>
+      <p:sp>
+        <p:nvSpPr>
+          <p:cNvPr id="4" name="Slide Number Placeholder 3"/>
+          <p:cNvSpPr>
+            <a:spLocks noGrp="1"/>
+          </p:cNvSpPr>
+          <p:nvPr>
+            <p:ph type="sldNum" idx="5" sz="quarter"/>
+          </p:nvPr>
+        </p:nvSpPr>
+        <p:spPr/>
+      </p:sp>
+    </p:spTree>
+  </p:cSld>
+  <p:clrMapOvr>
+    <a:masterClrMapping/>
+  </p:clrMapOvr>
+</p:notes>
+</file>
+
+<file path=ppt/notesSlides/notesSlide3.xml><?xml version="1.0" encoding="utf-8"?>
+<p:notes xmlns:a="http://schemas.openxmlformats.org/drawingml/2006/main" xmlns:p="http://schemas.openxmlformats.org/presentationml/2006/main" xmlns:r="http://schemas.openxmlformats.org/officeDocument/2006/relationships">
+  <p:cSld>
+    <p:spTree>
+      <p:nvGrpSpPr>
+        <p:cNvPr id="1" name=""/>
+        <p:cNvGrpSpPr/>
+        <p:nvPr/>
+      </p:nvGrpSpPr>
+      <p:grpSpPr>
+        <a:xfrm>
+          <a:off x="0" y="0"/>
+          <a:ext cx="0" cy="0"/>
+          <a:chOff x="0" y="0"/>
+          <a:chExt cx="0" cy="0"/>
+        </a:xfrm>
+      </p:grpSpPr>
+      <p:sp>
+        <p:nvSpPr>
+          <p:cNvPr id="2" name="Slide Image Placeholder 1"/>
+          <p:cNvSpPr>
+            <a:spLocks noGrp="1"/>
+          </p:cNvSpPr>
+          <p:nvPr>
+            <p:ph type="sldImg" idx="2"/>
+          </p:nvPr>
+        </p:nvSpPr>
+        <p:spPr/>
+      </p:sp>
+      <p:sp>
+        <p:nvSpPr>
+          <p:cNvPr id="3" name="Notes Placeholder 2"/>
+          <p:cNvSpPr>
+            <a:spLocks noGrp="1"/>
+          </p:cNvSpPr>
+          <p:nvPr>
+            <p:ph type="body" idx="3" sz="quarter"/>
+          </p:nvPr>
+        </p:nvSpPr>
+        <p:spPr/>
+        <p:txBody>
+          <a:bodyPr/>
+          <a:lstStyle/>
+          <a:p>
+            <a:r>
+              <a:t>Fijaos en la última idea, es la que más cuesta interiorizar: el mismo ecosistema que produce el leak lo redistribuye, y ese redistribuidor también acaba siendo víctima. Preguntadle a la audiencia si alguna vez se han planteado quién filtra al que filtra. Cuando lleguéis a un dato en Telegram o en un paste site, preguntaos siempre: ¿esto es la fuente original o ya pasó por dos o tres manos? Eso cambia por completo cómo valoráis su fiabilidad. Con esto en mente pasamos a qué contiene realmente un leak una vez lo tenéis delante.</a:t>
+            </a:r>
+          </a:p>
+        </p:txBody>
+      </p:sp>
+      <p:sp>
+        <p:nvSpPr>
+          <p:cNvPr id="4" name="Slide Number Placeholder 3"/>
+          <p:cNvSpPr>
+            <a:spLocks noGrp="1"/>
+          </p:cNvSpPr>
+          <p:nvPr>
+            <p:ph type="sldNum" idx="5" sz="quarter"/>
+          </p:nvPr>
+        </p:nvSpPr>
+        <p:spPr/>
+      </p:sp>
+    </p:spTree>
+  </p:cSld>
+  <p:clrMapOvr>
+    <a:masterClrMapping/>
+  </p:clrMapOvr>
+</p:notes>
+</file>
+
+<file path=ppt/notesSlides/notesSlide4.xml><?xml version="1.0" encoding="utf-8"?>
+<p:notes xmlns:a="http://schemas.openxmlformats.org/drawingml/2006/main" xmlns:p="http://schemas.openxmlformats.org/presentationml/2006/main" xmlns:r="http://schemas.openxmlformats.org/officeDocument/2006/relationships">
+  <p:cSld>
+    <p:spTree>
+      <p:nvGrpSpPr>
+        <p:cNvPr id="1" name=""/>
+        <p:cNvGrpSpPr/>
+        <p:nvPr/>
+      </p:nvGrpSpPr>
+      <p:grpSpPr>
+        <a:xfrm>
+          <a:off x="0" y="0"/>
+          <a:ext cx="0" cy="0"/>
+          <a:chOff x="0" y="0"/>
+          <a:chExt cx="0" cy="0"/>
+        </a:xfrm>
+      </p:grpSpPr>
+      <p:sp>
+        <p:nvSpPr>
+          <p:cNvPr id="2" name="Slide Image Placeholder 1"/>
+          <p:cNvSpPr>
+            <a:spLocks noGrp="1"/>
+          </p:cNvSpPr>
+          <p:nvPr>
+            <p:ph type="sldImg" idx="2"/>
+          </p:nvPr>
+        </p:nvSpPr>
+        <p:spPr/>
+      </p:sp>
+      <p:sp>
+        <p:nvSpPr>
+          <p:cNvPr id="3" name="Notes Placeholder 2"/>
+          <p:cNvSpPr>
+            <a:spLocks noGrp="1"/>
+          </p:cNvSpPr>
+          <p:nvPr>
+            <p:ph type="body" idx="3" sz="quarter"/>
+          </p:nvPr>
+        </p:nvSpPr>
+        <p:spPr/>
+        <p:txBody>
+          <a:bodyPr/>
+          <a:lstStyle/>
+          <a:p>
+            <a:r>
+              <a:t>Aquí es importante gestionar expectativas: la mayoría del material que vais a recibir son dumps de bases de datos, y eso suena espectacular pero en la práctica es tedioso de procesar. Destacad que los logs de chat internos son el material más valioso porque ahí la gente habla sin filtro, sin pensar que alguien los va a leer después. El source code y las configuraciones son minoritarios pero muy potentes si sabéis leerlos. La pregunta que debéis dejar flotando es: ¿qué de todo esto realmente aporta valor investigativo? Eso nos lleva directamente a la tabla de prioridades.</a:t>
+            </a:r>
+          </a:p>
+        </p:txBody>
+      </p:sp>
+      <p:sp>
+        <p:nvSpPr>
+          <p:cNvPr id="4" name="Slide Number Placeholder 3"/>
+          <p:cNvSpPr>
+            <a:spLocks noGrp="1"/>
+          </p:cNvSpPr>
+          <p:nvPr>
+            <p:ph type="sldNum" idx="5" sz="quarter"/>
+          </p:nvPr>
+        </p:nvSpPr>
+        <p:spPr/>
+      </p:sp>
+    </p:spTree>
+  </p:cSld>
+  <p:clrMapOvr>
+    <a:masterClrMapping/>
+  </p:clrMapOvr>
+</p:notes>
+</file>
+
+<file path=ppt/notesSlides/notesSlide5.xml><?xml version="1.0" encoding="utf-8"?>
+<p:notes xmlns:a="http://schemas.openxmlformats.org/drawingml/2006/main" xmlns:p="http://schemas.openxmlformats.org/presentationml/2006/main" xmlns:r="http://schemas.openxmlformats.org/officeDocument/2006/relationships">
+  <p:cSld>
+    <p:spTree>
+      <p:nvGrpSpPr>
+        <p:cNvPr id="1" name=""/>
+        <p:cNvGrpSpPr/>
+        <p:nvPr/>
+      </p:nvGrpSpPr>
+      <p:grpSpPr>
+        <a:xfrm>
+          <a:off x="0" y="0"/>
+          <a:ext cx="0" cy="0"/>
+          <a:chOff x="0" y="0"/>
+          <a:chExt cx="0" cy="0"/>
+        </a:xfrm>
+      </p:grpSpPr>
+      <p:sp>
+        <p:nvSpPr>
+          <p:cNvPr id="2" name="Slide Image Placeholder 1"/>
+          <p:cNvSpPr>
+            <a:spLocks noGrp="1"/>
+          </p:cNvSpPr>
+          <p:nvPr>
+            <p:ph type="sldImg" idx="2"/>
+          </p:nvPr>
+        </p:nvSpPr>
+        <p:spPr/>
+      </p:sp>
+      <p:sp>
+        <p:nvSpPr>
+          <p:cNvPr id="3" name="Notes Placeholder 2"/>
+          <p:cNvSpPr>
+            <a:spLocks noGrp="1"/>
+          </p:cNvSpPr>
+          <p:nvPr>
+            <p:ph type="body" idx="3" sz="quarter"/>
+          </p:nvPr>
+        </p:nvSpPr>
+        <p:spPr/>
+        <p:txBody>
+          <a:bodyPr/>
+          <a:lstStyle/>
+          <a:p>
+            <a:r>
+              <a:t>Esta tier list es una guía práctica, no un dogma: hay excepciones constantemente. Explicad que un chat log de Conti o BlackBasta con estructura interna y roles vale muchísimo más que un dump SQL enorme, aunque el dump tenga cien veces más registros. La nota al pie es la idea clave de toda la charla — un solo post bien colocado puede valer más que diez mil líneas de relleno, así que insistid en calidad sobre volumen antes de pasar a la sección de formatos.</a:t>
+            </a:r>
+          </a:p>
+        </p:txBody>
+      </p:sp>
+      <p:sp>
+        <p:nvSpPr>
+          <p:cNvPr id="4" name="Slide Number Placeholder 3"/>
+          <p:cNvSpPr>
+            <a:spLocks noGrp="1"/>
+          </p:cNvSpPr>
+          <p:nvPr>
+            <p:ph type="sldNum" idx="5" sz="quarter"/>
+          </p:nvPr>
+        </p:nvSpPr>
+        <p:spPr/>
+      </p:sp>
+    </p:spTree>
+  </p:cSld>
+  <p:clrMapOvr>
+    <a:masterClrMapping/>
+  </p:clrMapOvr>
+</p:notes>
+</file>
+
+<file path=ppt/notesSlides/notesSlide6.xml><?xml version="1.0" encoding="utf-8"?>
+<p:notes xmlns:a="http://schemas.openxmlformats.org/drawingml/2006/main" xmlns:p="http://schemas.openxmlformats.org/presentationml/2006/main" xmlns:r="http://schemas.openxmlformats.org/officeDocument/2006/relationships">
+  <p:cSld>
+    <p:spTree>
+      <p:nvGrpSpPr>
+        <p:cNvPr id="1" name=""/>
+        <p:cNvGrpSpPr/>
+        <p:nvPr/>
+      </p:nvGrpSpPr>
+      <p:grpSpPr>
+        <a:xfrm>
+          <a:off x="0" y="0"/>
+          <a:ext cx="0" cy="0"/>
+          <a:chOff x="0" y="0"/>
+          <a:chExt cx="0" cy="0"/>
+        </a:xfrm>
+      </p:grpSpPr>
+      <p:sp>
+        <p:nvSpPr>
+          <p:cNvPr id="2" name="Slide Image Placeholder 1"/>
+          <p:cNvSpPr>
+            <a:spLocks noGrp="1"/>
+          </p:cNvSpPr>
+          <p:nvPr>
+            <p:ph type="sldImg" idx="2"/>
+          </p:nvPr>
+        </p:nvSpPr>
+        <p:spPr/>
+      </p:sp>
+      <p:sp>
+        <p:nvSpPr>
+          <p:cNvPr id="3" name="Notes Placeholder 2"/>
+          <p:cNvSpPr>
+            <a:spLocks noGrp="1"/>
+          </p:cNvSpPr>
+          <p:nvPr>
+            <p:ph type="body" idx="3" sz="quarter"/>
+          </p:nvPr>
+        </p:nvSpPr>
+        <p:spPr/>
+        <p:txBody>
+          <a:bodyPr/>
+          <a:lstStyle/>
+          <a:p>
+            <a:r>
+              <a:t>Ya sabemos de dónde vienen los datos y qué tipos hay. Ahora toca la parte menos glamurosa pero más determinante para vuestro trabajo diario: en qué formato os va a llegar todo esto y por qué casi nunca está limpio.</a:t>
+            </a:r>
+          </a:p>
+        </p:txBody>
+      </p:sp>
+      <p:sp>
+        <p:nvSpPr>
+          <p:cNvPr id="4" name="Slide Number Placeholder 3"/>
+          <p:cNvSpPr>
+            <a:spLocks noGrp="1"/>
+          </p:cNvSpPr>
+          <p:nvPr>
+            <p:ph type="sldNum" idx="5" sz="quarter"/>
+          </p:nvPr>
+        </p:nvSpPr>
+        <p:spPr/>
+      </p:sp>
+    </p:spTree>
+  </p:cSld>
+  <p:clrMapOvr>
+    <a:masterClrMapping/>
+  </p:clrMapOvr>
+</p:notes>
+</file>
+
+<file path=ppt/notesSlides/notesSlide7.xml><?xml version="1.0" encoding="utf-8"?>
+<p:notes xmlns:a="http://schemas.openxmlformats.org/drawingml/2006/main" xmlns:p="http://schemas.openxmlformats.org/presentationml/2006/main" xmlns:r="http://schemas.openxmlformats.org/officeDocument/2006/relationships">
+  <p:cSld>
+    <p:spTree>
+      <p:nvGrpSpPr>
+        <p:cNvPr id="1" name=""/>
+        <p:cNvGrpSpPr/>
+        <p:nvPr/>
+      </p:nvGrpSpPr>
+      <p:grpSpPr>
+        <a:xfrm>
+          <a:off x="0" y="0"/>
+          <a:ext cx="0" cy="0"/>
+          <a:chOff x="0" y="0"/>
+          <a:chExt cx="0" cy="0"/>
+        </a:xfrm>
+      </p:grpSpPr>
+      <p:sp>
+        <p:nvSpPr>
+          <p:cNvPr id="2" name="Slide Image Placeholder 1"/>
+          <p:cNvSpPr>
+            <a:spLocks noGrp="1"/>
+          </p:cNvSpPr>
+          <p:nvPr>
+            <p:ph type="sldImg" idx="2"/>
+          </p:nvPr>
+        </p:nvSpPr>
+        <p:spPr/>
+      </p:sp>
+      <p:sp>
+        <p:nvSpPr>
+          <p:cNvPr id="3" name="Notes Placeholder 2"/>
+          <p:cNvSpPr>
+            <a:spLocks noGrp="1"/>
+          </p:cNvSpPr>
+          <p:nvPr>
+            <p:ph type="body" idx="3" sz="quarter"/>
+          </p:nvPr>
+        </p:nvSpPr>
+        <p:spPr/>
+        <p:txBody>
+          <a:bodyPr/>
+          <a:lstStyle/>
+          <a:p>
+            <a:r>
+              <a:t>Aquí conviene ser honestos: vBulletin con cp1251 os va a dar más de un dolor de cabeza, y no es un caso raro — es el formato dominante en foros de dos décadas. Contad que IPS tiene tantas variantes de schema entre versiones que asumir un prefijo de tabla fijo os va a romper el parser tarde o temprano. La frase final es la más importante de esta diapositiva: en la práctica os vais a encontrar encodings mixtos, tablas renombradas y backups incompletos, así que nunca asumáis que un dump está completo solo porque abre sin errores.</a:t>
+            </a:r>
+          </a:p>
+        </p:txBody>
+      </p:sp>
+      <p:sp>
+        <p:nvSpPr>
+          <p:cNvPr id="4" name="Slide Number Placeholder 3"/>
+          <p:cNvSpPr>
+            <a:spLocks noGrp="1"/>
+          </p:cNvSpPr>
+          <p:nvPr>
+            <p:ph type="sldNum" idx="5" sz="quarter"/>
+          </p:nvPr>
+        </p:nvSpPr>
+        <p:spPr/>
+      </p:sp>
+    </p:spTree>
+  </p:cSld>
+  <p:clrMapOvr>
+    <a:masterClrMapping/>
+  </p:clrMapOvr>
+</p:notes>
+</file>
+
+<file path=ppt/notesSlides/notesSlide8.xml><?xml version="1.0" encoding="utf-8"?>
+<p:notes xmlns:a="http://schemas.openxmlformats.org/drawingml/2006/main" xmlns:p="http://schemas.openxmlformats.org/presentationml/2006/main" xmlns:r="http://schemas.openxmlformats.org/officeDocument/2006/relationships">
+  <p:cSld>
+    <p:spTree>
+      <p:nvGrpSpPr>
+        <p:cNvPr id="1" name=""/>
+        <p:cNvGrpSpPr/>
+        <p:nvPr/>
+      </p:nvGrpSpPr>
+      <p:grpSpPr>
+        <a:xfrm>
+          <a:off x="0" y="0"/>
+          <a:ext cx="0" cy="0"/>
+          <a:chOff x="0" y="0"/>
+          <a:chExt cx="0" cy="0"/>
+        </a:xfrm>
+      </p:grpSpPr>
+      <p:sp>
+        <p:nvSpPr>
+          <p:cNvPr id="2" name="Slide Image Placeholder 1"/>
+          <p:cNvSpPr>
+            <a:spLocks noGrp="1"/>
+          </p:cNvSpPr>
+          <p:nvPr>
+            <p:ph type="sldImg" idx="2"/>
+          </p:nvPr>
+        </p:nvSpPr>
+        <p:spPr/>
+      </p:sp>
+      <p:sp>
+        <p:nvSpPr>
+          <p:cNvPr id="3" name="Notes Placeholder 2"/>
+          <p:cNvSpPr>
+            <a:spLocks noGrp="1"/>
+          </p:cNvSpPr>
+          <p:nvPr>
+            <p:ph type="body" idx="3" sz="quarter"/>
+          </p:nvPr>
+        </p:nvSpPr>
+        <p:spPr/>
+        <p:txBody>
+          <a:bodyPr/>
+          <a:lstStyle/>
+          <a:p>
+            <a:r>
+              <a:t>Esta segunda tier list es sobre coste de procesamiento, no sobre valor investigativo — no las confundáis, un dump tier D en esfuerzo técnico puede ser tier S en la lista anterior. Remarcad que JSON estructurado gana precisamente porque tiene el schema conocido de antemano, mientras que un dump custom sin documentación os obliga a hacer ingeniería inversa del schema desde cero. Esto conecta directo con la siguiente idea: el parser no es un trámite, es la primera línea real de análisis.</a:t>
+            </a:r>
+          </a:p>
+        </p:txBody>
+      </p:sp>
+      <p:sp>
+        <p:nvSpPr>
+          <p:cNvPr id="4" name="Slide Number Placeholder 3"/>
+          <p:cNvSpPr>
+            <a:spLocks noGrp="1"/>
+          </p:cNvSpPr>
+          <p:nvPr>
+            <p:ph type="sldNum" idx="5" sz="quarter"/>
+          </p:nvPr>
+        </p:nvSpPr>
+        <p:spPr/>
+      </p:sp>
+    </p:spTree>
+  </p:cSld>
+  <p:clrMapOvr>
+    <a:masterClrMapping/>
+  </p:clrMapOvr>
+</p:notes>
+</file>
+
+<file path=ppt/notesSlides/notesSlide9.xml><?xml version="1.0" encoding="utf-8"?>
+<p:notes xmlns:a="http://schemas.openxmlformats.org/drawingml/2006/main" xmlns:p="http://schemas.openxmlformats.org/presentationml/2006/main" xmlns:r="http://schemas.openxmlformats.org/officeDocument/2006/relationships">
+  <p:cSld>
+    <p:spTree>
+      <p:nvGrpSpPr>
+        <p:cNvPr id="1" name=""/>
+        <p:cNvGrpSpPr/>
+        <p:nvPr/>
+      </p:nvGrpSpPr>
+      <p:grpSpPr>
+        <a:xfrm>
+          <a:off x="0" y="0"/>
+          <a:ext cx="0" cy="0"/>
+          <a:chOff x="0" y="0"/>
+          <a:chExt cx="0" cy="0"/>
+        </a:xfrm>
+      </p:grpSpPr>
+      <p:sp>
+        <p:nvSpPr>
+          <p:cNvPr id="2" name="Slide Image Placeholder 1"/>
+          <p:cNvSpPr>
+            <a:spLocks noGrp="1"/>
+          </p:cNvSpPr>
+          <p:nvPr>
+            <p:ph type="sldImg" idx="2"/>
+          </p:nvPr>
+        </p:nvSpPr>
+        <p:spPr/>
+      </p:sp>
+      <p:sp>
+        <p:nvSpPr>
+          <p:cNvPr id="3" name="Notes Placeholder 2"/>
+          <p:cNvSpPr>
+            <a:spLocks noGrp="1"/>
+          </p:cNvSpPr>
+          <p:nvPr>
+            <p:ph type="body" idx="3" sz="quarter"/>
+          </p:nvPr>
+        </p:nvSpPr>
+        <p:spPr/>
+        <p:txBody>
+          <a:bodyPr/>
+          <a:lstStyle/>
+          <a:p>
+            <a:r>
+              <a:t>Contad una anécdota o hipótesis realista: un parser mal calibrado puede descartar millones de registros en silencio, sin lanzar ni un warning, y nadie se entera hasta que alguien pregunta por qué faltan usuarios de cierto rango de fechas. Por eso la estrategia que proponemos es auto-detección de versión más validación cruzada contra los recuentos de las tablas de metadatos. El caso del cp1251 mal interpretado como UTF-8 es el ejemplo perfecto de corrupción silenciosa: los datos parecen válidos pero están rotos. Cerrad con la frase que resume el bloque: esto no es limpieza de datos, es arqueología de schemas, y esa mentalidad es la que abre la siguiente sección sobre el ecosistema como red.</a:t>
+            </a:r>
+          </a:p>
+        </p:txBody>
+      </p:sp>
+      <p:sp>
+        <p:nvSpPr>
+          <p:cNvPr id="4" name="Slide Number Placeholder 3"/>
+          <p:cNvSpPr>
+            <a:spLocks noGrp="1"/>
+          </p:cNvSpPr>
+          <p:nvPr>
+            <p:ph type="sldNum" idx="5" sz="quarter"/>
+          </p:nvPr>
+        </p:nvSpPr>
+        <p:spPr/>
+      </p:sp>
+    </p:spTree>
+  </p:cSld>
+  <p:clrMapOvr>
+    <a:masterClrMapping/>
+  </p:clrMapOvr>
+</p:notes>
 </file>
 
 <file path=ppt/slideLayouts/slideLayout1.xml><?xml version="1.0" encoding="utf-8"?>
@@ -7432,4 +8622,324 @@
   </a:objectDefaults>
   <a:extraClrSchemeLst/>
 </a:theme>
+</file>
+
+<file path=ppt/theme/theme2.xml><?xml version="1.0" encoding="utf-8"?>
+<a:theme xmlns:a="http://schemas.openxmlformats.org/drawingml/2006/main" name="Office Theme">
+  <a:themeElements>
+    <a:clrScheme name="Office">
+      <a:dk1>
+        <a:sysClr val="windowText" lastClr="000000"/>
+      </a:dk1>
+      <a:lt1>
+        <a:sysClr val="window" lastClr="FFFFFF"/>
+      </a:lt1>
+      <a:dk2>
+        <a:srgbClr val="1F497D"/>
+      </a:dk2>
+      <a:lt2>
+        <a:srgbClr val="EEECE1"/>
+      </a:lt2>
+      <a:accent1>
+        <a:srgbClr val="4F81BD"/>
+      </a:accent1>
+      <a:accent2>
+        <a:srgbClr val="C0504D"/>
+      </a:accent2>
+      <a:accent3>
+        <a:srgbClr val="9BBB59"/>
+      </a:accent3>
+      <a:accent4>
+        <a:srgbClr val="8064A2"/>
+      </a:accent4>
+      <a:accent5>
+        <a:srgbClr val="4BACC6"/>
+      </a:accent5>
+      <a:accent6>
+        <a:srgbClr val="F79646"/>
+      </a:accent6>
+      <a:hlink>
+        <a:srgbClr val="0000FF"/>
+      </a:hlink>
+      <a:folHlink>
+        <a:srgbClr val="800080"/>
+      </a:folHlink>
+    </a:clrScheme>
+    <a:fontScheme name="Office">
+      <a:majorFont>
+        <a:latin typeface="Calibri"/>
+        <a:ea typeface=""/>
+        <a:cs typeface=""/>
+        <a:font script="Jpan" typeface="ＭＳ Ｐゴシック"/>
+        <a:font script="Hang" typeface="맑은 고딕"/>
+        <a:font script="Hans" typeface="宋体"/>
+        <a:font script="Hant" typeface="新細明體"/>
+        <a:font script="Arab" typeface="Times New Roman"/>
+        <a:font script="Hebr" typeface="Times New Roman"/>
+        <a:font script="Thai" typeface="Angsana New"/>
+        <a:font script="Ethi" typeface="Nyala"/>
+        <a:font script="Beng" typeface="Vrinda"/>
+        <a:font script="Gujr" typeface="Shruti"/>
+        <a:font script="Khmr" typeface="MoolBoran"/>
+        <a:font script="Knda" typeface="Tunga"/>
+        <a:font script="Guru" typeface="Raavi"/>
+        <a:font script="Cans" typeface="Euphemia"/>
+        <a:font script="Cher" typeface="Plantagenet Cherokee"/>
+        <a:font script="Yiii" typeface="Microsoft Yi Baiti"/>
+        <a:font script="Tibt" typeface="Microsoft Himalaya"/>
+        <a:font script="Thaa" typeface="MV Boli"/>
+        <a:font script="Deva" typeface="Mangal"/>
+        <a:font script="Telu" typeface="Gautami"/>
+        <a:font script="Taml" typeface="Latha"/>
+        <a:font script="Syrc" typeface="Estrangelo Edessa"/>
+        <a:font script="Orya" typeface="Kalinga"/>
+        <a:font script="Mlym" typeface="Kartika"/>
+        <a:font script="Laoo" typeface="DokChampa"/>
+        <a:font script="Sinh" typeface="Iskoola Pota"/>
+        <a:font script="Mong" typeface="Mongolian Baiti"/>
+        <a:font script="Viet" typeface="Times New Roman"/>
+        <a:font script="Uigh" typeface="Microsoft Uighur"/>
+        <a:font script="Geor" typeface="Sylfaen"/>
+      </a:majorFont>
+      <a:minorFont>
+        <a:latin typeface="Calibri"/>
+        <a:ea typeface=""/>
+        <a:cs typeface=""/>
+        <a:font script="Jpan" typeface="ＭＳ Ｐゴシック"/>
+        <a:font script="Hang" typeface="맑은 고딕"/>
+        <a:font script="Hans" typeface="宋体"/>
+        <a:font script="Hant" typeface="新細明體"/>
+        <a:font script="Arab" typeface="Arial"/>
+        <a:font script="Hebr" typeface="Arial"/>
+        <a:font script="Thai" typeface="Cordia New"/>
+        <a:font script="Ethi" typeface="Nyala"/>
+        <a:font script="Beng" typeface="Vrinda"/>
+        <a:font script="Gujr" typeface="Shruti"/>
+        <a:font script="Khmr" typeface="DaunPenh"/>
+        <a:font script="Knda" typeface="Tunga"/>
+        <a:font script="Guru" typeface="Raavi"/>
+        <a:font script="Cans" typeface="Euphemia"/>
+        <a:font script="Cher" typeface="Plantagenet Cherokee"/>
+        <a:font script="Yiii" typeface="Microsoft Yi Baiti"/>
+        <a:font script="Tibt" typeface="Microsoft Himalaya"/>
+        <a:font script="Thaa" typeface="MV Boli"/>
+        <a:font script="Deva" typeface="Mangal"/>
+        <a:font script="Telu" typeface="Gautami"/>
+        <a:font script="Taml" typeface="Latha"/>
+        <a:font script="Syrc" typeface="Estrangelo Edessa"/>
+        <a:font script="Orya" typeface="Kalinga"/>
+        <a:font script="Mlym" typeface="Kartika"/>
+        <a:font script="Laoo" typeface="DokChampa"/>
+        <a:font script="Sinh" typeface="Iskoola Pota"/>
+        <a:font script="Mong" typeface="Mongolian Baiti"/>
+        <a:font script="Viet" typeface="Arial"/>
+        <a:font script="Uigh" typeface="Microsoft Uighur"/>
+        <a:font script="Geor" typeface="Sylfaen"/>
+      </a:minorFont>
+    </a:fontScheme>
+    <a:fmtScheme name="Office">
+      <a:fillStyleLst>
+        <a:solidFill>
+          <a:schemeClr val="phClr"/>
+        </a:solidFill>
+        <a:gradFill rotWithShape="1">
+          <a:gsLst>
+            <a:gs pos="0">
+              <a:schemeClr val="phClr">
+                <a:tint val="50000"/>
+                <a:satMod val="300000"/>
+              </a:schemeClr>
+            </a:gs>
+            <a:gs pos="35000">
+              <a:schemeClr val="phClr">
+                <a:tint val="37000"/>
+                <a:satMod val="300000"/>
+              </a:schemeClr>
+            </a:gs>
+            <a:gs pos="100000">
+              <a:schemeClr val="phClr">
+                <a:tint val="15000"/>
+                <a:satMod val="350000"/>
+              </a:schemeClr>
+            </a:gs>
+          </a:gsLst>
+          <a:lin ang="16200000" scaled="1"/>
+        </a:gradFill>
+        <a:gradFill rotWithShape="1">
+          <a:gsLst>
+            <a:gs pos="0">
+              <a:schemeClr val="phClr">
+                <a:tint val="100000"/>
+                <a:shade val="100000"/>
+                <a:satMod val="130000"/>
+              </a:schemeClr>
+            </a:gs>
+            <a:gs pos="100000">
+              <a:schemeClr val="phClr">
+                <a:tint val="50000"/>
+                <a:shade val="100000"/>
+                <a:satMod val="350000"/>
+              </a:schemeClr>
+            </a:gs>
+          </a:gsLst>
+          <a:lin ang="16200000" scaled="0"/>
+        </a:gradFill>
+      </a:fillStyleLst>
+      <a:lnStyleLst>
+        <a:ln w="9525" cap="flat" cmpd="sng" algn="ctr">
+          <a:solidFill>
+            <a:schemeClr val="phClr">
+              <a:shade val="95000"/>
+              <a:satMod val="105000"/>
+            </a:schemeClr>
+          </a:solidFill>
+          <a:prstDash val="solid"/>
+        </a:ln>
+        <a:ln w="25400" cap="flat" cmpd="sng" algn="ctr">
+          <a:solidFill>
+            <a:schemeClr val="phClr"/>
+          </a:solidFill>
+          <a:prstDash val="solid"/>
+        </a:ln>
+        <a:ln w="38100" cap="flat" cmpd="sng" algn="ctr">
+          <a:solidFill>
+            <a:schemeClr val="phClr"/>
+          </a:solidFill>
+          <a:prstDash val="solid"/>
+        </a:ln>
+      </a:lnStyleLst>
+      <a:effectStyleLst>
+        <a:effectStyle>
+          <a:effectLst>
+            <a:outerShdw blurRad="40000" dist="20000" dir="5400000" rotWithShape="0">
+              <a:srgbClr val="000000">
+                <a:alpha val="38000"/>
+              </a:srgbClr>
+            </a:outerShdw>
+          </a:effectLst>
+        </a:effectStyle>
+        <a:effectStyle>
+          <a:effectLst>
+            <a:outerShdw blurRad="40000" dist="23000" dir="5400000" rotWithShape="0">
+              <a:srgbClr val="000000">
+                <a:alpha val="35000"/>
+              </a:srgbClr>
+            </a:outerShdw>
+          </a:effectLst>
+        </a:effectStyle>
+        <a:effectStyle>
+          <a:effectLst>
+            <a:outerShdw blurRad="40000" dist="23000" dir="5400000" rotWithShape="0">
+              <a:srgbClr val="000000">
+                <a:alpha val="35000"/>
+              </a:srgbClr>
+            </a:outerShdw>
+          </a:effectLst>
+          <a:scene3d>
+            <a:camera prst="orthographicFront">
+              <a:rot lat="0" lon="0" rev="0"/>
+            </a:camera>
+            <a:lightRig rig="threePt" dir="t">
+              <a:rot lat="0" lon="0" rev="1200000"/>
+            </a:lightRig>
+          </a:scene3d>
+          <a:sp3d>
+            <a:bevelT w="63500" h="25400"/>
+          </a:sp3d>
+        </a:effectStyle>
+      </a:effectStyleLst>
+      <a:bgFillStyleLst>
+        <a:solidFill>
+          <a:schemeClr val="phClr"/>
+        </a:solidFill>
+        <a:gradFill rotWithShape="1">
+          <a:gsLst>
+            <a:gs pos="0">
+              <a:schemeClr val="phClr">
+                <a:tint val="40000"/>
+                <a:satMod val="350000"/>
+              </a:schemeClr>
+            </a:gs>
+            <a:gs pos="40000">
+              <a:schemeClr val="phClr">
+                <a:tint val="45000"/>
+                <a:shade val="99000"/>
+                <a:satMod val="350000"/>
+              </a:schemeClr>
+            </a:gs>
+            <a:gs pos="100000">
+              <a:schemeClr val="phClr">
+                <a:shade val="20000"/>
+                <a:satMod val="255000"/>
+              </a:schemeClr>
+            </a:gs>
+          </a:gsLst>
+          <a:path path="circle">
+            <a:fillToRect l="50000" t="-80000" r="50000" b="180000"/>
+          </a:path>
+        </a:gradFill>
+        <a:gradFill rotWithShape="1">
+          <a:gsLst>
+            <a:gs pos="0">
+              <a:schemeClr val="phClr">
+                <a:tint val="80000"/>
+                <a:satMod val="300000"/>
+              </a:schemeClr>
+            </a:gs>
+            <a:gs pos="100000">
+              <a:schemeClr val="phClr">
+                <a:shade val="30000"/>
+                <a:satMod val="200000"/>
+              </a:schemeClr>
+            </a:gs>
+          </a:gsLst>
+          <a:path path="circle">
+            <a:fillToRect l="50000" t="50000" r="50000" b="50000"/>
+          </a:path>
+        </a:gradFill>
+      </a:bgFillStyleLst>
+    </a:fmtScheme>
+  </a:themeElements>
+  <a:objectDefaults>
+    <a:spDef>
+      <a:spPr/>
+      <a:bodyPr/>
+      <a:lstStyle/>
+      <a:style>
+        <a:lnRef idx="1">
+          <a:schemeClr val="accent1"/>
+        </a:lnRef>
+        <a:fillRef idx="3">
+          <a:schemeClr val="accent1"/>
+        </a:fillRef>
+        <a:effectRef idx="2">
+          <a:schemeClr val="accent1"/>
+        </a:effectRef>
+        <a:fontRef idx="minor">
+          <a:schemeClr val="lt1"/>
+        </a:fontRef>
+      </a:style>
+    </a:spDef>
+    <a:lnDef>
+      <a:spPr/>
+      <a:bodyPr/>
+      <a:lstStyle/>
+      <a:style>
+        <a:lnRef idx="2">
+          <a:schemeClr val="accent1"/>
+        </a:lnRef>
+        <a:fillRef idx="0">
+          <a:schemeClr val="accent1"/>
+        </a:fillRef>
+        <a:effectRef idx="1">
+          <a:schemeClr val="accent1"/>
+        </a:effectRef>
+        <a:fontRef idx="minor">
+          <a:schemeClr val="tx1"/>
+        </a:fontRef>
+      </a:style>
+    </a:lnDef>
+  </a:objectDefaults>
+  <a:extraClrSchemeLst/>
+</a:theme>
 </file>
--- a/bloque0_ecosistema/csbc26_b0_ecosistema.pptx
+++ b/bloque0_ecosistema/csbc26_b0_ecosistema.pptx
@@ -5312,12 +5312,6 @@
           <a:lstStyle/>
           <a:p>
             <a:r>
-              <a:rPr sz="3400" b="1">
-                <a:solidFill>
-                  <a:srgbClr val="FFFFFF"/>
-                </a:solidFill>
-                <a:latin typeface="Calibri"/>
-              </a:rPr>
               <a:t>El ecosistema de leaks underground</a:t>
             </a:r>
           </a:p>
@@ -5327,7 +5321,7 @@
                 <a:solidFill>
                   <a:srgbClr val="D6DAE2"/>
                 </a:solidFill>
-                <a:latin typeface="Calibri"/>
+                <a:latin typeface="Arial"/>
               </a:rPr>
               <a:t>De dónde vienen los datos y qué encontramos</a:t>
             </a:r>
@@ -5338,7 +5332,7 @@
                 <a:solidFill>
                   <a:srgbClr val="9AA3B5"/>
                 </a:solidFill>
-                <a:latin typeface="Calibri"/>
+                <a:latin typeface="Arial"/>
               </a:rPr>
               <a:t>CSBC26 · Bloque 0 · 45 min</a:t>
             </a:r>
@@ -5378,34 +5372,31 @@
           <a:bodyPr wrap="square"/>
           <a:lstStyle/>
           <a:p>
+            <a:pPr algn="ctr"/>
             <a:r>
               <a:rPr sz="1300" b="1">
                 <a:solidFill>
-                  <a:srgbClr val="E32B3D"/>
+                  <a:srgbClr val="CD2D37"/>
                 </a:solidFill>
-                <a:latin typeface="Calibri"/>
+                <a:latin typeface="Arial"/>
               </a:rPr>
               <a:t>SECCIÓN 3</a:t>
             </a:r>
           </a:p>
           <a:p>
-            <a:r>
-              <a:rPr sz="3000" b="1">
-                <a:solidFill>
-                  <a:srgbClr val="FFFFFF"/>
-                </a:solidFill>
-                <a:latin typeface="Calibri"/>
-              </a:rPr>
+            <a:pPr algn="ctr"/>
+            <a:r>
               <a:t>El ecosistema como red</a:t>
             </a:r>
           </a:p>
           <a:p>
+            <a:pPr algn="ctr"/>
             <a:r>
               <a:rPr sz="1600">
                 <a:solidFill>
                   <a:srgbClr val="D6DAE2"/>
                 </a:solidFill>
-                <a:latin typeface="Calibri"/>
+                <a:latin typeface="Arial"/>
               </a:rPr>
               <a:t>Plataformas que se monitorizan entre sí</a:t>
             </a:r>
@@ -5446,12 +5437,6 @@
           <a:lstStyle/>
           <a:p>
             <a:r>
-              <a:rPr sz="2400" b="1">
-                <a:solidFill>
-                  <a:srgbClr val="1A1A2E"/>
-                </a:solidFill>
-                <a:latin typeface="Calibri"/>
-              </a:rPr>
               <a:t>La paradoja del ecosistema de leaks</a:t>
             </a:r>
           </a:p>
@@ -5467,92 +5452,43 @@
             <p:ph type="body" idx="16" sz="quarter"/>
           </p:nvPr>
         </p:nvSpPr>
-        <p:spPr/>
+        <p:spPr>
+          <a:xfrm>
+            <a:off x="1073427" y="2077576"/>
+            <a:ext cx="10084904" cy="3507298"/>
+          </a:xfrm>
+        </p:spPr>
         <p:txBody>
           <a:bodyPr wrap="square"/>
           <a:lstStyle/>
           <a:p>
-            <a:pPr algn="l" marL="0" indent="-228600">
-              <a:buNone/>
-            </a:pPr>
-            <a:r>
-              <a:rPr sz="1900" b="0">
-                <a:solidFill>
-                  <a:srgbClr val="333844"/>
-                </a:solidFill>
-                <a:latin typeface="Calibri"/>
-              </a:rPr>
-              <a:t>▸  Los foros que distribuyen breaches son ellos mismos brecheados</a:t>
-            </a:r>
-          </a:p>
-          <a:p>
-            <a:pPr algn="l" marL="0" indent="-228600">
-              <a:buNone/>
-            </a:pPr>
-            <a:r>
-              <a:rPr sz="1900" b="0">
-                <a:solidFill>
-                  <a:srgbClr val="333844"/>
-                </a:solidFill>
-                <a:latin typeface="Calibri"/>
-              </a:rPr>
-              <a:t>▸  RaidForums distribuía leaks → fue seized por Europol en 2022 → su propia BD fue publicada</a:t>
-            </a:r>
-          </a:p>
-          <a:p>
-            <a:pPr algn="l" marL="0" indent="-228600">
-              <a:buNone/>
-            </a:pPr>
-            <a:r>
-              <a:rPr sz="1900" b="0">
-                <a:solidFill>
-                  <a:srgbClr val="333844"/>
-                </a:solidFill>
-                <a:latin typeface="Calibri"/>
-              </a:rPr>
-              <a:t>▸  BreachForums reemplazó a RaidForums → fue seized en 2023 y 2024</a:t>
-            </a:r>
-          </a:p>
-          <a:p>
-            <a:pPr algn="l" marL="0" indent="-228600">
-              <a:buNone/>
-            </a:pPr>
-            <a:r>
-              <a:rPr sz="1900" b="0">
-                <a:solidFill>
-                  <a:srgbClr val="333844"/>
-                </a:solidFill>
-                <a:latin typeface="Calibri"/>
-              </a:rPr>
-              <a:t>▸  Los operadores migran de plataforma en plataforma — los handles persisten aunque la plataforma muera</a:t>
-            </a:r>
-          </a:p>
-          <a:p>
-            <a:pPr algn="l" marL="0" indent="-228600">
-              <a:buNone/>
-            </a:pPr>
-            <a:r>
-              <a:rPr sz="1900" b="0">
-                <a:solidFill>
-                  <a:srgbClr val="333844"/>
-                </a:solidFill>
-                <a:latin typeface="Calibri"/>
-              </a:rPr>
-              <a:t>▸  Esto crea una cadena de datos: el mismo actor puede aparecer en 5 plataformas distintas</a:t>
-            </a:r>
-          </a:p>
-          <a:p>
-            <a:pPr algn="l" marL="0" indent="-228600">
-              <a:buNone/>
-            </a:pPr>
-            <a:r>
-              <a:rPr sz="1900" b="0">
-                <a:solidFill>
-                  <a:srgbClr val="333844"/>
-                </a:solidFill>
-                <a:latin typeface="Calibri"/>
-              </a:rPr>
-              <a:t>▸  El ecosistema es autorreferencial: para investigarlo hay que estar dentro de él</a:t>
+            <a:r>
+              <a:t>Los foros que distribuyen breaches son ellos mismos brecheados</a:t>
+            </a:r>
+          </a:p>
+          <a:p>
+            <a:r>
+              <a:t>RaidForums distribuía leaks → fue seized por Europol en 2022 → su propia BD fue publicada</a:t>
+            </a:r>
+          </a:p>
+          <a:p>
+            <a:r>
+              <a:t>BreachForums reemplazó a RaidForums → fue seized en 2023 y 2024</a:t>
+            </a:r>
+          </a:p>
+          <a:p>
+            <a:r>
+              <a:t>Los operadores migran de plataforma en plataforma — los handles persisten aunque la plataforma muera</a:t>
+            </a:r>
+          </a:p>
+          <a:p>
+            <a:r>
+              <a:t>Esto crea una cadena de datos: el mismo actor puede aparecer en 5 plataformas distintas</a:t>
+            </a:r>
+          </a:p>
+          <a:p>
+            <a:r>
+              <a:t>El ecosistema es autorreferencial: para investigarlo hay que estar dentro de él</a:t>
             </a:r>
           </a:p>
         </p:txBody>
@@ -5591,12 +5527,6 @@
           <a:lstStyle/>
           <a:p>
             <a:r>
-              <a:rPr sz="2400" b="1">
-                <a:solidFill>
-                  <a:srgbClr val="1A1A2E"/>
-                </a:solidFill>
-                <a:latin typeface="Calibri"/>
-              </a:rPr>
               <a:t>Dos tipos de valor analítico</a:t>
             </a:r>
           </a:p>
@@ -5627,7 +5557,7 @@
         </p:nvSpPr>
         <p:spPr>
           <a:xfrm>
-            <a:off x="1051560" y="1691640"/>
+            <a:off x="1051560" y="2194560"/>
             <a:ext cx="4846320" cy="411480"/>
           </a:xfrm>
           <a:prstGeom prst="rect">
@@ -5645,9 +5575,9 @@
             <a:r>
               <a:rPr sz="1600" b="1">
                 <a:solidFill>
-                  <a:srgbClr val="E32B3D"/>
+                  <a:srgbClr val="CD2D37"/>
                 </a:solidFill>
-                <a:latin typeface="Calibri"/>
+                <a:latin typeface="Arial"/>
               </a:rPr>
               <a:t>Valor inmediato</a:t>
             </a:r>
@@ -5662,8 +5592,8 @@
         </p:nvSpPr>
         <p:spPr>
           <a:xfrm>
-            <a:off x="1051560" y="2148840"/>
-            <a:ext cx="4846320" cy="3840480"/>
+            <a:off x="1051560" y="2651760"/>
+            <a:ext cx="4846320" cy="3337560"/>
           </a:xfrm>
           <a:prstGeom prst="rect">
             <a:avLst/>
@@ -5679,9 +5609,9 @@
             <a:r>
               <a:rPr sz="1600">
                 <a:solidFill>
-                  <a:srgbClr val="333844"/>
+                  <a:srgbClr val="465461"/>
                 </a:solidFill>
-                <a:latin typeface="Calibri"/>
+                <a:latin typeface="Arial"/>
               </a:rPr>
               <a:t>▸  Credenciales activas para acceso</a:t>
             </a:r>
@@ -5690,9 +5620,9 @@
             <a:r>
               <a:rPr sz="1600">
                 <a:solidFill>
-                  <a:srgbClr val="333844"/>
+                  <a:srgbClr val="465461"/>
                 </a:solidFill>
-                <a:latin typeface="Calibri"/>
+                <a:latin typeface="Arial"/>
               </a:rPr>
               <a:t>▸  IPs y dominios de infraestructura</a:t>
             </a:r>
@@ -5701,9 +5631,9 @@
             <a:r>
               <a:rPr sz="1600">
                 <a:solidFill>
-                  <a:srgbClr val="333844"/>
+                  <a:srgbClr val="465461"/>
                 </a:solidFill>
-                <a:latin typeface="Calibri"/>
+                <a:latin typeface="Arial"/>
               </a:rPr>
               <a:t>▸  Datos personales para identificación</a:t>
             </a:r>
@@ -5712,9 +5642,9 @@
             <a:r>
               <a:rPr sz="1600">
                 <a:solidFill>
-                  <a:srgbClr val="333844"/>
+                  <a:srgbClr val="465461"/>
                 </a:solidFill>
-                <a:latin typeface="Calibri"/>
+                <a:latin typeface="Arial"/>
               </a:rPr>
               <a:t>▸  TTPs documentados (cómo operan)</a:t>
             </a:r>
@@ -5729,7 +5659,7 @@
         </p:nvSpPr>
         <p:spPr>
           <a:xfrm>
-            <a:off x="6217920" y="1691640"/>
+            <a:off x="6217920" y="2194560"/>
             <a:ext cx="4846320" cy="411480"/>
           </a:xfrm>
           <a:prstGeom prst="rect">
@@ -5747,9 +5677,9 @@
             <a:r>
               <a:rPr sz="1600" b="1">
                 <a:solidFill>
-                  <a:srgbClr val="E32B3D"/>
+                  <a:srgbClr val="CD2D37"/>
                 </a:solidFill>
-                <a:latin typeface="Calibri"/>
+                <a:latin typeface="Arial"/>
               </a:rPr>
               <a:t>Valor de inteligencia a largo plazo</a:t>
             </a:r>
@@ -5764,8 +5694,8 @@
         </p:nvSpPr>
         <p:spPr>
           <a:xfrm>
-            <a:off x="6217920" y="2148840"/>
-            <a:ext cx="4846320" cy="3840480"/>
+            <a:off x="6217920" y="2651760"/>
+            <a:ext cx="4846320" cy="3337560"/>
           </a:xfrm>
           <a:prstGeom prst="rect">
             <a:avLst/>
@@ -5781,9 +5711,9 @@
             <a:r>
               <a:rPr sz="1600">
                 <a:solidFill>
-                  <a:srgbClr val="333844"/>
+                  <a:srgbClr val="465461"/>
                 </a:solidFill>
-                <a:latin typeface="Calibri"/>
+                <a:latin typeface="Arial"/>
               </a:rPr>
               <a:t>▸  Patrones de comportamiento estables</a:t>
             </a:r>
@@ -5792,9 +5722,9 @@
             <a:r>
               <a:rPr sz="1600">
                 <a:solidFill>
-                  <a:srgbClr val="333844"/>
+                  <a:srgbClr val="465461"/>
                 </a:solidFill>
-                <a:latin typeface="Calibri"/>
+                <a:latin typeface="Arial"/>
               </a:rPr>
               <a:t>▸  Redes de confianza entre actores</a:t>
             </a:r>
@@ -5803,9 +5733,9 @@
             <a:r>
               <a:rPr sz="1600">
                 <a:solidFill>
-                  <a:srgbClr val="333844"/>
+                  <a:srgbClr val="465461"/>
                 </a:solidFill>
-                <a:latin typeface="Calibri"/>
+                <a:latin typeface="Arial"/>
               </a:rPr>
               <a:t>▸  Evolución de vocabulario y técnicas</a:t>
             </a:r>
@@ -5814,9 +5744,9 @@
             <a:r>
               <a:rPr sz="1600">
                 <a:solidFill>
-                  <a:srgbClr val="333844"/>
+                  <a:srgbClr val="465461"/>
                 </a:solidFill>
-                <a:latin typeface="Calibri"/>
+                <a:latin typeface="Arial"/>
               </a:rPr>
               <a:t>▸  Identidades cruzadas entre plataformas</a:t>
             </a:r>
@@ -5856,34 +5786,31 @@
           <a:bodyPr wrap="square"/>
           <a:lstStyle/>
           <a:p>
+            <a:pPr algn="ctr"/>
             <a:r>
               <a:rPr sz="1300" b="1">
                 <a:solidFill>
-                  <a:srgbClr val="E32B3D"/>
+                  <a:srgbClr val="CD2D37"/>
                 </a:solidFill>
-                <a:latin typeface="Calibri"/>
+                <a:latin typeface="Arial"/>
               </a:rPr>
               <a:t>SECCIÓN 1</a:t>
             </a:r>
           </a:p>
           <a:p>
-            <a:r>
-              <a:rPr sz="3000" b="1">
-                <a:solidFill>
-                  <a:srgbClr val="FFFFFF"/>
-                </a:solidFill>
-                <a:latin typeface="Calibri"/>
-              </a:rPr>
+            <a:pPr algn="ctr"/>
+            <a:r>
               <a:t>De dónde vienen los datos</a:t>
             </a:r>
           </a:p>
           <a:p>
+            <a:pPr algn="ctr"/>
             <a:r>
               <a:rPr sz="1600">
                 <a:solidFill>
                   <a:srgbClr val="D6DAE2"/>
                 </a:solidFill>
-                <a:latin typeface="Calibri"/>
+                <a:latin typeface="Arial"/>
               </a:rPr>
               <a:t>Tres vías principales de filtración</a:t>
             </a:r>
@@ -5924,12 +5851,6 @@
           <a:lstStyle/>
           <a:p>
             <a:r>
-              <a:rPr sz="2400" b="1">
-                <a:solidFill>
-                  <a:srgbClr val="1A1A2E"/>
-                </a:solidFill>
-                <a:latin typeface="Calibri"/>
-              </a:rPr>
               <a:t>¿Cómo llega un leak al espacio público?</a:t>
             </a:r>
           </a:p>
@@ -5945,78 +5866,38 @@
             <p:ph type="body" idx="16" sz="quarter"/>
           </p:nvPr>
         </p:nvSpPr>
-        <p:spPr/>
+        <p:spPr>
+          <a:xfrm>
+            <a:off x="1073427" y="2077576"/>
+            <a:ext cx="10084904" cy="3507298"/>
+          </a:xfrm>
+        </p:spPr>
         <p:txBody>
           <a:bodyPr wrap="square"/>
           <a:lstStyle/>
           <a:p>
-            <a:pPr algn="l" marL="0" indent="-228600">
-              <a:buNone/>
-            </a:pPr>
-            <a:r>
-              <a:rPr sz="1900" b="0">
-                <a:solidFill>
-                  <a:srgbClr val="333844"/>
-                </a:solidFill>
-                <a:latin typeface="Calibri"/>
-              </a:rPr>
-              <a:t>▸  Hackeo directo: explotación de vulnerabilidad en el servidor del foro</a:t>
-            </a:r>
-          </a:p>
-          <a:p>
-            <a:pPr algn="l" marL="0" indent="-228600">
-              <a:buNone/>
-            </a:pPr>
-            <a:r>
-              <a:rPr sz="1900" b="0">
-                <a:solidFill>
-                  <a:srgbClr val="333844"/>
-                </a:solidFill>
-                <a:latin typeface="Calibri"/>
-              </a:rPr>
-              <a:t>▸  Filtración interna: miembro descontento, admin que abandona, búsqueda de notoriedad</a:t>
-            </a:r>
-          </a:p>
-          <a:p>
-            <a:pPr algn="l" marL="0" indent="-228600">
-              <a:buNone/>
-            </a:pPr>
-            <a:r>
-              <a:rPr sz="1900" b="0">
-                <a:solidFill>
-                  <a:srgbClr val="333844"/>
-                </a:solidFill>
-                <a:latin typeface="Calibri"/>
-              </a:rPr>
-              <a:t>▸  Repositorios de redistribución: plataformas que actúan como mercado de breaches</a:t>
-            </a:r>
-          </a:p>
-          <a:p>
-            <a:pPr algn="l" marL="0" indent="-228600">
-              <a:buNone/>
-            </a:pPr>
-            <a:r>
-              <a:rPr sz="1900" b="0">
-                <a:solidFill>
-                  <a:srgbClr val="333844"/>
-                </a:solidFill>
-                <a:latin typeface="Calibri"/>
-              </a:rPr>
-              <a:t>▸  Una vez en circulación: Telegram especializado, foros underground, paste sites, dark web</a:t>
-            </a:r>
-          </a:p>
-          <a:p>
-            <a:pPr algn="l" marL="0" indent="-228600">
-              <a:buNone/>
-            </a:pPr>
-            <a:r>
-              <a:rPr sz="1900" b="0">
-                <a:solidFill>
-                  <a:srgbClr val="333844"/>
-                </a:solidFill>
-                <a:latin typeface="Calibri"/>
-              </a:rPr>
-              <a:t>▸  El mismo ecosistema que genera los datos también los redistribuye — y a su vez es brecheado</a:t>
+            <a:r>
+              <a:t>Hackeo directo: explotación de vulnerabilidad en el servidor del foro</a:t>
+            </a:r>
+          </a:p>
+          <a:p>
+            <a:r>
+              <a:t>Filtración interna: miembro descontento, admin que abandona, búsqueda de notoriedad</a:t>
+            </a:r>
+          </a:p>
+          <a:p>
+            <a:r>
+              <a:t>Repositorios de redistribución: plataformas que actúan como mercado de breaches</a:t>
+            </a:r>
+          </a:p>
+          <a:p>
+            <a:r>
+              <a:t>Una vez en circulación: Telegram especializado, foros underground, paste sites, dark web</a:t>
+            </a:r>
+          </a:p>
+          <a:p>
+            <a:r>
+              <a:t>El mismo ecosistema que genera los datos también los redistribuye — y a su vez es brecheado</a:t>
             </a:r>
           </a:p>
         </p:txBody>
@@ -6055,12 +5936,6 @@
           <a:lstStyle/>
           <a:p>
             <a:r>
-              <a:rPr sz="2400" b="1">
-                <a:solidFill>
-                  <a:srgbClr val="1A1A2E"/>
-                </a:solidFill>
-                <a:latin typeface="Calibri"/>
-              </a:rPr>
               <a:t>¿Qué encontramos en un leak?</a:t>
             </a:r>
           </a:p>
@@ -6076,78 +5951,38 @@
             <p:ph type="body" idx="16" sz="quarter"/>
           </p:nvPr>
         </p:nvSpPr>
-        <p:spPr/>
+        <p:spPr>
+          <a:xfrm>
+            <a:off x="1073427" y="2077576"/>
+            <a:ext cx="10084904" cy="3507298"/>
+          </a:xfrm>
+        </p:spPr>
         <p:txBody>
           <a:bodyPr wrap="square"/>
           <a:lstStyle/>
           <a:p>
-            <a:pPr algn="l" marL="0" indent="-228600">
-              <a:buNone/>
-            </a:pPr>
-            <a:r>
-              <a:rPr sz="1900" b="0">
-                <a:solidFill>
-                  <a:srgbClr val="333844"/>
-                </a:solidFill>
-                <a:latin typeface="Calibri"/>
-              </a:rPr>
-              <a:t>▸  Dumps de bases de datos: el grueso del material — usuarios, posts, IPs, emails, fechas</a:t>
-            </a:r>
-          </a:p>
-          <a:p>
-            <a:pPr algn="l" marL="0" indent="-228600">
-              <a:buNone/>
-            </a:pPr>
-            <a:r>
-              <a:rPr sz="1900" b="0">
-                <a:solidFill>
-                  <a:srgbClr val="333844"/>
-                </a:solidFill>
-                <a:latin typeface="Calibri"/>
-              </a:rPr>
-              <a:t>▸  Logs de chat internos: comunicaciones sin filtro entre operadores (el material más valioso)</a:t>
-            </a:r>
-          </a:p>
-          <a:p>
-            <a:pPr algn="l" marL="0" indent="-228600">
-              <a:buNone/>
-            </a:pPr>
-            <a:r>
-              <a:rPr sz="1900" b="0">
-                <a:solidFill>
-                  <a:srgbClr val="333844"/>
-                </a:solidFill>
-                <a:latin typeface="Calibri"/>
-              </a:rPr>
-              <a:t>▸  Flat files de credenciales: útiles para pivoting, pobres en contexto</a:t>
-            </a:r>
-          </a:p>
-          <a:p>
-            <a:pPr algn="l" marL="0" indent="-228600">
-              <a:buNone/>
-            </a:pPr>
-            <a:r>
-              <a:rPr sz="1900" b="0">
-                <a:solidFill>
-                  <a:srgbClr val="333844"/>
-                </a:solidFill>
-                <a:latin typeface="Calibri"/>
-              </a:rPr>
-              <a:t>▸  Source code filtrado: paneles de administración, herramientas de ataque</a:t>
-            </a:r>
-          </a:p>
-          <a:p>
-            <a:pPr algn="l" marL="0" indent="-228600">
-              <a:buNone/>
-            </a:pPr>
-            <a:r>
-              <a:rPr sz="1900" b="0">
-                <a:solidFill>
-                  <a:srgbClr val="333844"/>
-                </a:solidFill>
-                <a:latin typeface="Calibri"/>
-              </a:rPr>
-              <a:t>▸  Configuraciones de infraestructura: IPs, dominios, credenciales de servicios</a:t>
+            <a:r>
+              <a:t>Dumps de bases de datos: el grueso del material — usuarios, posts, IPs, emails, fechas</a:t>
+            </a:r>
+          </a:p>
+          <a:p>
+            <a:r>
+              <a:t>Logs de chat internos: comunicaciones sin filtro entre operadores (el material más valioso)</a:t>
+            </a:r>
+          </a:p>
+          <a:p>
+            <a:r>
+              <a:t>Flat files de credenciales: útiles para pivoting, pobres en contexto</a:t>
+            </a:r>
+          </a:p>
+          <a:p>
+            <a:r>
+              <a:t>Source code filtrado: paneles de administración, herramientas de ataque</a:t>
+            </a:r>
+          </a:p>
+          <a:p>
+            <a:r>
+              <a:t>Configuraciones de infraestructura: IPs, dominios, credenciales de servicios</a:t>
             </a:r>
           </a:p>
         </p:txBody>
@@ -6186,12 +6021,6 @@
           <a:lstStyle/>
           <a:p>
             <a:r>
-              <a:rPr sz="2400" b="1">
-                <a:solidFill>
-                  <a:srgbClr val="1A1A2E"/>
-                </a:solidFill>
-                <a:latin typeface="Calibri"/>
-              </a:rPr>
               <a:t>Tier list — utilidad para investigación</a:t>
             </a:r>
           </a:p>
@@ -6222,14 +6051,14 @@
         </p:nvSpPr>
         <p:spPr>
           <a:xfrm>
-            <a:off x="1051560" y="1645920"/>
+            <a:off x="1051560" y="2148840"/>
             <a:ext cx="10058400" cy="365760"/>
           </a:xfrm>
           <a:prstGeom prst="rect">
             <a:avLst/>
           </a:prstGeom>
           <a:solidFill>
-            <a:srgbClr val="E32B3D"/>
+            <a:srgbClr val="CD2D37"/>
           </a:solidFill>
           <a:ln>
             <a:noFill/>
@@ -6265,7 +6094,7 @@
         </p:nvSpPr>
         <p:spPr>
           <a:xfrm>
-            <a:off x="1097280" y="1700920"/>
+            <a:off x="1097280" y="2203840"/>
             <a:ext cx="3261360" cy="365760"/>
           </a:xfrm>
           <a:prstGeom prst="rect">
@@ -6285,7 +6114,7 @@
                 <a:solidFill>
                   <a:srgbClr val="FFFFFF"/>
                 </a:solidFill>
-                <a:latin typeface="Calibri"/>
+                <a:latin typeface="Arial"/>
               </a:rPr>
               <a:t>Tier</a:t>
             </a:r>
@@ -6300,7 +6129,7 @@
         </p:nvSpPr>
         <p:spPr>
           <a:xfrm>
-            <a:off x="4450080" y="1700920"/>
+            <a:off x="4450080" y="2203840"/>
             <a:ext cx="3261360" cy="365760"/>
           </a:xfrm>
           <a:prstGeom prst="rect">
@@ -6320,7 +6149,7 @@
                 <a:solidFill>
                   <a:srgbClr val="FFFFFF"/>
                 </a:solidFill>
-                <a:latin typeface="Calibri"/>
+                <a:latin typeface="Arial"/>
               </a:rPr>
               <a:t>Tipo</a:t>
             </a:r>
@@ -6335,7 +6164,7 @@
         </p:nvSpPr>
         <p:spPr>
           <a:xfrm>
-            <a:off x="7802880" y="1700920"/>
+            <a:off x="7802880" y="2203840"/>
             <a:ext cx="3261360" cy="365760"/>
           </a:xfrm>
           <a:prstGeom prst="rect">
@@ -6355,7 +6184,7 @@
                 <a:solidFill>
                   <a:srgbClr val="FFFFFF"/>
                 </a:solidFill>
-                <a:latin typeface="Calibri"/>
+                <a:latin typeface="Arial"/>
               </a:rPr>
               <a:t>Por qué</a:t>
             </a:r>
@@ -6370,7 +6199,7 @@
         </p:nvSpPr>
         <p:spPr>
           <a:xfrm>
-            <a:off x="1051560" y="2011680"/>
+            <a:off x="1051560" y="2514600"/>
             <a:ext cx="10058400" cy="440689"/>
           </a:xfrm>
           <a:prstGeom prst="rect">
@@ -6413,7 +6242,7 @@
         </p:nvSpPr>
         <p:spPr>
           <a:xfrm>
-            <a:off x="1097280" y="2051680"/>
+            <a:off x="1097280" y="2554600"/>
             <a:ext cx="3261360" cy="440689"/>
           </a:xfrm>
           <a:prstGeom prst="rect">
@@ -6431,9 +6260,9 @@
             <a:r>
               <a:rPr sz="1100" b="0">
                 <a:solidFill>
-                  <a:srgbClr val="333844"/>
+                  <a:srgbClr val="465461"/>
                 </a:solidFill>
-                <a:latin typeface="Calibri"/>
+                <a:latin typeface="Arial"/>
               </a:rPr>
               <a:t>S</a:t>
             </a:r>
@@ -6448,7 +6277,7 @@
         </p:nvSpPr>
         <p:spPr>
           <a:xfrm>
-            <a:off x="4450080" y="2051680"/>
+            <a:off x="4450080" y="2554600"/>
             <a:ext cx="3261360" cy="440689"/>
           </a:xfrm>
           <a:prstGeom prst="rect">
@@ -6466,9 +6295,9 @@
             <a:r>
               <a:rPr sz="1100" b="0">
                 <a:solidFill>
-                  <a:srgbClr val="333844"/>
+                  <a:srgbClr val="465461"/>
                 </a:solidFill>
-                <a:latin typeface="Calibri"/>
+                <a:latin typeface="Arial"/>
               </a:rPr>
               <a:t>Chat logs internos (Conti, BlackBasta)</a:t>
             </a:r>
@@ -6483,7 +6312,7 @@
         </p:nvSpPr>
         <p:spPr>
           <a:xfrm>
-            <a:off x="7802880" y="2051680"/>
+            <a:off x="7802880" y="2554600"/>
             <a:ext cx="3261360" cy="440689"/>
           </a:xfrm>
           <a:prstGeom prst="rect">
@@ -6501,9 +6330,9 @@
             <a:r>
               <a:rPr sz="1100" b="0">
                 <a:solidFill>
-                  <a:srgbClr val="333844"/>
+                  <a:srgbClr val="465461"/>
                 </a:solidFill>
-                <a:latin typeface="Calibri"/>
+                <a:latin typeface="Arial"/>
               </a:rPr>
               <a:t>Sin filtro entre operadores: estructura, TTPs, roles, conflictos</a:t>
             </a:r>
@@ -6518,7 +6347,7 @@
         </p:nvSpPr>
         <p:spPr>
           <a:xfrm>
-            <a:off x="1051560" y="2452370"/>
+            <a:off x="1051560" y="2955290"/>
             <a:ext cx="10058400" cy="615315"/>
           </a:xfrm>
           <a:prstGeom prst="rect">
@@ -6561,7 +6390,7 @@
         </p:nvSpPr>
         <p:spPr>
           <a:xfrm>
-            <a:off x="1097280" y="2492370"/>
+            <a:off x="1097280" y="2995290"/>
             <a:ext cx="3261360" cy="615315"/>
           </a:xfrm>
           <a:prstGeom prst="rect">
@@ -6579,9 +6408,9 @@
             <a:r>
               <a:rPr sz="1100" b="0">
                 <a:solidFill>
-                  <a:srgbClr val="333844"/>
+                  <a:srgbClr val="465461"/>
                 </a:solidFill>
-                <a:latin typeface="Calibri"/>
+                <a:latin typeface="Arial"/>
               </a:rPr>
               <a:t>A</a:t>
             </a:r>
@@ -6596,7 +6425,7 @@
         </p:nvSpPr>
         <p:spPr>
           <a:xfrm>
-            <a:off x="4450080" y="2492370"/>
+            <a:off x="4450080" y="2995290"/>
             <a:ext cx="3261360" cy="615315"/>
           </a:xfrm>
           <a:prstGeom prst="rect">
@@ -6614,9 +6443,9 @@
             <a:r>
               <a:rPr sz="1100" b="0">
                 <a:solidFill>
-                  <a:srgbClr val="333844"/>
+                  <a:srgbClr val="465461"/>
                 </a:solidFill>
-                <a:latin typeface="Calibri"/>
+                <a:latin typeface="Arial"/>
               </a:rPr>
               <a:t>Dumps SQL de foros</a:t>
             </a:r>
@@ -6631,7 +6460,7 @@
         </p:nvSpPr>
         <p:spPr>
           <a:xfrm>
-            <a:off x="7802880" y="2492370"/>
+            <a:off x="7802880" y="2995290"/>
             <a:ext cx="3261360" cy="615315"/>
           </a:xfrm>
           <a:prstGeom prst="rect">
@@ -6649,9 +6478,9 @@
             <a:r>
               <a:rPr sz="1100" b="0">
                 <a:solidFill>
-                  <a:srgbClr val="333844"/>
+                  <a:srgbClr val="465461"/>
                 </a:solidFill>
-                <a:latin typeface="Calibri"/>
+                <a:latin typeface="Arial"/>
               </a:rPr>
               <a:t>Usuarios, posts, IPs, fechas → red, atribución, correlación cross-foro</a:t>
             </a:r>
@@ -6666,7 +6495,7 @@
         </p:nvSpPr>
         <p:spPr>
           <a:xfrm>
-            <a:off x="1051560" y="3067685"/>
+            <a:off x="1051560" y="3570605"/>
             <a:ext cx="10058400" cy="440689"/>
           </a:xfrm>
           <a:prstGeom prst="rect">
@@ -6709,7 +6538,7 @@
         </p:nvSpPr>
         <p:spPr>
           <a:xfrm>
-            <a:off x="1097280" y="3107685"/>
+            <a:off x="1097280" y="3610605"/>
             <a:ext cx="3261360" cy="440689"/>
           </a:xfrm>
           <a:prstGeom prst="rect">
@@ -6727,9 +6556,9 @@
             <a:r>
               <a:rPr sz="1100" b="0">
                 <a:solidFill>
-                  <a:srgbClr val="333844"/>
+                  <a:srgbClr val="465461"/>
                 </a:solidFill>
-                <a:latin typeface="Calibri"/>
+                <a:latin typeface="Arial"/>
               </a:rPr>
               <a:t>B</a:t>
             </a:r>
@@ -6744,7 +6573,7 @@
         </p:nvSpPr>
         <p:spPr>
           <a:xfrm>
-            <a:off x="4450080" y="3107685"/>
+            <a:off x="4450080" y="3610605"/>
             <a:ext cx="3261360" cy="440689"/>
           </a:xfrm>
           <a:prstGeom prst="rect">
@@ -6762,9 +6591,9 @@
             <a:r>
               <a:rPr sz="1100" b="0">
                 <a:solidFill>
-                  <a:srgbClr val="333844"/>
+                  <a:srgbClr val="465461"/>
                 </a:solidFill>
-                <a:latin typeface="Calibri"/>
+                <a:latin typeface="Arial"/>
               </a:rPr>
               <a:t>Flat files de credenciales</a:t>
             </a:r>
@@ -6779,7 +6608,7 @@
         </p:nvSpPr>
         <p:spPr>
           <a:xfrm>
-            <a:off x="7802880" y="3107685"/>
+            <a:off x="7802880" y="3610605"/>
             <a:ext cx="3261360" cy="440689"/>
           </a:xfrm>
           <a:prstGeom prst="rect">
@@ -6797,9 +6626,9 @@
             <a:r>
               <a:rPr sz="1100" b="0">
                 <a:solidFill>
-                  <a:srgbClr val="333844"/>
+                  <a:srgbClr val="465461"/>
                 </a:solidFill>
-                <a:latin typeface="Calibri"/>
+                <a:latin typeface="Arial"/>
               </a:rPr>
               <a:t>Útiles para pivoting, sin narrativa ni contexto</a:t>
             </a:r>
@@ -6814,7 +6643,7 @@
         </p:nvSpPr>
         <p:spPr>
           <a:xfrm>
-            <a:off x="1051560" y="3508375"/>
+            <a:off x="1051560" y="4011294"/>
             <a:ext cx="10058400" cy="440689"/>
           </a:xfrm>
           <a:prstGeom prst="rect">
@@ -6857,7 +6686,7 @@
         </p:nvSpPr>
         <p:spPr>
           <a:xfrm>
-            <a:off x="1097280" y="3548375"/>
+            <a:off x="1097280" y="4051294"/>
             <a:ext cx="3261360" cy="440689"/>
           </a:xfrm>
           <a:prstGeom prst="rect">
@@ -6875,9 +6704,9 @@
             <a:r>
               <a:rPr sz="1100" b="0">
                 <a:solidFill>
-                  <a:srgbClr val="333844"/>
+                  <a:srgbClr val="465461"/>
                 </a:solidFill>
-                <a:latin typeface="Calibri"/>
+                <a:latin typeface="Arial"/>
               </a:rPr>
               <a:t>C</a:t>
             </a:r>
@@ -6892,7 +6721,7 @@
         </p:nvSpPr>
         <p:spPr>
           <a:xfrm>
-            <a:off x="4450080" y="3548375"/>
+            <a:off x="4450080" y="4051294"/>
             <a:ext cx="3261360" cy="440689"/>
           </a:xfrm>
           <a:prstGeom prst="rect">
@@ -6910,9 +6739,9 @@
             <a:r>
               <a:rPr sz="1100" b="0">
                 <a:solidFill>
-                  <a:srgbClr val="333844"/>
+                  <a:srgbClr val="465461"/>
                 </a:solidFill>
-                <a:latin typeface="Calibri"/>
+                <a:latin typeface="Arial"/>
               </a:rPr>
               <a:t>Source code / configs</a:t>
             </a:r>
@@ -6927,7 +6756,7 @@
         </p:nvSpPr>
         <p:spPr>
           <a:xfrm>
-            <a:off x="7802880" y="3548375"/>
+            <a:off x="7802880" y="4051294"/>
             <a:ext cx="3261360" cy="440689"/>
           </a:xfrm>
           <a:prstGeom prst="rect">
@@ -6945,9 +6774,9 @@
             <a:r>
               <a:rPr sz="1100" b="0">
                 <a:solidFill>
-                  <a:srgbClr val="333844"/>
+                  <a:srgbClr val="465461"/>
                 </a:solidFill>
-                <a:latin typeface="Calibri"/>
+                <a:latin typeface="Arial"/>
               </a:rPr>
               <a:t>Muy específicos, requieren expertise técnico profundo</a:t>
             </a:r>
@@ -6982,7 +6811,7 @@
                 <a:solidFill>
                   <a:srgbClr val="707888"/>
                 </a:solidFill>
-                <a:latin typeface="Calibri"/>
+                <a:latin typeface="Arial"/>
               </a:rPr>
               <a:t>ℹ  No todos los leaks son iguales. Un post con info de acceso a infraestructura crítica vale más que 10K posts de relleno.</a:t>
             </a:r>
@@ -7022,34 +6851,31 @@
           <a:bodyPr wrap="square"/>
           <a:lstStyle/>
           <a:p>
+            <a:pPr algn="ctr"/>
             <a:r>
               <a:rPr sz="1300" b="1">
                 <a:solidFill>
-                  <a:srgbClr val="E32B3D"/>
+                  <a:srgbClr val="CD2D37"/>
                 </a:solidFill>
-                <a:latin typeface="Calibri"/>
+                <a:latin typeface="Arial"/>
               </a:rPr>
               <a:t>SECCIÓN 2</a:t>
             </a:r>
           </a:p>
           <a:p>
-            <a:r>
-              <a:rPr sz="3000" b="1">
-                <a:solidFill>
-                  <a:srgbClr val="FFFFFF"/>
-                </a:solidFill>
-                <a:latin typeface="Calibri"/>
-              </a:rPr>
+            <a:pPr algn="ctr"/>
+            <a:r>
               <a:t>Formatos y su realidad técnica</a:t>
             </a:r>
           </a:p>
           <a:p>
+            <a:pPr algn="ctr"/>
             <a:r>
               <a:rPr sz="1600">
                 <a:solidFill>
                   <a:srgbClr val="D6DAE2"/>
                 </a:solidFill>
-                <a:latin typeface="Calibri"/>
+                <a:latin typeface="Arial"/>
               </a:rPr>
               <a:t>Los datos rara vez llegan limpios</a:t>
             </a:r>
@@ -7090,12 +6916,6 @@
           <a:lstStyle/>
           <a:p>
             <a:r>
-              <a:rPr sz="2400" b="1">
-                <a:solidFill>
-                  <a:srgbClr val="1A1A2E"/>
-                </a:solidFill>
-                <a:latin typeface="Calibri"/>
-              </a:rPr>
               <a:t>Formatos habituales — lo que nos encontramos realmente</a:t>
             </a:r>
           </a:p>
@@ -7111,92 +6931,43 @@
             <p:ph type="body" idx="16" sz="quarter"/>
           </p:nvPr>
         </p:nvSpPr>
-        <p:spPr/>
+        <p:spPr>
+          <a:xfrm>
+            <a:off x="1073427" y="2580496"/>
+            <a:ext cx="10084904" cy="3004378"/>
+          </a:xfrm>
+        </p:spPr>
         <p:txBody>
           <a:bodyPr wrap="square"/>
           <a:lstStyle/>
           <a:p>
-            <a:pPr algn="l" marL="0" indent="-228600">
-              <a:buNone/>
-            </a:pPr>
-            <a:r>
-              <a:rPr sz="1900" b="0">
-                <a:solidFill>
-                  <a:srgbClr val="333844"/>
-                </a:solidFill>
-                <a:latin typeface="Calibri"/>
-              </a:rPr>
-              <a:t>▸  vBulletin SQL: formato dominante en foros underground 2000-2020, encoding cp1251 (cirílico)</a:t>
-            </a:r>
-          </a:p>
-          <a:p>
-            <a:pPr algn="l" marL="0" indent="-228600">
-              <a:buNone/>
-            </a:pPr>
-            <a:r>
-              <a:rPr sz="1900" b="0">
-                <a:solidFill>
-                  <a:srgbClr val="333844"/>
-                </a:solidFill>
-                <a:latin typeface="Calibri"/>
-              </a:rPr>
-              <a:t>▸  IPS (Invision Power Suite): prefijos de tabla variables, varias versiones mayores con schema distinto</a:t>
-            </a:r>
-          </a:p>
-          <a:p>
-            <a:pPr algn="l" marL="0" indent="-228600">
-              <a:buNone/>
-            </a:pPr>
-            <a:r>
-              <a:rPr sz="1900" b="0">
-                <a:solidFill>
-                  <a:srgbClr val="333844"/>
-                </a:solidFill>
-                <a:latin typeface="Calibri"/>
-              </a:rPr>
-              <a:t>▸  MyBB: open source, más predecible, pero con variantes de prefijo por instalación</a:t>
-            </a:r>
-          </a:p>
-          <a:p>
-            <a:pPr algn="l" marL="0" indent="-228600">
-              <a:buNone/>
-            </a:pPr>
-            <a:r>
-              <a:rPr sz="1900" b="0">
-                <a:solidFill>
-                  <a:srgbClr val="333844"/>
-                </a:solidFill>
-                <a:latin typeface="Calibri"/>
-              </a:rPr>
-              <a:t>▸  JSON estructurado: chat logs modernos (Telegram, Slack/Rocket.Chat) — más limpio pero campo-inconsistente</a:t>
-            </a:r>
-          </a:p>
-          <a:p>
-            <a:pPr algn="l" marL="0" indent="-228600">
-              <a:buNone/>
-            </a:pPr>
-            <a:r>
-              <a:rPr sz="1900" b="0">
-                <a:solidFill>
-                  <a:srgbClr val="333844"/>
-                </a:solidFill>
-                <a:latin typeface="Calibri"/>
-              </a:rPr>
-              <a:t>▸  Flat files: sin schema, delimitadores arbitrarios, calidad de dato muy variable</a:t>
-            </a:r>
-          </a:p>
-          <a:p>
-            <a:pPr algn="l" marL="0" indent="-228600">
-              <a:buNone/>
-            </a:pPr>
-            <a:r>
-              <a:rPr sz="1900" b="0">
-                <a:solidFill>
-                  <a:srgbClr val="333844"/>
-                </a:solidFill>
-                <a:latin typeface="Calibri"/>
-              </a:rPr>
-              <a:t>▸  En la práctica: encodings mixtos, tablas renombradas, backups incompletos</a:t>
+            <a:r>
+              <a:t>vBulletin SQL: formato dominante en foros underground 2000-2020, encoding cp1251 (cirílico)</a:t>
+            </a:r>
+          </a:p>
+          <a:p>
+            <a:r>
+              <a:t>IPS (Invision Power Suite): prefijos de tabla variables, varias versiones mayores con schema distinto</a:t>
+            </a:r>
+          </a:p>
+          <a:p>
+            <a:r>
+              <a:t>MyBB: open source, más predecible, pero con variantes de prefijo por instalación</a:t>
+            </a:r>
+          </a:p>
+          <a:p>
+            <a:r>
+              <a:t>JSON estructurado: chat logs modernos (Telegram, Slack/Rocket.Chat) — más limpio pero campo-inconsistente</a:t>
+            </a:r>
+          </a:p>
+          <a:p>
+            <a:r>
+              <a:t>Flat files: sin schema, delimitadores arbitrarios, calidad de dato muy variable</a:t>
+            </a:r>
+          </a:p>
+          <a:p>
+            <a:r>
+              <a:t>En la práctica: encodings mixtos, tablas renombradas, backups incompletos</a:t>
             </a:r>
           </a:p>
         </p:txBody>
@@ -7235,12 +7006,6 @@
           <a:lstStyle/>
           <a:p>
             <a:r>
-              <a:rPr sz="2400" b="1">
-                <a:solidFill>
-                  <a:srgbClr val="1A1A2E"/>
-                </a:solidFill>
-                <a:latin typeface="Calibri"/>
-              </a:rPr>
               <a:t>Tier list — facilidad técnica de procesamiento</a:t>
             </a:r>
           </a:p>
@@ -7271,14 +7036,14 @@
         </p:nvSpPr>
         <p:spPr>
           <a:xfrm>
-            <a:off x="1051560" y="1645920"/>
+            <a:off x="1051560" y="2148840"/>
             <a:ext cx="10058400" cy="365760"/>
           </a:xfrm>
           <a:prstGeom prst="rect">
             <a:avLst/>
           </a:prstGeom>
           <a:solidFill>
-            <a:srgbClr val="E32B3D"/>
+            <a:srgbClr val="CD2D37"/>
           </a:solidFill>
           <a:ln>
             <a:noFill/>
@@ -7314,7 +7079,7 @@
         </p:nvSpPr>
         <p:spPr>
           <a:xfrm>
-            <a:off x="1097280" y="1700920"/>
+            <a:off x="1097280" y="2203840"/>
             <a:ext cx="3261360" cy="365760"/>
           </a:xfrm>
           <a:prstGeom prst="rect">
@@ -7334,7 +7099,7 @@
                 <a:solidFill>
                   <a:srgbClr val="FFFFFF"/>
                 </a:solidFill>
-                <a:latin typeface="Calibri"/>
+                <a:latin typeface="Arial"/>
               </a:rPr>
               <a:t>Tier</a:t>
             </a:r>
@@ -7349,7 +7114,7 @@
         </p:nvSpPr>
         <p:spPr>
           <a:xfrm>
-            <a:off x="4450080" y="1700920"/>
+            <a:off x="4450080" y="2203840"/>
             <a:ext cx="3261360" cy="365760"/>
           </a:xfrm>
           <a:prstGeom prst="rect">
@@ -7369,7 +7134,7 @@
                 <a:solidFill>
                   <a:srgbClr val="FFFFFF"/>
                 </a:solidFill>
-                <a:latin typeface="Calibri"/>
+                <a:latin typeface="Arial"/>
               </a:rPr>
               <a:t>Formato</a:t>
             </a:r>
@@ -7384,7 +7149,7 @@
         </p:nvSpPr>
         <p:spPr>
           <a:xfrm>
-            <a:off x="7802880" y="1700920"/>
+            <a:off x="7802880" y="2203840"/>
             <a:ext cx="3261360" cy="365760"/>
           </a:xfrm>
           <a:prstGeom prst="rect">
@@ -7404,7 +7169,7 @@
                 <a:solidFill>
                   <a:srgbClr val="FFFFFF"/>
                 </a:solidFill>
-                <a:latin typeface="Calibri"/>
+                <a:latin typeface="Arial"/>
               </a:rPr>
               <a:t>Por qué</a:t>
             </a:r>
@@ -7419,7 +7184,7 @@
         </p:nvSpPr>
         <p:spPr>
           <a:xfrm>
-            <a:off x="1051560" y="2011680"/>
+            <a:off x="1051560" y="2514600"/>
             <a:ext cx="10058400" cy="440689"/>
           </a:xfrm>
           <a:prstGeom prst="rect">
@@ -7462,7 +7227,7 @@
         </p:nvSpPr>
         <p:spPr>
           <a:xfrm>
-            <a:off x="1097280" y="2051680"/>
+            <a:off x="1097280" y="2554600"/>
             <a:ext cx="3261360" cy="440689"/>
           </a:xfrm>
           <a:prstGeom prst="rect">
@@ -7480,9 +7245,9 @@
             <a:r>
               <a:rPr sz="1100" b="0">
                 <a:solidFill>
-                  <a:srgbClr val="333844"/>
+                  <a:srgbClr val="465461"/>
                 </a:solidFill>
-                <a:latin typeface="Calibri"/>
+                <a:latin typeface="Arial"/>
               </a:rPr>
               <a:t>S</a:t>
             </a:r>
@@ -7497,7 +7262,7 @@
         </p:nvSpPr>
         <p:spPr>
           <a:xfrm>
-            <a:off x="4450080" y="2051680"/>
+            <a:off x="4450080" y="2554600"/>
             <a:ext cx="3261360" cy="440689"/>
           </a:xfrm>
           <a:prstGeom prst="rect">
@@ -7515,9 +7280,9 @@
             <a:r>
               <a:rPr sz="1100" b="0">
                 <a:solidFill>
-                  <a:srgbClr val="333844"/>
+                  <a:srgbClr val="465461"/>
                 </a:solidFill>
-                <a:latin typeface="Calibri"/>
+                <a:latin typeface="Arial"/>
               </a:rPr>
               <a:t>JSON estructurado (Telegram, chat logs)</a:t>
             </a:r>
@@ -7532,7 +7297,7 @@
         </p:nvSpPr>
         <p:spPr>
           <a:xfrm>
-            <a:off x="7802880" y="2051680"/>
+            <a:off x="7802880" y="2554600"/>
             <a:ext cx="3261360" cy="440689"/>
           </a:xfrm>
           <a:prstGeom prst="rect">
@@ -7550,9 +7315,9 @@
             <a:r>
               <a:rPr sz="1100" b="0">
                 <a:solidFill>
-                  <a:srgbClr val="333844"/>
+                  <a:srgbClr val="465461"/>
                 </a:solidFill>
-                <a:latin typeface="Calibri"/>
+                <a:latin typeface="Arial"/>
               </a:rPr>
               <a:t>Schema conocido, parseable directamente, encoding limpio</a:t>
             </a:r>
@@ -7567,7 +7332,7 @@
         </p:nvSpPr>
         <p:spPr>
           <a:xfrm>
-            <a:off x="1051560" y="2452370"/>
+            <a:off x="1051560" y="2955290"/>
             <a:ext cx="10058400" cy="440689"/>
           </a:xfrm>
           <a:prstGeom prst="rect">
@@ -7610,7 +7375,7 @@
         </p:nvSpPr>
         <p:spPr>
           <a:xfrm>
-            <a:off x="1097280" y="2492370"/>
+            <a:off x="1097280" y="2995290"/>
             <a:ext cx="3261360" cy="440689"/>
           </a:xfrm>
           <a:prstGeom prst="rect">
@@ -7628,9 +7393,9 @@
             <a:r>
               <a:rPr sz="1100" b="0">
                 <a:solidFill>
-                  <a:srgbClr val="333844"/>
+                  <a:srgbClr val="465461"/>
                 </a:solidFill>
-                <a:latin typeface="Calibri"/>
+                <a:latin typeface="Arial"/>
               </a:rPr>
               <a:t>A</a:t>
             </a:r>
@@ -7645,7 +7410,7 @@
         </p:nvSpPr>
         <p:spPr>
           <a:xfrm>
-            <a:off x="4450080" y="2492370"/>
+            <a:off x="4450080" y="2995290"/>
             <a:ext cx="3261360" cy="440689"/>
           </a:xfrm>
           <a:prstGeom prst="rect">
@@ -7663,9 +7428,9 @@
             <a:r>
               <a:rPr sz="1100" b="0">
                 <a:solidFill>
-                  <a:srgbClr val="333844"/>
+                  <a:srgbClr val="465461"/>
                 </a:solidFill>
-                <a:latin typeface="Calibri"/>
+                <a:latin typeface="Arial"/>
               </a:rPr>
               <a:t>vBulletin / IPS estándar</a:t>
             </a:r>
@@ -7680,7 +7445,7 @@
         </p:nvSpPr>
         <p:spPr>
           <a:xfrm>
-            <a:off x="7802880" y="2492370"/>
+            <a:off x="7802880" y="2995290"/>
             <a:ext cx="3261360" cy="440689"/>
           </a:xfrm>
           <a:prstGeom prst="rect">
@@ -7698,9 +7463,9 @@
             <a:r>
               <a:rPr sz="1100" b="0">
                 <a:solidFill>
-                  <a:srgbClr val="333844"/>
+                  <a:srgbClr val="465461"/>
                 </a:solidFill>
-                <a:latin typeface="Calibri"/>
+                <a:latin typeface="Arial"/>
               </a:rPr>
               <a:t>Schema documentado, hay parsers, columnas predecibles</a:t>
             </a:r>
@@ -7715,7 +7480,7 @@
         </p:nvSpPr>
         <p:spPr>
           <a:xfrm>
-            <a:off x="1051560" y="2893060"/>
+            <a:off x="1051560" y="3395979"/>
             <a:ext cx="10058400" cy="440689"/>
           </a:xfrm>
           <a:prstGeom prst="rect">
@@ -7758,7 +7523,7 @@
         </p:nvSpPr>
         <p:spPr>
           <a:xfrm>
-            <a:off x="1097280" y="2933060"/>
+            <a:off x="1097280" y="3435979"/>
             <a:ext cx="3261360" cy="440689"/>
           </a:xfrm>
           <a:prstGeom prst="rect">
@@ -7776,9 +7541,9 @@
             <a:r>
               <a:rPr sz="1100" b="0">
                 <a:solidFill>
-                  <a:srgbClr val="333844"/>
+                  <a:srgbClr val="465461"/>
                 </a:solidFill>
-                <a:latin typeface="Calibri"/>
+                <a:latin typeface="Arial"/>
               </a:rPr>
               <a:t>B</a:t>
             </a:r>
@@ -7793,7 +7558,7 @@
         </p:nvSpPr>
         <p:spPr>
           <a:xfrm>
-            <a:off x="4450080" y="2933060"/>
+            <a:off x="4450080" y="3435979"/>
             <a:ext cx="3261360" cy="440689"/>
           </a:xfrm>
           <a:prstGeom prst="rect">
@@ -7811,9 +7576,9 @@
             <a:r>
               <a:rPr sz="1100" b="0">
                 <a:solidFill>
-                  <a:srgbClr val="333844"/>
+                  <a:srgbClr val="465461"/>
                 </a:solidFill>
-                <a:latin typeface="Calibri"/>
+                <a:latin typeface="Arial"/>
               </a:rPr>
               <a:t>vBulletin / IPS con variantes</a:t>
             </a:r>
@@ -7828,7 +7593,7 @@
         </p:nvSpPr>
         <p:spPr>
           <a:xfrm>
-            <a:off x="7802880" y="2933060"/>
+            <a:off x="7802880" y="3435979"/>
             <a:ext cx="3261360" cy="440689"/>
           </a:xfrm>
           <a:prstGeom prst="rect">
@@ -7846,9 +7611,9 @@
             <a:r>
               <a:rPr sz="1100" b="0">
                 <a:solidFill>
-                  <a:srgbClr val="333844"/>
+                  <a:srgbClr val="465461"/>
                 </a:solidFill>
-                <a:latin typeface="Calibri"/>
+                <a:latin typeface="Arial"/>
               </a:rPr>
               <a:t>Requiere detección automática de versión y prefijo</a:t>
             </a:r>
@@ -7863,7 +7628,7 @@
         </p:nvSpPr>
         <p:spPr>
           <a:xfrm>
-            <a:off x="1051560" y="3333749"/>
+            <a:off x="1051560" y="3836669"/>
             <a:ext cx="10058400" cy="440689"/>
           </a:xfrm>
           <a:prstGeom prst="rect">
@@ -7906,7 +7671,7 @@
         </p:nvSpPr>
         <p:spPr>
           <a:xfrm>
-            <a:off x="1097280" y="3373749"/>
+            <a:off x="1097280" y="3876669"/>
             <a:ext cx="3261360" cy="440689"/>
           </a:xfrm>
           <a:prstGeom prst="rect">
@@ -7924,9 +7689,9 @@
             <a:r>
               <a:rPr sz="1100" b="0">
                 <a:solidFill>
-                  <a:srgbClr val="333844"/>
+                  <a:srgbClr val="465461"/>
                 </a:solidFill>
-                <a:latin typeface="Calibri"/>
+                <a:latin typeface="Arial"/>
               </a:rPr>
               <a:t>C</a:t>
             </a:r>
@@ -7941,7 +7706,7 @@
         </p:nvSpPr>
         <p:spPr>
           <a:xfrm>
-            <a:off x="4450080" y="3373749"/>
+            <a:off x="4450080" y="3876669"/>
             <a:ext cx="3261360" cy="440689"/>
           </a:xfrm>
           <a:prstGeom prst="rect">
@@ -7959,9 +7724,9 @@
             <a:r>
               <a:rPr sz="1100" b="0">
                 <a:solidFill>
-                  <a:srgbClr val="333844"/>
+                  <a:srgbClr val="465461"/>
                 </a:solidFill>
-                <a:latin typeface="Calibri"/>
+                <a:latin typeface="Arial"/>
               </a:rPr>
               <a:t>Flat files delimitados</a:t>
             </a:r>
@@ -7976,7 +7741,7 @@
         </p:nvSpPr>
         <p:spPr>
           <a:xfrm>
-            <a:off x="7802880" y="3373749"/>
+            <a:off x="7802880" y="3876669"/>
             <a:ext cx="3261360" cy="440689"/>
           </a:xfrm>
           <a:prstGeom prst="rect">
@@ -7994,9 +7759,9 @@
             <a:r>
               <a:rPr sz="1100" b="0">
                 <a:solidFill>
-                  <a:srgbClr val="333844"/>
+                  <a:srgbClr val="465461"/>
                 </a:solidFill>
-                <a:latin typeface="Calibri"/>
+                <a:latin typeface="Arial"/>
               </a:rPr>
               <a:t>Hay que inferir el schema caso a caso — cada dump es diferente</a:t>
             </a:r>
@@ -8011,7 +7776,7 @@
         </p:nvSpPr>
         <p:spPr>
           <a:xfrm>
-            <a:off x="1051560" y="3774439"/>
+            <a:off x="1051560" y="4277359"/>
             <a:ext cx="10058400" cy="440689"/>
           </a:xfrm>
           <a:prstGeom prst="rect">
@@ -8054,7 +7819,7 @@
         </p:nvSpPr>
         <p:spPr>
           <a:xfrm>
-            <a:off x="1097280" y="3814439"/>
+            <a:off x="1097280" y="4317359"/>
             <a:ext cx="3261360" cy="440689"/>
           </a:xfrm>
           <a:prstGeom prst="rect">
@@ -8072,9 +7837,9 @@
             <a:r>
               <a:rPr sz="1100" b="0">
                 <a:solidFill>
-                  <a:srgbClr val="333844"/>
+                  <a:srgbClr val="465461"/>
                 </a:solidFill>
-                <a:latin typeface="Calibri"/>
+                <a:latin typeface="Arial"/>
               </a:rPr>
               <a:t>D</a:t>
             </a:r>
@@ -8089,7 +7854,7 @@
         </p:nvSpPr>
         <p:spPr>
           <a:xfrm>
-            <a:off x="4450080" y="3814439"/>
+            <a:off x="4450080" y="4317359"/>
             <a:ext cx="3261360" cy="440689"/>
           </a:xfrm>
           <a:prstGeom prst="rect">
@@ -8107,9 +7872,9 @@
             <a:r>
               <a:rPr sz="1100" b="0">
                 <a:solidFill>
-                  <a:srgbClr val="333844"/>
+                  <a:srgbClr val="465461"/>
                 </a:solidFill>
-                <a:latin typeface="Calibri"/>
+                <a:latin typeface="Arial"/>
               </a:rPr>
               <a:t>Dumps custom / propietarios</a:t>
             </a:r>
@@ -8124,7 +7889,7 @@
         </p:nvSpPr>
         <p:spPr>
           <a:xfrm>
-            <a:off x="7802880" y="3814439"/>
+            <a:off x="7802880" y="4317359"/>
             <a:ext cx="3261360" cy="440689"/>
           </a:xfrm>
           <a:prstGeom prst="rect">
@@ -8142,9 +7907,9 @@
             <a:r>
               <a:rPr sz="1100" b="0">
                 <a:solidFill>
-                  <a:srgbClr val="333844"/>
+                  <a:srgbClr val="465461"/>
                 </a:solidFill>
-                <a:latin typeface="Calibri"/>
+                <a:latin typeface="Arial"/>
               </a:rPr>
               <a:t>Sin documentación, requieren ingeniería inversa del schema</a:t>
             </a:r>
@@ -8185,12 +7950,6 @@
           <a:lstStyle/>
           <a:p>
             <a:r>
-              <a:rPr sz="2400" b="1">
-                <a:solidFill>
-                  <a:srgbClr val="1A1A2E"/>
-                </a:solidFill>
-                <a:latin typeface="Calibri"/>
-              </a:rPr>
               <a:t>El parser como primera línea de análisis</a:t>
             </a:r>
           </a:p>
@@ -8206,78 +7965,38 @@
             <p:ph type="body" idx="16" sz="quarter"/>
           </p:nvPr>
         </p:nvSpPr>
-        <p:spPr/>
+        <p:spPr>
+          <a:xfrm>
+            <a:off x="1073427" y="2077576"/>
+            <a:ext cx="10084904" cy="3507298"/>
+          </a:xfrm>
+        </p:spPr>
         <p:txBody>
           <a:bodyPr wrap="square"/>
           <a:lstStyle/>
           <a:p>
-            <a:pPr algn="l" marL="0" indent="-228600">
-              <a:buNone/>
-            </a:pPr>
-            <a:r>
-              <a:rPr sz="1900" b="0">
-                <a:solidFill>
-                  <a:srgbClr val="333844"/>
-                </a:solidFill>
-                <a:latin typeface="Calibri"/>
-              </a:rPr>
-              <a:t>▸  Un parser mal calibrado puede dejar fuera millones de registros sin advertencia</a:t>
-            </a:r>
-          </a:p>
-          <a:p>
-            <a:pPr algn="l" marL="0" indent="-228600">
-              <a:buNone/>
-            </a:pPr>
-            <a:r>
-              <a:rPr sz="1900" b="0">
-                <a:solidFill>
-                  <a:srgbClr val="333844"/>
-                </a:solidFill>
-                <a:latin typeface="Calibri"/>
-              </a:rPr>
-              <a:t>▸  Estrategia: auto-detección de versión + validación de recuento contra tablas de metadatos</a:t>
-            </a:r>
-          </a:p>
-          <a:p>
-            <a:pPr algn="l" marL="0" indent="-228600">
-              <a:buNone/>
-            </a:pPr>
-            <a:r>
-              <a:rPr sz="1900" b="0">
-                <a:solidFill>
-                  <a:srgbClr val="333844"/>
-                </a:solidFill>
-                <a:latin typeface="Calibri"/>
-              </a:rPr>
-              <a:t>▸  El encoding importa: cp1251 mal interpretado como UTF-8 → datos corruptos sin error visible</a:t>
-            </a:r>
-          </a:p>
-          <a:p>
-            <a:pPr algn="l" marL="0" indent="-228600">
-              <a:buNone/>
-            </a:pPr>
-            <a:r>
-              <a:rPr sz="1900" b="0">
-                <a:solidFill>
-                  <a:srgbClr val="333844"/>
-                </a:solidFill>
-                <a:latin typeface="Calibri"/>
-              </a:rPr>
-              <a:t>▸  Siempre verificar: ¿cuántos registros esperábamos? ¿cuántos cargamos? ¿la diferencia tiene explicación?</a:t>
-            </a:r>
-          </a:p>
-          <a:p>
-            <a:pPr algn="l" marL="0" indent="-228600">
-              <a:buNone/>
-            </a:pPr>
-            <a:r>
-              <a:rPr sz="1900" b="0">
-                <a:solidFill>
-                  <a:srgbClr val="333844"/>
-                </a:solidFill>
-                <a:latin typeface="Calibri"/>
-              </a:rPr>
-              <a:t>▸  La ingeniería de datos en leaks no es limpieza de datos — es arqueología de schemas</a:t>
+            <a:r>
+              <a:t>Un parser mal calibrado puede dejar fuera millones de registros sin advertencia</a:t>
+            </a:r>
+          </a:p>
+          <a:p>
+            <a:r>
+              <a:t>Estrategia: auto-detección de versión + validación de recuento contra tablas de metadatos</a:t>
+            </a:r>
+          </a:p>
+          <a:p>
+            <a:r>
+              <a:t>El encoding importa: cp1251 mal interpretado como UTF-8 → datos corruptos sin error visible</a:t>
+            </a:r>
+          </a:p>
+          <a:p>
+            <a:r>
+              <a:t>Siempre verificar: ¿cuántos registros esperábamos? ¿cuántos cargamos? ¿la diferencia tiene explicación?</a:t>
+            </a:r>
+          </a:p>
+          <a:p>
+            <a:r>
+              <a:t>La ingeniería de datos en leaks no es limpieza de datos — es arqueología de schemas</a:t>
             </a:r>
           </a:p>
         </p:txBody>

--- a/bloque0_ecosistema/csbc26_b0_ecosistema.pptx
+++ b/bloque0_ecosistema/csbc26_b0_ecosistema.pptx
@@ -6043,749 +6043,376 @@
           <a:p/>
         </p:txBody>
       </p:sp>
-      <p:sp>
-        <p:nvSpPr>
-          <p:cNvPr id="4" name="Rectangle 3"/>
-          <p:cNvSpPr/>
+      <p:graphicFrame>
+        <p:nvGraphicFramePr>
+          <p:cNvPr id="4" name="Table 3"/>
+          <p:cNvGraphicFramePr>
+            <a:graphicFrameLocks noGrp="1"/>
+          </p:cNvGraphicFramePr>
           <p:nvPr/>
-        </p:nvSpPr>
-        <p:spPr>
-          <a:xfrm>
-            <a:off x="1051560" y="2148840"/>
-            <a:ext cx="10058400" cy="365760"/>
-          </a:xfrm>
-          <a:prstGeom prst="rect">
-            <a:avLst/>
-          </a:prstGeom>
-          <a:solidFill>
-            <a:srgbClr val="CD2D37"/>
-          </a:solidFill>
-          <a:ln>
-            <a:noFill/>
-          </a:ln>
-        </p:spPr>
-        <p:style>
-          <a:lnRef idx="1">
-            <a:schemeClr val="accent1"/>
-          </a:lnRef>
-          <a:fillRef idx="3">
-            <a:schemeClr val="accent1"/>
-          </a:fillRef>
-          <a:effectRef idx="2">
-            <a:schemeClr val="accent1"/>
-          </a:effectRef>
-          <a:fontRef idx="minor">
-            <a:schemeClr val="lt1"/>
-          </a:fontRef>
-        </p:style>
-        <p:txBody>
-          <a:bodyPr rtlCol="0" anchor="ctr"/>
-          <a:lstStyle/>
-          <a:p>
-            <a:pPr algn="ctr"/>
-          </a:p>
-        </p:txBody>
-      </p:sp>
+        </p:nvGraphicFramePr>
+        <p:xfrm>
+          <a:off x="1051560" y="2148840"/>
+          <a:ext cx="10058400" cy="1828800"/>
+        </p:xfrm>
+        <a:graphic>
+          <a:graphicData uri="http://schemas.openxmlformats.org/drawingml/2006/table">
+            <a:tbl>
+              <a:tblPr>
+                <a:tableStyleId>{5C22544A-7EE6-4342-B048-85BDC9FD1C3A}</a:tableStyleId>
+              </a:tblPr>
+              <a:tblGrid>
+                <a:gridCol w="3352800"/>
+                <a:gridCol w="3352800"/>
+                <a:gridCol w="3352800"/>
+              </a:tblGrid>
+              <a:tr h="365760">
+                <a:tc>
+                  <a:txBody>
+                    <a:bodyPr/>
+                    <a:lstStyle/>
+                    <a:p>
+                      <a:r>
+                        <a:rPr sz="1200" b="1">
+                          <a:solidFill>
+                            <a:srgbClr val="FFFFFF"/>
+                          </a:solidFill>
+                          <a:latin typeface="Arial"/>
+                        </a:rPr>
+                        <a:t>Tier</a:t>
+                      </a:r>
+                    </a:p>
+                  </a:txBody>
+                  <a:tcPr marL="45000" marR="45000" marT="25000" marB="25000" anchor="ctr">
+                    <a:solidFill>
+                      <a:srgbClr val="CD2D37"/>
+                    </a:solidFill>
+                  </a:tcPr>
+                </a:tc>
+                <a:tc>
+                  <a:txBody>
+                    <a:bodyPr/>
+                    <a:lstStyle/>
+                    <a:p>
+                      <a:r>
+                        <a:rPr sz="1200" b="1">
+                          <a:solidFill>
+                            <a:srgbClr val="FFFFFF"/>
+                          </a:solidFill>
+                          <a:latin typeface="Arial"/>
+                        </a:rPr>
+                        <a:t>Tipo</a:t>
+                      </a:r>
+                    </a:p>
+                  </a:txBody>
+                  <a:tcPr marL="45000" marR="45000" marT="25000" marB="25000" anchor="ctr">
+                    <a:solidFill>
+                      <a:srgbClr val="CD2D37"/>
+                    </a:solidFill>
+                  </a:tcPr>
+                </a:tc>
+                <a:tc>
+                  <a:txBody>
+                    <a:bodyPr/>
+                    <a:lstStyle/>
+                    <a:p>
+                      <a:r>
+                        <a:rPr sz="1200" b="1">
+                          <a:solidFill>
+                            <a:srgbClr val="FFFFFF"/>
+                          </a:solidFill>
+                          <a:latin typeface="Arial"/>
+                        </a:rPr>
+                        <a:t>Por qué</a:t>
+                      </a:r>
+                    </a:p>
+                  </a:txBody>
+                  <a:tcPr marL="45000" marR="45000" marT="25000" marB="25000" anchor="ctr">
+                    <a:solidFill>
+                      <a:srgbClr val="CD2D37"/>
+                    </a:solidFill>
+                  </a:tcPr>
+                </a:tc>
+              </a:tr>
+              <a:tr h="365760">
+                <a:tc>
+                  <a:txBody>
+                    <a:bodyPr/>
+                    <a:lstStyle/>
+                    <a:p>
+                      <a:r>
+                        <a:rPr sz="1100" b="0">
+                          <a:solidFill>
+                            <a:srgbClr val="465461"/>
+                          </a:solidFill>
+                          <a:latin typeface="Arial"/>
+                        </a:rPr>
+                        <a:t>S</a:t>
+                      </a:r>
+                    </a:p>
+                  </a:txBody>
+                  <a:tcPr marL="45000" marR="45000" marT="25000" marB="25000" anchor="ctr">
+                    <a:solidFill>
+                      <a:srgbClr val="F1F2F6"/>
+                    </a:solidFill>
+                  </a:tcPr>
+                </a:tc>
+                <a:tc>
+                  <a:txBody>
+                    <a:bodyPr/>
+                    <a:lstStyle/>
+                    <a:p>
+                      <a:r>
+                        <a:rPr sz="1100" b="0">
+                          <a:solidFill>
+                            <a:srgbClr val="465461"/>
+                          </a:solidFill>
+                          <a:latin typeface="Arial"/>
+                        </a:rPr>
+                        <a:t>Chat logs internos (Conti, BlackBasta)</a:t>
+                      </a:r>
+                    </a:p>
+                  </a:txBody>
+                  <a:tcPr marL="45000" marR="45000" marT="25000" marB="25000" anchor="ctr">
+                    <a:solidFill>
+                      <a:srgbClr val="F1F2F6"/>
+                    </a:solidFill>
+                  </a:tcPr>
+                </a:tc>
+                <a:tc>
+                  <a:txBody>
+                    <a:bodyPr/>
+                    <a:lstStyle/>
+                    <a:p>
+                      <a:r>
+                        <a:rPr sz="1100" b="0">
+                          <a:solidFill>
+                            <a:srgbClr val="465461"/>
+                          </a:solidFill>
+                          <a:latin typeface="Arial"/>
+                        </a:rPr>
+                        <a:t>Sin filtro entre operadores: estructura, TTPs, roles, conflictos</a:t>
+                      </a:r>
+                    </a:p>
+                  </a:txBody>
+                  <a:tcPr marL="45000" marR="45000" marT="25000" marB="25000" anchor="ctr">
+                    <a:solidFill>
+                      <a:srgbClr val="F1F2F6"/>
+                    </a:solidFill>
+                  </a:tcPr>
+                </a:tc>
+              </a:tr>
+              <a:tr h="365760">
+                <a:tc>
+                  <a:txBody>
+                    <a:bodyPr/>
+                    <a:lstStyle/>
+                    <a:p>
+                      <a:r>
+                        <a:rPr sz="1100" b="0">
+                          <a:solidFill>
+                            <a:srgbClr val="465461"/>
+                          </a:solidFill>
+                          <a:latin typeface="Arial"/>
+                        </a:rPr>
+                        <a:t>A</a:t>
+                      </a:r>
+                    </a:p>
+                  </a:txBody>
+                  <a:tcPr marL="45000" marR="45000" marT="25000" marB="25000" anchor="ctr">
+                    <a:solidFill>
+                      <a:srgbClr val="FFFFFF"/>
+                    </a:solidFill>
+                  </a:tcPr>
+                </a:tc>
+                <a:tc>
+                  <a:txBody>
+                    <a:bodyPr/>
+                    <a:lstStyle/>
+                    <a:p>
+                      <a:r>
+                        <a:rPr sz="1100" b="0">
+                          <a:solidFill>
+                            <a:srgbClr val="465461"/>
+                          </a:solidFill>
+                          <a:latin typeface="Arial"/>
+                        </a:rPr>
+                        <a:t>Dumps SQL de foros</a:t>
+                      </a:r>
+                    </a:p>
+                  </a:txBody>
+                  <a:tcPr marL="45000" marR="45000" marT="25000" marB="25000" anchor="ctr">
+                    <a:solidFill>
+                      <a:srgbClr val="FFFFFF"/>
+                    </a:solidFill>
+                  </a:tcPr>
+                </a:tc>
+                <a:tc>
+                  <a:txBody>
+                    <a:bodyPr/>
+                    <a:lstStyle/>
+                    <a:p>
+                      <a:r>
+                        <a:rPr sz="1100" b="0">
+                          <a:solidFill>
+                            <a:srgbClr val="465461"/>
+                          </a:solidFill>
+                          <a:latin typeface="Arial"/>
+                        </a:rPr>
+                        <a:t>Usuarios, posts, IPs, fechas → red, atribución, correlación cross-foro</a:t>
+                      </a:r>
+                    </a:p>
+                  </a:txBody>
+                  <a:tcPr marL="45000" marR="45000" marT="25000" marB="25000" anchor="ctr">
+                    <a:solidFill>
+                      <a:srgbClr val="FFFFFF"/>
+                    </a:solidFill>
+                  </a:tcPr>
+                </a:tc>
+              </a:tr>
+              <a:tr h="365760">
+                <a:tc>
+                  <a:txBody>
+                    <a:bodyPr/>
+                    <a:lstStyle/>
+                    <a:p>
+                      <a:r>
+                        <a:rPr sz="1100" b="0">
+                          <a:solidFill>
+                            <a:srgbClr val="465461"/>
+                          </a:solidFill>
+                          <a:latin typeface="Arial"/>
+                        </a:rPr>
+                        <a:t>B</a:t>
+                      </a:r>
+                    </a:p>
+                  </a:txBody>
+                  <a:tcPr marL="45000" marR="45000" marT="25000" marB="25000" anchor="ctr">
+                    <a:solidFill>
+                      <a:srgbClr val="F1F2F6"/>
+                    </a:solidFill>
+                  </a:tcPr>
+                </a:tc>
+                <a:tc>
+                  <a:txBody>
+                    <a:bodyPr/>
+                    <a:lstStyle/>
+                    <a:p>
+                      <a:r>
+                        <a:rPr sz="1100" b="0">
+                          <a:solidFill>
+                            <a:srgbClr val="465461"/>
+                          </a:solidFill>
+                          <a:latin typeface="Arial"/>
+                        </a:rPr>
+                        <a:t>Flat files de credenciales</a:t>
+                      </a:r>
+                    </a:p>
+                  </a:txBody>
+                  <a:tcPr marL="45000" marR="45000" marT="25000" marB="25000" anchor="ctr">
+                    <a:solidFill>
+                      <a:srgbClr val="F1F2F6"/>
+                    </a:solidFill>
+                  </a:tcPr>
+                </a:tc>
+                <a:tc>
+                  <a:txBody>
+                    <a:bodyPr/>
+                    <a:lstStyle/>
+                    <a:p>
+                      <a:r>
+                        <a:rPr sz="1100" b="0">
+                          <a:solidFill>
+                            <a:srgbClr val="465461"/>
+                          </a:solidFill>
+                          <a:latin typeface="Arial"/>
+                        </a:rPr>
+                        <a:t>Útiles para pivoting, sin narrativa ni contexto</a:t>
+                      </a:r>
+                    </a:p>
+                  </a:txBody>
+                  <a:tcPr marL="45000" marR="45000" marT="25000" marB="25000" anchor="ctr">
+                    <a:solidFill>
+                      <a:srgbClr val="F1F2F6"/>
+                    </a:solidFill>
+                  </a:tcPr>
+                </a:tc>
+              </a:tr>
+              <a:tr h="365760">
+                <a:tc>
+                  <a:txBody>
+                    <a:bodyPr/>
+                    <a:lstStyle/>
+                    <a:p>
+                      <a:r>
+                        <a:rPr sz="1100" b="0">
+                          <a:solidFill>
+                            <a:srgbClr val="465461"/>
+                          </a:solidFill>
+                          <a:latin typeface="Arial"/>
+                        </a:rPr>
+                        <a:t>C</a:t>
+                      </a:r>
+                    </a:p>
+                  </a:txBody>
+                  <a:tcPr marL="45000" marR="45000" marT="25000" marB="25000" anchor="ctr">
+                    <a:solidFill>
+                      <a:srgbClr val="FFFFFF"/>
+                    </a:solidFill>
+                  </a:tcPr>
+                </a:tc>
+                <a:tc>
+                  <a:txBody>
+                    <a:bodyPr/>
+                    <a:lstStyle/>
+                    <a:p>
+                      <a:r>
+                        <a:rPr sz="1100" b="0">
+                          <a:solidFill>
+                            <a:srgbClr val="465461"/>
+                          </a:solidFill>
+                          <a:latin typeface="Arial"/>
+                        </a:rPr>
+                        <a:t>Source code / configs</a:t>
+                      </a:r>
+                    </a:p>
+                  </a:txBody>
+                  <a:tcPr marL="45000" marR="45000" marT="25000" marB="25000" anchor="ctr">
+                    <a:solidFill>
+                      <a:srgbClr val="FFFFFF"/>
+                    </a:solidFill>
+                  </a:tcPr>
+                </a:tc>
+                <a:tc>
+                  <a:txBody>
+                    <a:bodyPr/>
+                    <a:lstStyle/>
+                    <a:p>
+                      <a:r>
+                        <a:rPr sz="1100" b="0">
+                          <a:solidFill>
+                            <a:srgbClr val="465461"/>
+                          </a:solidFill>
+                          <a:latin typeface="Arial"/>
+                        </a:rPr>
+                        <a:t>Muy específicos, requieren expertise técnico profundo</a:t>
+                      </a:r>
+                    </a:p>
+                  </a:txBody>
+                  <a:tcPr marL="45000" marR="45000" marT="25000" marB="25000" anchor="ctr">
+                    <a:solidFill>
+                      <a:srgbClr val="FFFFFF"/>
+                    </a:solidFill>
+                  </a:tcPr>
+                </a:tc>
+              </a:tr>
+            </a:tbl>
+          </a:graphicData>
+        </a:graphic>
+      </p:graphicFrame>
       <p:sp>
         <p:nvSpPr>
           <p:cNvPr id="5" name="TextBox 4"/>
-          <p:cNvSpPr txBox="1"/>
-          <p:nvPr/>
-        </p:nvSpPr>
-        <p:spPr>
-          <a:xfrm>
-            <a:off x="1097280" y="2203840"/>
-            <a:ext cx="3261360" cy="365760"/>
-          </a:xfrm>
-          <a:prstGeom prst="rect">
-            <a:avLst/>
-          </a:prstGeom>
-          <a:noFill/>
-        </p:spPr>
-        <p:txBody>
-          <a:bodyPr wrap="square">
-            <a:spAutoFit/>
-          </a:bodyPr>
-          <a:lstStyle/>
-          <a:p>
-            <a:pPr algn="l"/>
-            <a:r>
-              <a:rPr sz="1200" b="1">
-                <a:solidFill>
-                  <a:srgbClr val="FFFFFF"/>
-                </a:solidFill>
-                <a:latin typeface="Arial"/>
-              </a:rPr>
-              <a:t>Tier</a:t>
-            </a:r>
-          </a:p>
-        </p:txBody>
-      </p:sp>
-      <p:sp>
-        <p:nvSpPr>
-          <p:cNvPr id="6" name="TextBox 5"/>
-          <p:cNvSpPr txBox="1"/>
-          <p:nvPr/>
-        </p:nvSpPr>
-        <p:spPr>
-          <a:xfrm>
-            <a:off x="4450080" y="2203840"/>
-            <a:ext cx="3261360" cy="365760"/>
-          </a:xfrm>
-          <a:prstGeom prst="rect">
-            <a:avLst/>
-          </a:prstGeom>
-          <a:noFill/>
-        </p:spPr>
-        <p:txBody>
-          <a:bodyPr wrap="square">
-            <a:spAutoFit/>
-          </a:bodyPr>
-          <a:lstStyle/>
-          <a:p>
-            <a:pPr algn="l"/>
-            <a:r>
-              <a:rPr sz="1200" b="1">
-                <a:solidFill>
-                  <a:srgbClr val="FFFFFF"/>
-                </a:solidFill>
-                <a:latin typeface="Arial"/>
-              </a:rPr>
-              <a:t>Tipo</a:t>
-            </a:r>
-          </a:p>
-        </p:txBody>
-      </p:sp>
-      <p:sp>
-        <p:nvSpPr>
-          <p:cNvPr id="7" name="TextBox 6"/>
-          <p:cNvSpPr txBox="1"/>
-          <p:nvPr/>
-        </p:nvSpPr>
-        <p:spPr>
-          <a:xfrm>
-            <a:off x="7802880" y="2203840"/>
-            <a:ext cx="3261360" cy="365760"/>
-          </a:xfrm>
-          <a:prstGeom prst="rect">
-            <a:avLst/>
-          </a:prstGeom>
-          <a:noFill/>
-        </p:spPr>
-        <p:txBody>
-          <a:bodyPr wrap="square">
-            <a:spAutoFit/>
-          </a:bodyPr>
-          <a:lstStyle/>
-          <a:p>
-            <a:pPr algn="l"/>
-            <a:r>
-              <a:rPr sz="1200" b="1">
-                <a:solidFill>
-                  <a:srgbClr val="FFFFFF"/>
-                </a:solidFill>
-                <a:latin typeface="Arial"/>
-              </a:rPr>
-              <a:t>Por qué</a:t>
-            </a:r>
-          </a:p>
-        </p:txBody>
-      </p:sp>
-      <p:sp>
-        <p:nvSpPr>
-          <p:cNvPr id="8" name="Rectangle 7"/>
-          <p:cNvSpPr/>
-          <p:nvPr/>
-        </p:nvSpPr>
-        <p:spPr>
-          <a:xfrm>
-            <a:off x="1051560" y="2514600"/>
-            <a:ext cx="10058400" cy="440689"/>
-          </a:xfrm>
-          <a:prstGeom prst="rect">
-            <a:avLst/>
-          </a:prstGeom>
-          <a:solidFill>
-            <a:srgbClr val="F1F2F6"/>
-          </a:solidFill>
-          <a:ln>
-            <a:noFill/>
-          </a:ln>
-        </p:spPr>
-        <p:style>
-          <a:lnRef idx="1">
-            <a:schemeClr val="accent1"/>
-          </a:lnRef>
-          <a:fillRef idx="3">
-            <a:schemeClr val="accent1"/>
-          </a:fillRef>
-          <a:effectRef idx="2">
-            <a:schemeClr val="accent1"/>
-          </a:effectRef>
-          <a:fontRef idx="minor">
-            <a:schemeClr val="lt1"/>
-          </a:fontRef>
-        </p:style>
-        <p:txBody>
-          <a:bodyPr rtlCol="0" anchor="ctr"/>
-          <a:lstStyle/>
-          <a:p>
-            <a:pPr algn="ctr"/>
-          </a:p>
-        </p:txBody>
-      </p:sp>
-      <p:sp>
-        <p:nvSpPr>
-          <p:cNvPr id="9" name="TextBox 8"/>
-          <p:cNvSpPr txBox="1"/>
-          <p:nvPr/>
-        </p:nvSpPr>
-        <p:spPr>
-          <a:xfrm>
-            <a:off x="1097280" y="2554600"/>
-            <a:ext cx="3261360" cy="440689"/>
-          </a:xfrm>
-          <a:prstGeom prst="rect">
-            <a:avLst/>
-          </a:prstGeom>
-          <a:noFill/>
-        </p:spPr>
-        <p:txBody>
-          <a:bodyPr wrap="square">
-            <a:spAutoFit/>
-          </a:bodyPr>
-          <a:lstStyle/>
-          <a:p>
-            <a:pPr algn="l"/>
-            <a:r>
-              <a:rPr sz="1100" b="0">
-                <a:solidFill>
-                  <a:srgbClr val="465461"/>
-                </a:solidFill>
-                <a:latin typeface="Arial"/>
-              </a:rPr>
-              <a:t>S</a:t>
-            </a:r>
-          </a:p>
-        </p:txBody>
-      </p:sp>
-      <p:sp>
-        <p:nvSpPr>
-          <p:cNvPr id="10" name="TextBox 9"/>
-          <p:cNvSpPr txBox="1"/>
-          <p:nvPr/>
-        </p:nvSpPr>
-        <p:spPr>
-          <a:xfrm>
-            <a:off x="4450080" y="2554600"/>
-            <a:ext cx="3261360" cy="440689"/>
-          </a:xfrm>
-          <a:prstGeom prst="rect">
-            <a:avLst/>
-          </a:prstGeom>
-          <a:noFill/>
-        </p:spPr>
-        <p:txBody>
-          <a:bodyPr wrap="square">
-            <a:spAutoFit/>
-          </a:bodyPr>
-          <a:lstStyle/>
-          <a:p>
-            <a:pPr algn="l"/>
-            <a:r>
-              <a:rPr sz="1100" b="0">
-                <a:solidFill>
-                  <a:srgbClr val="465461"/>
-                </a:solidFill>
-                <a:latin typeface="Arial"/>
-              </a:rPr>
-              <a:t>Chat logs internos (Conti, BlackBasta)</a:t>
-            </a:r>
-          </a:p>
-        </p:txBody>
-      </p:sp>
-      <p:sp>
-        <p:nvSpPr>
-          <p:cNvPr id="11" name="TextBox 10"/>
-          <p:cNvSpPr txBox="1"/>
-          <p:nvPr/>
-        </p:nvSpPr>
-        <p:spPr>
-          <a:xfrm>
-            <a:off x="7802880" y="2554600"/>
-            <a:ext cx="3261360" cy="440689"/>
-          </a:xfrm>
-          <a:prstGeom prst="rect">
-            <a:avLst/>
-          </a:prstGeom>
-          <a:noFill/>
-        </p:spPr>
-        <p:txBody>
-          <a:bodyPr wrap="square">
-            <a:spAutoFit/>
-          </a:bodyPr>
-          <a:lstStyle/>
-          <a:p>
-            <a:pPr algn="l"/>
-            <a:r>
-              <a:rPr sz="1100" b="0">
-                <a:solidFill>
-                  <a:srgbClr val="465461"/>
-                </a:solidFill>
-                <a:latin typeface="Arial"/>
-              </a:rPr>
-              <a:t>Sin filtro entre operadores: estructura, TTPs, roles, conflictos</a:t>
-            </a:r>
-          </a:p>
-        </p:txBody>
-      </p:sp>
-      <p:sp>
-        <p:nvSpPr>
-          <p:cNvPr id="12" name="Rectangle 11"/>
-          <p:cNvSpPr/>
-          <p:nvPr/>
-        </p:nvSpPr>
-        <p:spPr>
-          <a:xfrm>
-            <a:off x="1051560" y="2955290"/>
-            <a:ext cx="10058400" cy="615315"/>
-          </a:xfrm>
-          <a:prstGeom prst="rect">
-            <a:avLst/>
-          </a:prstGeom>
-          <a:solidFill>
-            <a:srgbClr val="FFFFFF"/>
-          </a:solidFill>
-          <a:ln>
-            <a:noFill/>
-          </a:ln>
-        </p:spPr>
-        <p:style>
-          <a:lnRef idx="1">
-            <a:schemeClr val="accent1"/>
-          </a:lnRef>
-          <a:fillRef idx="3">
-            <a:schemeClr val="accent1"/>
-          </a:fillRef>
-          <a:effectRef idx="2">
-            <a:schemeClr val="accent1"/>
-          </a:effectRef>
-          <a:fontRef idx="minor">
-            <a:schemeClr val="lt1"/>
-          </a:fontRef>
-        </p:style>
-        <p:txBody>
-          <a:bodyPr rtlCol="0" anchor="ctr"/>
-          <a:lstStyle/>
-          <a:p>
-            <a:pPr algn="ctr"/>
-          </a:p>
-        </p:txBody>
-      </p:sp>
-      <p:sp>
-        <p:nvSpPr>
-          <p:cNvPr id="13" name="TextBox 12"/>
-          <p:cNvSpPr txBox="1"/>
-          <p:nvPr/>
-        </p:nvSpPr>
-        <p:spPr>
-          <a:xfrm>
-            <a:off x="1097280" y="2995290"/>
-            <a:ext cx="3261360" cy="615315"/>
-          </a:xfrm>
-          <a:prstGeom prst="rect">
-            <a:avLst/>
-          </a:prstGeom>
-          <a:noFill/>
-        </p:spPr>
-        <p:txBody>
-          <a:bodyPr wrap="square">
-            <a:spAutoFit/>
-          </a:bodyPr>
-          <a:lstStyle/>
-          <a:p>
-            <a:pPr algn="l"/>
-            <a:r>
-              <a:rPr sz="1100" b="0">
-                <a:solidFill>
-                  <a:srgbClr val="465461"/>
-                </a:solidFill>
-                <a:latin typeface="Arial"/>
-              </a:rPr>
-              <a:t>A</a:t>
-            </a:r>
-          </a:p>
-        </p:txBody>
-      </p:sp>
-      <p:sp>
-        <p:nvSpPr>
-          <p:cNvPr id="14" name="TextBox 13"/>
-          <p:cNvSpPr txBox="1"/>
-          <p:nvPr/>
-        </p:nvSpPr>
-        <p:spPr>
-          <a:xfrm>
-            <a:off x="4450080" y="2995290"/>
-            <a:ext cx="3261360" cy="615315"/>
-          </a:xfrm>
-          <a:prstGeom prst="rect">
-            <a:avLst/>
-          </a:prstGeom>
-          <a:noFill/>
-        </p:spPr>
-        <p:txBody>
-          <a:bodyPr wrap="square">
-            <a:spAutoFit/>
-          </a:bodyPr>
-          <a:lstStyle/>
-          <a:p>
-            <a:pPr algn="l"/>
-            <a:r>
-              <a:rPr sz="1100" b="0">
-                <a:solidFill>
-                  <a:srgbClr val="465461"/>
-                </a:solidFill>
-                <a:latin typeface="Arial"/>
-              </a:rPr>
-              <a:t>Dumps SQL de foros</a:t>
-            </a:r>
-          </a:p>
-        </p:txBody>
-      </p:sp>
-      <p:sp>
-        <p:nvSpPr>
-          <p:cNvPr id="15" name="TextBox 14"/>
-          <p:cNvSpPr txBox="1"/>
-          <p:nvPr/>
-        </p:nvSpPr>
-        <p:spPr>
-          <a:xfrm>
-            <a:off x="7802880" y="2995290"/>
-            <a:ext cx="3261360" cy="615315"/>
-          </a:xfrm>
-          <a:prstGeom prst="rect">
-            <a:avLst/>
-          </a:prstGeom>
-          <a:noFill/>
-        </p:spPr>
-        <p:txBody>
-          <a:bodyPr wrap="square">
-            <a:spAutoFit/>
-          </a:bodyPr>
-          <a:lstStyle/>
-          <a:p>
-            <a:pPr algn="l"/>
-            <a:r>
-              <a:rPr sz="1100" b="0">
-                <a:solidFill>
-                  <a:srgbClr val="465461"/>
-                </a:solidFill>
-                <a:latin typeface="Arial"/>
-              </a:rPr>
-              <a:t>Usuarios, posts, IPs, fechas → red, atribución, correlación cross-foro</a:t>
-            </a:r>
-          </a:p>
-        </p:txBody>
-      </p:sp>
-      <p:sp>
-        <p:nvSpPr>
-          <p:cNvPr id="16" name="Rectangle 15"/>
-          <p:cNvSpPr/>
-          <p:nvPr/>
-        </p:nvSpPr>
-        <p:spPr>
-          <a:xfrm>
-            <a:off x="1051560" y="3570605"/>
-            <a:ext cx="10058400" cy="440689"/>
-          </a:xfrm>
-          <a:prstGeom prst="rect">
-            <a:avLst/>
-          </a:prstGeom>
-          <a:solidFill>
-            <a:srgbClr val="F1F2F6"/>
-          </a:solidFill>
-          <a:ln>
-            <a:noFill/>
-          </a:ln>
-        </p:spPr>
-        <p:style>
-          <a:lnRef idx="1">
-            <a:schemeClr val="accent1"/>
-          </a:lnRef>
-          <a:fillRef idx="3">
-            <a:schemeClr val="accent1"/>
-          </a:fillRef>
-          <a:effectRef idx="2">
-            <a:schemeClr val="accent1"/>
-          </a:effectRef>
-          <a:fontRef idx="minor">
-            <a:schemeClr val="lt1"/>
-          </a:fontRef>
-        </p:style>
-        <p:txBody>
-          <a:bodyPr rtlCol="0" anchor="ctr"/>
-          <a:lstStyle/>
-          <a:p>
-            <a:pPr algn="ctr"/>
-          </a:p>
-        </p:txBody>
-      </p:sp>
-      <p:sp>
-        <p:nvSpPr>
-          <p:cNvPr id="17" name="TextBox 16"/>
-          <p:cNvSpPr txBox="1"/>
-          <p:nvPr/>
-        </p:nvSpPr>
-        <p:spPr>
-          <a:xfrm>
-            <a:off x="1097280" y="3610605"/>
-            <a:ext cx="3261360" cy="440689"/>
-          </a:xfrm>
-          <a:prstGeom prst="rect">
-            <a:avLst/>
-          </a:prstGeom>
-          <a:noFill/>
-        </p:spPr>
-        <p:txBody>
-          <a:bodyPr wrap="square">
-            <a:spAutoFit/>
-          </a:bodyPr>
-          <a:lstStyle/>
-          <a:p>
-            <a:pPr algn="l"/>
-            <a:r>
-              <a:rPr sz="1100" b="0">
-                <a:solidFill>
-                  <a:srgbClr val="465461"/>
-                </a:solidFill>
-                <a:latin typeface="Arial"/>
-              </a:rPr>
-              <a:t>B</a:t>
-            </a:r>
-          </a:p>
-        </p:txBody>
-      </p:sp>
-      <p:sp>
-        <p:nvSpPr>
-          <p:cNvPr id="18" name="TextBox 17"/>
-          <p:cNvSpPr txBox="1"/>
-          <p:nvPr/>
-        </p:nvSpPr>
-        <p:spPr>
-          <a:xfrm>
-            <a:off x="4450080" y="3610605"/>
-            <a:ext cx="3261360" cy="440689"/>
-          </a:xfrm>
-          <a:prstGeom prst="rect">
-            <a:avLst/>
-          </a:prstGeom>
-          <a:noFill/>
-        </p:spPr>
-        <p:txBody>
-          <a:bodyPr wrap="square">
-            <a:spAutoFit/>
-          </a:bodyPr>
-          <a:lstStyle/>
-          <a:p>
-            <a:pPr algn="l"/>
-            <a:r>
-              <a:rPr sz="1100" b="0">
-                <a:solidFill>
-                  <a:srgbClr val="465461"/>
-                </a:solidFill>
-                <a:latin typeface="Arial"/>
-              </a:rPr>
-              <a:t>Flat files de credenciales</a:t>
-            </a:r>
-          </a:p>
-        </p:txBody>
-      </p:sp>
-      <p:sp>
-        <p:nvSpPr>
-          <p:cNvPr id="19" name="TextBox 18"/>
-          <p:cNvSpPr txBox="1"/>
-          <p:nvPr/>
-        </p:nvSpPr>
-        <p:spPr>
-          <a:xfrm>
-            <a:off x="7802880" y="3610605"/>
-            <a:ext cx="3261360" cy="440689"/>
-          </a:xfrm>
-          <a:prstGeom prst="rect">
-            <a:avLst/>
-          </a:prstGeom>
-          <a:noFill/>
-        </p:spPr>
-        <p:txBody>
-          <a:bodyPr wrap="square">
-            <a:spAutoFit/>
-          </a:bodyPr>
-          <a:lstStyle/>
-          <a:p>
-            <a:pPr algn="l"/>
-            <a:r>
-              <a:rPr sz="1100" b="0">
-                <a:solidFill>
-                  <a:srgbClr val="465461"/>
-                </a:solidFill>
-                <a:latin typeface="Arial"/>
-              </a:rPr>
-              <a:t>Útiles para pivoting, sin narrativa ni contexto</a:t>
-            </a:r>
-          </a:p>
-        </p:txBody>
-      </p:sp>
-      <p:sp>
-        <p:nvSpPr>
-          <p:cNvPr id="20" name="Rectangle 19"/>
-          <p:cNvSpPr/>
-          <p:nvPr/>
-        </p:nvSpPr>
-        <p:spPr>
-          <a:xfrm>
-            <a:off x="1051560" y="4011294"/>
-            <a:ext cx="10058400" cy="440689"/>
-          </a:xfrm>
-          <a:prstGeom prst="rect">
-            <a:avLst/>
-          </a:prstGeom>
-          <a:solidFill>
-            <a:srgbClr val="FFFFFF"/>
-          </a:solidFill>
-          <a:ln>
-            <a:noFill/>
-          </a:ln>
-        </p:spPr>
-        <p:style>
-          <a:lnRef idx="1">
-            <a:schemeClr val="accent1"/>
-          </a:lnRef>
-          <a:fillRef idx="3">
-            <a:schemeClr val="accent1"/>
-          </a:fillRef>
-          <a:effectRef idx="2">
-            <a:schemeClr val="accent1"/>
-          </a:effectRef>
-          <a:fontRef idx="minor">
-            <a:schemeClr val="lt1"/>
-          </a:fontRef>
-        </p:style>
-        <p:txBody>
-          <a:bodyPr rtlCol="0" anchor="ctr"/>
-          <a:lstStyle/>
-          <a:p>
-            <a:pPr algn="ctr"/>
-          </a:p>
-        </p:txBody>
-      </p:sp>
-      <p:sp>
-        <p:nvSpPr>
-          <p:cNvPr id="21" name="TextBox 20"/>
-          <p:cNvSpPr txBox="1"/>
-          <p:nvPr/>
-        </p:nvSpPr>
-        <p:spPr>
-          <a:xfrm>
-            <a:off x="1097280" y="4051294"/>
-            <a:ext cx="3261360" cy="440689"/>
-          </a:xfrm>
-          <a:prstGeom prst="rect">
-            <a:avLst/>
-          </a:prstGeom>
-          <a:noFill/>
-        </p:spPr>
-        <p:txBody>
-          <a:bodyPr wrap="square">
-            <a:spAutoFit/>
-          </a:bodyPr>
-          <a:lstStyle/>
-          <a:p>
-            <a:pPr algn="l"/>
-            <a:r>
-              <a:rPr sz="1100" b="0">
-                <a:solidFill>
-                  <a:srgbClr val="465461"/>
-                </a:solidFill>
-                <a:latin typeface="Arial"/>
-              </a:rPr>
-              <a:t>C</a:t>
-            </a:r>
-          </a:p>
-        </p:txBody>
-      </p:sp>
-      <p:sp>
-        <p:nvSpPr>
-          <p:cNvPr id="22" name="TextBox 21"/>
-          <p:cNvSpPr txBox="1"/>
-          <p:nvPr/>
-        </p:nvSpPr>
-        <p:spPr>
-          <a:xfrm>
-            <a:off x="4450080" y="4051294"/>
-            <a:ext cx="3261360" cy="440689"/>
-          </a:xfrm>
-          <a:prstGeom prst="rect">
-            <a:avLst/>
-          </a:prstGeom>
-          <a:noFill/>
-        </p:spPr>
-        <p:txBody>
-          <a:bodyPr wrap="square">
-            <a:spAutoFit/>
-          </a:bodyPr>
-          <a:lstStyle/>
-          <a:p>
-            <a:pPr algn="l"/>
-            <a:r>
-              <a:rPr sz="1100" b="0">
-                <a:solidFill>
-                  <a:srgbClr val="465461"/>
-                </a:solidFill>
-                <a:latin typeface="Arial"/>
-              </a:rPr>
-              <a:t>Source code / configs</a:t>
-            </a:r>
-          </a:p>
-        </p:txBody>
-      </p:sp>
-      <p:sp>
-        <p:nvSpPr>
-          <p:cNvPr id="23" name="TextBox 22"/>
-          <p:cNvSpPr txBox="1"/>
-          <p:nvPr/>
-        </p:nvSpPr>
-        <p:spPr>
-          <a:xfrm>
-            <a:off x="7802880" y="4051294"/>
-            <a:ext cx="3261360" cy="440689"/>
-          </a:xfrm>
-          <a:prstGeom prst="rect">
-            <a:avLst/>
-          </a:prstGeom>
-          <a:noFill/>
-        </p:spPr>
-        <p:txBody>
-          <a:bodyPr wrap="square">
-            <a:spAutoFit/>
-          </a:bodyPr>
-          <a:lstStyle/>
-          <a:p>
-            <a:pPr algn="l"/>
-            <a:r>
-              <a:rPr sz="1100" b="0">
-                <a:solidFill>
-                  <a:srgbClr val="465461"/>
-                </a:solidFill>
-                <a:latin typeface="Arial"/>
-              </a:rPr>
-              <a:t>Muy específicos, requieren expertise técnico profundo</a:t>
-            </a:r>
-          </a:p>
-        </p:txBody>
-      </p:sp>
-      <p:sp>
-        <p:nvSpPr>
-          <p:cNvPr id="24" name="TextBox 23"/>
           <p:cNvSpPr txBox="1"/>
           <p:nvPr/>
         </p:nvSpPr>
@@ -7028,894 +6655,441 @@
           <a:p/>
         </p:txBody>
       </p:sp>
-      <p:sp>
-        <p:nvSpPr>
-          <p:cNvPr id="4" name="Rectangle 3"/>
-          <p:cNvSpPr/>
+      <p:graphicFrame>
+        <p:nvGraphicFramePr>
+          <p:cNvPr id="4" name="Table 3"/>
+          <p:cNvGraphicFramePr>
+            <a:graphicFrameLocks noGrp="1"/>
+          </p:cNvGraphicFramePr>
           <p:nvPr/>
-        </p:nvSpPr>
-        <p:spPr>
-          <a:xfrm>
-            <a:off x="1051560" y="2148840"/>
-            <a:ext cx="10058400" cy="365760"/>
-          </a:xfrm>
-          <a:prstGeom prst="rect">
-            <a:avLst/>
-          </a:prstGeom>
-          <a:solidFill>
-            <a:srgbClr val="CD2D37"/>
-          </a:solidFill>
-          <a:ln>
-            <a:noFill/>
-          </a:ln>
-        </p:spPr>
-        <p:style>
-          <a:lnRef idx="1">
-            <a:schemeClr val="accent1"/>
-          </a:lnRef>
-          <a:fillRef idx="3">
-            <a:schemeClr val="accent1"/>
-          </a:fillRef>
-          <a:effectRef idx="2">
-            <a:schemeClr val="accent1"/>
-          </a:effectRef>
-          <a:fontRef idx="minor">
-            <a:schemeClr val="lt1"/>
-          </a:fontRef>
-        </p:style>
-        <p:txBody>
-          <a:bodyPr rtlCol="0" anchor="ctr"/>
-          <a:lstStyle/>
-          <a:p>
-            <a:pPr algn="ctr"/>
-          </a:p>
-        </p:txBody>
-      </p:sp>
-      <p:sp>
-        <p:nvSpPr>
-          <p:cNvPr id="5" name="TextBox 4"/>
-          <p:cNvSpPr txBox="1"/>
-          <p:nvPr/>
-        </p:nvSpPr>
-        <p:spPr>
-          <a:xfrm>
-            <a:off x="1097280" y="2203840"/>
-            <a:ext cx="3261360" cy="365760"/>
-          </a:xfrm>
-          <a:prstGeom prst="rect">
-            <a:avLst/>
-          </a:prstGeom>
-          <a:noFill/>
-        </p:spPr>
-        <p:txBody>
-          <a:bodyPr wrap="square">
-            <a:spAutoFit/>
-          </a:bodyPr>
-          <a:lstStyle/>
-          <a:p>
-            <a:pPr algn="l"/>
-            <a:r>
-              <a:rPr sz="1200" b="1">
-                <a:solidFill>
-                  <a:srgbClr val="FFFFFF"/>
-                </a:solidFill>
-                <a:latin typeface="Arial"/>
-              </a:rPr>
-              <a:t>Tier</a:t>
-            </a:r>
-          </a:p>
-        </p:txBody>
-      </p:sp>
-      <p:sp>
-        <p:nvSpPr>
-          <p:cNvPr id="6" name="TextBox 5"/>
-          <p:cNvSpPr txBox="1"/>
-          <p:nvPr/>
-        </p:nvSpPr>
-        <p:spPr>
-          <a:xfrm>
-            <a:off x="4450080" y="2203840"/>
-            <a:ext cx="3261360" cy="365760"/>
-          </a:xfrm>
-          <a:prstGeom prst="rect">
-            <a:avLst/>
-          </a:prstGeom>
-          <a:noFill/>
-        </p:spPr>
-        <p:txBody>
-          <a:bodyPr wrap="square">
-            <a:spAutoFit/>
-          </a:bodyPr>
-          <a:lstStyle/>
-          <a:p>
-            <a:pPr algn="l"/>
-            <a:r>
-              <a:rPr sz="1200" b="1">
-                <a:solidFill>
-                  <a:srgbClr val="FFFFFF"/>
-                </a:solidFill>
-                <a:latin typeface="Arial"/>
-              </a:rPr>
-              <a:t>Formato</a:t>
-            </a:r>
-          </a:p>
-        </p:txBody>
-      </p:sp>
-      <p:sp>
-        <p:nvSpPr>
-          <p:cNvPr id="7" name="TextBox 6"/>
-          <p:cNvSpPr txBox="1"/>
-          <p:nvPr/>
-        </p:nvSpPr>
-        <p:spPr>
-          <a:xfrm>
-            <a:off x="7802880" y="2203840"/>
-            <a:ext cx="3261360" cy="365760"/>
-          </a:xfrm>
-          <a:prstGeom prst="rect">
-            <a:avLst/>
-          </a:prstGeom>
-          <a:noFill/>
-        </p:spPr>
-        <p:txBody>
-          <a:bodyPr wrap="square">
-            <a:spAutoFit/>
-          </a:bodyPr>
-          <a:lstStyle/>
-          <a:p>
-            <a:pPr algn="l"/>
-            <a:r>
-              <a:rPr sz="1200" b="1">
-                <a:solidFill>
-                  <a:srgbClr val="FFFFFF"/>
-                </a:solidFill>
-                <a:latin typeface="Arial"/>
-              </a:rPr>
-              <a:t>Por qué</a:t>
-            </a:r>
-          </a:p>
-        </p:txBody>
-      </p:sp>
-      <p:sp>
-        <p:nvSpPr>
-          <p:cNvPr id="8" name="Rectangle 7"/>
-          <p:cNvSpPr/>
-          <p:nvPr/>
-        </p:nvSpPr>
-        <p:spPr>
-          <a:xfrm>
-            <a:off x="1051560" y="2514600"/>
-            <a:ext cx="10058400" cy="440689"/>
-          </a:xfrm>
-          <a:prstGeom prst="rect">
-            <a:avLst/>
-          </a:prstGeom>
-          <a:solidFill>
-            <a:srgbClr val="F1F2F6"/>
-          </a:solidFill>
-          <a:ln>
-            <a:noFill/>
-          </a:ln>
-        </p:spPr>
-        <p:style>
-          <a:lnRef idx="1">
-            <a:schemeClr val="accent1"/>
-          </a:lnRef>
-          <a:fillRef idx="3">
-            <a:schemeClr val="accent1"/>
-          </a:fillRef>
-          <a:effectRef idx="2">
-            <a:schemeClr val="accent1"/>
-          </a:effectRef>
-          <a:fontRef idx="minor">
-            <a:schemeClr val="lt1"/>
-          </a:fontRef>
-        </p:style>
-        <p:txBody>
-          <a:bodyPr rtlCol="0" anchor="ctr"/>
-          <a:lstStyle/>
-          <a:p>
-            <a:pPr algn="ctr"/>
-          </a:p>
-        </p:txBody>
-      </p:sp>
-      <p:sp>
-        <p:nvSpPr>
-          <p:cNvPr id="9" name="TextBox 8"/>
-          <p:cNvSpPr txBox="1"/>
-          <p:nvPr/>
-        </p:nvSpPr>
-        <p:spPr>
-          <a:xfrm>
-            <a:off x="1097280" y="2554600"/>
-            <a:ext cx="3261360" cy="440689"/>
-          </a:xfrm>
-          <a:prstGeom prst="rect">
-            <a:avLst/>
-          </a:prstGeom>
-          <a:noFill/>
-        </p:spPr>
-        <p:txBody>
-          <a:bodyPr wrap="square">
-            <a:spAutoFit/>
-          </a:bodyPr>
-          <a:lstStyle/>
-          <a:p>
-            <a:pPr algn="l"/>
-            <a:r>
-              <a:rPr sz="1100" b="0">
-                <a:solidFill>
-                  <a:srgbClr val="465461"/>
-                </a:solidFill>
-                <a:latin typeface="Arial"/>
-              </a:rPr>
-              <a:t>S</a:t>
-            </a:r>
-          </a:p>
-        </p:txBody>
-      </p:sp>
-      <p:sp>
-        <p:nvSpPr>
-          <p:cNvPr id="10" name="TextBox 9"/>
-          <p:cNvSpPr txBox="1"/>
-          <p:nvPr/>
-        </p:nvSpPr>
-        <p:spPr>
-          <a:xfrm>
-            <a:off x="4450080" y="2554600"/>
-            <a:ext cx="3261360" cy="440689"/>
-          </a:xfrm>
-          <a:prstGeom prst="rect">
-            <a:avLst/>
-          </a:prstGeom>
-          <a:noFill/>
-        </p:spPr>
-        <p:txBody>
-          <a:bodyPr wrap="square">
-            <a:spAutoFit/>
-          </a:bodyPr>
-          <a:lstStyle/>
-          <a:p>
-            <a:pPr algn="l"/>
-            <a:r>
-              <a:rPr sz="1100" b="0">
-                <a:solidFill>
-                  <a:srgbClr val="465461"/>
-                </a:solidFill>
-                <a:latin typeface="Arial"/>
-              </a:rPr>
-              <a:t>JSON estructurado (Telegram, chat logs)</a:t>
-            </a:r>
-          </a:p>
-        </p:txBody>
-      </p:sp>
-      <p:sp>
-        <p:nvSpPr>
-          <p:cNvPr id="11" name="TextBox 10"/>
-          <p:cNvSpPr txBox="1"/>
-          <p:nvPr/>
-        </p:nvSpPr>
-        <p:spPr>
-          <a:xfrm>
-            <a:off x="7802880" y="2554600"/>
-            <a:ext cx="3261360" cy="440689"/>
-          </a:xfrm>
-          <a:prstGeom prst="rect">
-            <a:avLst/>
-          </a:prstGeom>
-          <a:noFill/>
-        </p:spPr>
-        <p:txBody>
-          <a:bodyPr wrap="square">
-            <a:spAutoFit/>
-          </a:bodyPr>
-          <a:lstStyle/>
-          <a:p>
-            <a:pPr algn="l"/>
-            <a:r>
-              <a:rPr sz="1100" b="0">
-                <a:solidFill>
-                  <a:srgbClr val="465461"/>
-                </a:solidFill>
-                <a:latin typeface="Arial"/>
-              </a:rPr>
-              <a:t>Schema conocido, parseable directamente, encoding limpio</a:t>
-            </a:r>
-          </a:p>
-        </p:txBody>
-      </p:sp>
-      <p:sp>
-        <p:nvSpPr>
-          <p:cNvPr id="12" name="Rectangle 11"/>
-          <p:cNvSpPr/>
-          <p:nvPr/>
-        </p:nvSpPr>
-        <p:spPr>
-          <a:xfrm>
-            <a:off x="1051560" y="2955290"/>
-            <a:ext cx="10058400" cy="440689"/>
-          </a:xfrm>
-          <a:prstGeom prst="rect">
-            <a:avLst/>
-          </a:prstGeom>
-          <a:solidFill>
-            <a:srgbClr val="FFFFFF"/>
-          </a:solidFill>
-          <a:ln>
-            <a:noFill/>
-          </a:ln>
-        </p:spPr>
-        <p:style>
-          <a:lnRef idx="1">
-            <a:schemeClr val="accent1"/>
-          </a:lnRef>
-          <a:fillRef idx="3">
-            <a:schemeClr val="accent1"/>
-          </a:fillRef>
-          <a:effectRef idx="2">
-            <a:schemeClr val="accent1"/>
-          </a:effectRef>
-          <a:fontRef idx="minor">
-            <a:schemeClr val="lt1"/>
-          </a:fontRef>
-        </p:style>
-        <p:txBody>
-          <a:bodyPr rtlCol="0" anchor="ctr"/>
-          <a:lstStyle/>
-          <a:p>
-            <a:pPr algn="ctr"/>
-          </a:p>
-        </p:txBody>
-      </p:sp>
-      <p:sp>
-        <p:nvSpPr>
-          <p:cNvPr id="13" name="TextBox 12"/>
-          <p:cNvSpPr txBox="1"/>
-          <p:nvPr/>
-        </p:nvSpPr>
-        <p:spPr>
-          <a:xfrm>
-            <a:off x="1097280" y="2995290"/>
-            <a:ext cx="3261360" cy="440689"/>
-          </a:xfrm>
-          <a:prstGeom prst="rect">
-            <a:avLst/>
-          </a:prstGeom>
-          <a:noFill/>
-        </p:spPr>
-        <p:txBody>
-          <a:bodyPr wrap="square">
-            <a:spAutoFit/>
-          </a:bodyPr>
-          <a:lstStyle/>
-          <a:p>
-            <a:pPr algn="l"/>
-            <a:r>
-              <a:rPr sz="1100" b="0">
-                <a:solidFill>
-                  <a:srgbClr val="465461"/>
-                </a:solidFill>
-                <a:latin typeface="Arial"/>
-              </a:rPr>
-              <a:t>A</a:t>
-            </a:r>
-          </a:p>
-        </p:txBody>
-      </p:sp>
-      <p:sp>
-        <p:nvSpPr>
-          <p:cNvPr id="14" name="TextBox 13"/>
-          <p:cNvSpPr txBox="1"/>
-          <p:nvPr/>
-        </p:nvSpPr>
-        <p:spPr>
-          <a:xfrm>
-            <a:off x="4450080" y="2995290"/>
-            <a:ext cx="3261360" cy="440689"/>
-          </a:xfrm>
-          <a:prstGeom prst="rect">
-            <a:avLst/>
-          </a:prstGeom>
-          <a:noFill/>
-        </p:spPr>
-        <p:txBody>
-          <a:bodyPr wrap="square">
-            <a:spAutoFit/>
-          </a:bodyPr>
-          <a:lstStyle/>
-          <a:p>
-            <a:pPr algn="l"/>
-            <a:r>
-              <a:rPr sz="1100" b="0">
-                <a:solidFill>
-                  <a:srgbClr val="465461"/>
-                </a:solidFill>
-                <a:latin typeface="Arial"/>
-              </a:rPr>
-              <a:t>vBulletin / IPS estándar</a:t>
-            </a:r>
-          </a:p>
-        </p:txBody>
-      </p:sp>
-      <p:sp>
-        <p:nvSpPr>
-          <p:cNvPr id="15" name="TextBox 14"/>
-          <p:cNvSpPr txBox="1"/>
-          <p:nvPr/>
-        </p:nvSpPr>
-        <p:spPr>
-          <a:xfrm>
-            <a:off x="7802880" y="2995290"/>
-            <a:ext cx="3261360" cy="440689"/>
-          </a:xfrm>
-          <a:prstGeom prst="rect">
-            <a:avLst/>
-          </a:prstGeom>
-          <a:noFill/>
-        </p:spPr>
-        <p:txBody>
-          <a:bodyPr wrap="square">
-            <a:spAutoFit/>
-          </a:bodyPr>
-          <a:lstStyle/>
-          <a:p>
-            <a:pPr algn="l"/>
-            <a:r>
-              <a:rPr sz="1100" b="0">
-                <a:solidFill>
-                  <a:srgbClr val="465461"/>
-                </a:solidFill>
-                <a:latin typeface="Arial"/>
-              </a:rPr>
-              <a:t>Schema documentado, hay parsers, columnas predecibles</a:t>
-            </a:r>
-          </a:p>
-        </p:txBody>
-      </p:sp>
-      <p:sp>
-        <p:nvSpPr>
-          <p:cNvPr id="16" name="Rectangle 15"/>
-          <p:cNvSpPr/>
-          <p:nvPr/>
-        </p:nvSpPr>
-        <p:spPr>
-          <a:xfrm>
-            <a:off x="1051560" y="3395979"/>
-            <a:ext cx="10058400" cy="440689"/>
-          </a:xfrm>
-          <a:prstGeom prst="rect">
-            <a:avLst/>
-          </a:prstGeom>
-          <a:solidFill>
-            <a:srgbClr val="F1F2F6"/>
-          </a:solidFill>
-          <a:ln>
-            <a:noFill/>
-          </a:ln>
-        </p:spPr>
-        <p:style>
-          <a:lnRef idx="1">
-            <a:schemeClr val="accent1"/>
-          </a:lnRef>
-          <a:fillRef idx="3">
-            <a:schemeClr val="accent1"/>
-          </a:fillRef>
-          <a:effectRef idx="2">
-            <a:schemeClr val="accent1"/>
-          </a:effectRef>
-          <a:fontRef idx="minor">
-            <a:schemeClr val="lt1"/>
-          </a:fontRef>
-        </p:style>
-        <p:txBody>
-          <a:bodyPr rtlCol="0" anchor="ctr"/>
-          <a:lstStyle/>
-          <a:p>
-            <a:pPr algn="ctr"/>
-          </a:p>
-        </p:txBody>
-      </p:sp>
-      <p:sp>
-        <p:nvSpPr>
-          <p:cNvPr id="17" name="TextBox 16"/>
-          <p:cNvSpPr txBox="1"/>
-          <p:nvPr/>
-        </p:nvSpPr>
-        <p:spPr>
-          <a:xfrm>
-            <a:off x="1097280" y="3435979"/>
-            <a:ext cx="3261360" cy="440689"/>
-          </a:xfrm>
-          <a:prstGeom prst="rect">
-            <a:avLst/>
-          </a:prstGeom>
-          <a:noFill/>
-        </p:spPr>
-        <p:txBody>
-          <a:bodyPr wrap="square">
-            <a:spAutoFit/>
-          </a:bodyPr>
-          <a:lstStyle/>
-          <a:p>
-            <a:pPr algn="l"/>
-            <a:r>
-              <a:rPr sz="1100" b="0">
-                <a:solidFill>
-                  <a:srgbClr val="465461"/>
-                </a:solidFill>
-                <a:latin typeface="Arial"/>
-              </a:rPr>
-              <a:t>B</a:t>
-            </a:r>
-          </a:p>
-        </p:txBody>
-      </p:sp>
-      <p:sp>
-        <p:nvSpPr>
-          <p:cNvPr id="18" name="TextBox 17"/>
-          <p:cNvSpPr txBox="1"/>
-          <p:nvPr/>
-        </p:nvSpPr>
-        <p:spPr>
-          <a:xfrm>
-            <a:off x="4450080" y="3435979"/>
-            <a:ext cx="3261360" cy="440689"/>
-          </a:xfrm>
-          <a:prstGeom prst="rect">
-            <a:avLst/>
-          </a:prstGeom>
-          <a:noFill/>
-        </p:spPr>
-        <p:txBody>
-          <a:bodyPr wrap="square">
-            <a:spAutoFit/>
-          </a:bodyPr>
-          <a:lstStyle/>
-          <a:p>
-            <a:pPr algn="l"/>
-            <a:r>
-              <a:rPr sz="1100" b="0">
-                <a:solidFill>
-                  <a:srgbClr val="465461"/>
-                </a:solidFill>
-                <a:latin typeface="Arial"/>
-              </a:rPr>
-              <a:t>vBulletin / IPS con variantes</a:t>
-            </a:r>
-          </a:p>
-        </p:txBody>
-      </p:sp>
-      <p:sp>
-        <p:nvSpPr>
-          <p:cNvPr id="19" name="TextBox 18"/>
-          <p:cNvSpPr txBox="1"/>
-          <p:nvPr/>
-        </p:nvSpPr>
-        <p:spPr>
-          <a:xfrm>
-            <a:off x="7802880" y="3435979"/>
-            <a:ext cx="3261360" cy="440689"/>
-          </a:xfrm>
-          <a:prstGeom prst="rect">
-            <a:avLst/>
-          </a:prstGeom>
-          <a:noFill/>
-        </p:spPr>
-        <p:txBody>
-          <a:bodyPr wrap="square">
-            <a:spAutoFit/>
-          </a:bodyPr>
-          <a:lstStyle/>
-          <a:p>
-            <a:pPr algn="l"/>
-            <a:r>
-              <a:rPr sz="1100" b="0">
-                <a:solidFill>
-                  <a:srgbClr val="465461"/>
-                </a:solidFill>
-                <a:latin typeface="Arial"/>
-              </a:rPr>
-              <a:t>Requiere detección automática de versión y prefijo</a:t>
-            </a:r>
-          </a:p>
-        </p:txBody>
-      </p:sp>
-      <p:sp>
-        <p:nvSpPr>
-          <p:cNvPr id="20" name="Rectangle 19"/>
-          <p:cNvSpPr/>
-          <p:nvPr/>
-        </p:nvSpPr>
-        <p:spPr>
-          <a:xfrm>
-            <a:off x="1051560" y="3836669"/>
-            <a:ext cx="10058400" cy="440689"/>
-          </a:xfrm>
-          <a:prstGeom prst="rect">
-            <a:avLst/>
-          </a:prstGeom>
-          <a:solidFill>
-            <a:srgbClr val="FFFFFF"/>
-          </a:solidFill>
-          <a:ln>
-            <a:noFill/>
-          </a:ln>
-        </p:spPr>
-        <p:style>
-          <a:lnRef idx="1">
-            <a:schemeClr val="accent1"/>
-          </a:lnRef>
-          <a:fillRef idx="3">
-            <a:schemeClr val="accent1"/>
-          </a:fillRef>
-          <a:effectRef idx="2">
-            <a:schemeClr val="accent1"/>
-          </a:effectRef>
-          <a:fontRef idx="minor">
-            <a:schemeClr val="lt1"/>
-          </a:fontRef>
-        </p:style>
-        <p:txBody>
-          <a:bodyPr rtlCol="0" anchor="ctr"/>
-          <a:lstStyle/>
-          <a:p>
-            <a:pPr algn="ctr"/>
-          </a:p>
-        </p:txBody>
-      </p:sp>
-      <p:sp>
-        <p:nvSpPr>
-          <p:cNvPr id="21" name="TextBox 20"/>
-          <p:cNvSpPr txBox="1"/>
-          <p:nvPr/>
-        </p:nvSpPr>
-        <p:spPr>
-          <a:xfrm>
-            <a:off x="1097280" y="3876669"/>
-            <a:ext cx="3261360" cy="440689"/>
-          </a:xfrm>
-          <a:prstGeom prst="rect">
-            <a:avLst/>
-          </a:prstGeom>
-          <a:noFill/>
-        </p:spPr>
-        <p:txBody>
-          <a:bodyPr wrap="square">
-            <a:spAutoFit/>
-          </a:bodyPr>
-          <a:lstStyle/>
-          <a:p>
-            <a:pPr algn="l"/>
-            <a:r>
-              <a:rPr sz="1100" b="0">
-                <a:solidFill>
-                  <a:srgbClr val="465461"/>
-                </a:solidFill>
-                <a:latin typeface="Arial"/>
-              </a:rPr>
-              <a:t>C</a:t>
-            </a:r>
-          </a:p>
-        </p:txBody>
-      </p:sp>
-      <p:sp>
-        <p:nvSpPr>
-          <p:cNvPr id="22" name="TextBox 21"/>
-          <p:cNvSpPr txBox="1"/>
-          <p:nvPr/>
-        </p:nvSpPr>
-        <p:spPr>
-          <a:xfrm>
-            <a:off x="4450080" y="3876669"/>
-            <a:ext cx="3261360" cy="440689"/>
-          </a:xfrm>
-          <a:prstGeom prst="rect">
-            <a:avLst/>
-          </a:prstGeom>
-          <a:noFill/>
-        </p:spPr>
-        <p:txBody>
-          <a:bodyPr wrap="square">
-            <a:spAutoFit/>
-          </a:bodyPr>
-          <a:lstStyle/>
-          <a:p>
-            <a:pPr algn="l"/>
-            <a:r>
-              <a:rPr sz="1100" b="0">
-                <a:solidFill>
-                  <a:srgbClr val="465461"/>
-                </a:solidFill>
-                <a:latin typeface="Arial"/>
-              </a:rPr>
-              <a:t>Flat files delimitados</a:t>
-            </a:r>
-          </a:p>
-        </p:txBody>
-      </p:sp>
-      <p:sp>
-        <p:nvSpPr>
-          <p:cNvPr id="23" name="TextBox 22"/>
-          <p:cNvSpPr txBox="1"/>
-          <p:nvPr/>
-        </p:nvSpPr>
-        <p:spPr>
-          <a:xfrm>
-            <a:off x="7802880" y="3876669"/>
-            <a:ext cx="3261360" cy="440689"/>
-          </a:xfrm>
-          <a:prstGeom prst="rect">
-            <a:avLst/>
-          </a:prstGeom>
-          <a:noFill/>
-        </p:spPr>
-        <p:txBody>
-          <a:bodyPr wrap="square">
-            <a:spAutoFit/>
-          </a:bodyPr>
-          <a:lstStyle/>
-          <a:p>
-            <a:pPr algn="l"/>
-            <a:r>
-              <a:rPr sz="1100" b="0">
-                <a:solidFill>
-                  <a:srgbClr val="465461"/>
-                </a:solidFill>
-                <a:latin typeface="Arial"/>
-              </a:rPr>
-              <a:t>Hay que inferir el schema caso a caso — cada dump es diferente</a:t>
-            </a:r>
-          </a:p>
-        </p:txBody>
-      </p:sp>
-      <p:sp>
-        <p:nvSpPr>
-          <p:cNvPr id="24" name="Rectangle 23"/>
-          <p:cNvSpPr/>
-          <p:nvPr/>
-        </p:nvSpPr>
-        <p:spPr>
-          <a:xfrm>
-            <a:off x="1051560" y="4277359"/>
-            <a:ext cx="10058400" cy="440689"/>
-          </a:xfrm>
-          <a:prstGeom prst="rect">
-            <a:avLst/>
-          </a:prstGeom>
-          <a:solidFill>
-            <a:srgbClr val="F1F2F6"/>
-          </a:solidFill>
-          <a:ln>
-            <a:noFill/>
-          </a:ln>
-        </p:spPr>
-        <p:style>
-          <a:lnRef idx="1">
-            <a:schemeClr val="accent1"/>
-          </a:lnRef>
-          <a:fillRef idx="3">
-            <a:schemeClr val="accent1"/>
-          </a:fillRef>
-          <a:effectRef idx="2">
-            <a:schemeClr val="accent1"/>
-          </a:effectRef>
-          <a:fontRef idx="minor">
-            <a:schemeClr val="lt1"/>
-          </a:fontRef>
-        </p:style>
-        <p:txBody>
-          <a:bodyPr rtlCol="0" anchor="ctr"/>
-          <a:lstStyle/>
-          <a:p>
-            <a:pPr algn="ctr"/>
-          </a:p>
-        </p:txBody>
-      </p:sp>
-      <p:sp>
-        <p:nvSpPr>
-          <p:cNvPr id="25" name="TextBox 24"/>
-          <p:cNvSpPr txBox="1"/>
-          <p:nvPr/>
-        </p:nvSpPr>
-        <p:spPr>
-          <a:xfrm>
-            <a:off x="1097280" y="4317359"/>
-            <a:ext cx="3261360" cy="440689"/>
-          </a:xfrm>
-          <a:prstGeom prst="rect">
-            <a:avLst/>
-          </a:prstGeom>
-          <a:noFill/>
-        </p:spPr>
-        <p:txBody>
-          <a:bodyPr wrap="square">
-            <a:spAutoFit/>
-          </a:bodyPr>
-          <a:lstStyle/>
-          <a:p>
-            <a:pPr algn="l"/>
-            <a:r>
-              <a:rPr sz="1100" b="0">
-                <a:solidFill>
-                  <a:srgbClr val="465461"/>
-                </a:solidFill>
-                <a:latin typeface="Arial"/>
-              </a:rPr>
-              <a:t>D</a:t>
-            </a:r>
-          </a:p>
-        </p:txBody>
-      </p:sp>
-      <p:sp>
-        <p:nvSpPr>
-          <p:cNvPr id="26" name="TextBox 25"/>
-          <p:cNvSpPr txBox="1"/>
-          <p:nvPr/>
-        </p:nvSpPr>
-        <p:spPr>
-          <a:xfrm>
-            <a:off x="4450080" y="4317359"/>
-            <a:ext cx="3261360" cy="440689"/>
-          </a:xfrm>
-          <a:prstGeom prst="rect">
-            <a:avLst/>
-          </a:prstGeom>
-          <a:noFill/>
-        </p:spPr>
-        <p:txBody>
-          <a:bodyPr wrap="square">
-            <a:spAutoFit/>
-          </a:bodyPr>
-          <a:lstStyle/>
-          <a:p>
-            <a:pPr algn="l"/>
-            <a:r>
-              <a:rPr sz="1100" b="0">
-                <a:solidFill>
-                  <a:srgbClr val="465461"/>
-                </a:solidFill>
-                <a:latin typeface="Arial"/>
-              </a:rPr>
-              <a:t>Dumps custom / propietarios</a:t>
-            </a:r>
-          </a:p>
-        </p:txBody>
-      </p:sp>
-      <p:sp>
-        <p:nvSpPr>
-          <p:cNvPr id="27" name="TextBox 26"/>
-          <p:cNvSpPr txBox="1"/>
-          <p:nvPr/>
-        </p:nvSpPr>
-        <p:spPr>
-          <a:xfrm>
-            <a:off x="7802880" y="4317359"/>
-            <a:ext cx="3261360" cy="440689"/>
-          </a:xfrm>
-          <a:prstGeom prst="rect">
-            <a:avLst/>
-          </a:prstGeom>
-          <a:noFill/>
-        </p:spPr>
-        <p:txBody>
-          <a:bodyPr wrap="square">
-            <a:spAutoFit/>
-          </a:bodyPr>
-          <a:lstStyle/>
-          <a:p>
-            <a:pPr algn="l"/>
-            <a:r>
-              <a:rPr sz="1100" b="0">
-                <a:solidFill>
-                  <a:srgbClr val="465461"/>
-                </a:solidFill>
-                <a:latin typeface="Arial"/>
-              </a:rPr>
-              <a:t>Sin documentación, requieren ingeniería inversa del schema</a:t>
-            </a:r>
-          </a:p>
-        </p:txBody>
-      </p:sp>
+        </p:nvGraphicFramePr>
+        <p:xfrm>
+          <a:off x="1051560" y="2148840"/>
+          <a:ext cx="10058400" cy="2194560"/>
+        </p:xfrm>
+        <a:graphic>
+          <a:graphicData uri="http://schemas.openxmlformats.org/drawingml/2006/table">
+            <a:tbl>
+              <a:tblPr>
+                <a:tableStyleId>{5C22544A-7EE6-4342-B048-85BDC9FD1C3A}</a:tableStyleId>
+              </a:tblPr>
+              <a:tblGrid>
+                <a:gridCol w="3352800"/>
+                <a:gridCol w="3352800"/>
+                <a:gridCol w="3352800"/>
+              </a:tblGrid>
+              <a:tr h="365760">
+                <a:tc>
+                  <a:txBody>
+                    <a:bodyPr/>
+                    <a:lstStyle/>
+                    <a:p>
+                      <a:r>
+                        <a:rPr sz="1200" b="1">
+                          <a:solidFill>
+                            <a:srgbClr val="FFFFFF"/>
+                          </a:solidFill>
+                          <a:latin typeface="Arial"/>
+                        </a:rPr>
+                        <a:t>Tier</a:t>
+                      </a:r>
+                    </a:p>
+                  </a:txBody>
+                  <a:tcPr marL="45000" marR="45000" marT="25000" marB="25000" anchor="ctr">
+                    <a:solidFill>
+                      <a:srgbClr val="CD2D37"/>
+                    </a:solidFill>
+                  </a:tcPr>
+                </a:tc>
+                <a:tc>
+                  <a:txBody>
+                    <a:bodyPr/>
+                    <a:lstStyle/>
+                    <a:p>
+                      <a:r>
+                        <a:rPr sz="1200" b="1">
+                          <a:solidFill>
+                            <a:srgbClr val="FFFFFF"/>
+                          </a:solidFill>
+                          <a:latin typeface="Arial"/>
+                        </a:rPr>
+                        <a:t>Formato</a:t>
+                      </a:r>
+                    </a:p>
+                  </a:txBody>
+                  <a:tcPr marL="45000" marR="45000" marT="25000" marB="25000" anchor="ctr">
+                    <a:solidFill>
+                      <a:srgbClr val="CD2D37"/>
+                    </a:solidFill>
+                  </a:tcPr>
+                </a:tc>
+                <a:tc>
+                  <a:txBody>
+                    <a:bodyPr/>
+                    <a:lstStyle/>
+                    <a:p>
+                      <a:r>
+                        <a:rPr sz="1200" b="1">
+                          <a:solidFill>
+                            <a:srgbClr val="FFFFFF"/>
+                          </a:solidFill>
+                          <a:latin typeface="Arial"/>
+                        </a:rPr>
+                        <a:t>Por qué</a:t>
+                      </a:r>
+                    </a:p>
+                  </a:txBody>
+                  <a:tcPr marL="45000" marR="45000" marT="25000" marB="25000" anchor="ctr">
+                    <a:solidFill>
+                      <a:srgbClr val="CD2D37"/>
+                    </a:solidFill>
+                  </a:tcPr>
+                </a:tc>
+              </a:tr>
+              <a:tr h="365760">
+                <a:tc>
+                  <a:txBody>
+                    <a:bodyPr/>
+                    <a:lstStyle/>
+                    <a:p>
+                      <a:r>
+                        <a:rPr sz="1100" b="0">
+                          <a:solidFill>
+                            <a:srgbClr val="465461"/>
+                          </a:solidFill>
+                          <a:latin typeface="Arial"/>
+                        </a:rPr>
+                        <a:t>S</a:t>
+                      </a:r>
+                    </a:p>
+                  </a:txBody>
+                  <a:tcPr marL="45000" marR="45000" marT="25000" marB="25000" anchor="ctr">
+                    <a:solidFill>
+                      <a:srgbClr val="F1F2F6"/>
+                    </a:solidFill>
+                  </a:tcPr>
+                </a:tc>
+                <a:tc>
+                  <a:txBody>
+                    <a:bodyPr/>
+                    <a:lstStyle/>
+                    <a:p>
+                      <a:r>
+                        <a:rPr sz="1100" b="0">
+                          <a:solidFill>
+                            <a:srgbClr val="465461"/>
+                          </a:solidFill>
+                          <a:latin typeface="Arial"/>
+                        </a:rPr>
+                        <a:t>JSON estructurado (Telegram, chat logs)</a:t>
+                      </a:r>
+                    </a:p>
+                  </a:txBody>
+                  <a:tcPr marL="45000" marR="45000" marT="25000" marB="25000" anchor="ctr">
+                    <a:solidFill>
+                      <a:srgbClr val="F1F2F6"/>
+                    </a:solidFill>
+                  </a:tcPr>
+                </a:tc>
+                <a:tc>
+                  <a:txBody>
+                    <a:bodyPr/>
+                    <a:lstStyle/>
+                    <a:p>
+                      <a:r>
+                        <a:rPr sz="1100" b="0">
+                          <a:solidFill>
+                            <a:srgbClr val="465461"/>
+                          </a:solidFill>
+                          <a:latin typeface="Arial"/>
+                        </a:rPr>
+                        <a:t>Schema conocido, parseable directamente, encoding limpio</a:t>
+                      </a:r>
+                    </a:p>
+                  </a:txBody>
+                  <a:tcPr marL="45000" marR="45000" marT="25000" marB="25000" anchor="ctr">
+                    <a:solidFill>
+                      <a:srgbClr val="F1F2F6"/>
+                    </a:solidFill>
+                  </a:tcPr>
+                </a:tc>
+              </a:tr>
+              <a:tr h="365760">
+                <a:tc>
+                  <a:txBody>
+                    <a:bodyPr/>
+                    <a:lstStyle/>
+                    <a:p>
+                      <a:r>
+                        <a:rPr sz="1100" b="0">
+                          <a:solidFill>
+                            <a:srgbClr val="465461"/>
+                          </a:solidFill>
+                          <a:latin typeface="Arial"/>
+                        </a:rPr>
+                        <a:t>A</a:t>
+                      </a:r>
+                    </a:p>
+                  </a:txBody>
+                  <a:tcPr marL="45000" marR="45000" marT="25000" marB="25000" anchor="ctr">
+                    <a:solidFill>
+                      <a:srgbClr val="FFFFFF"/>
+                    </a:solidFill>
+                  </a:tcPr>
+                </a:tc>
+                <a:tc>
+                  <a:txBody>
+                    <a:bodyPr/>
+                    <a:lstStyle/>
+                    <a:p>
+                      <a:r>
+                        <a:rPr sz="1100" b="0">
+                          <a:solidFill>
+                            <a:srgbClr val="465461"/>
+                          </a:solidFill>
+                          <a:latin typeface="Arial"/>
+                        </a:rPr>
+                        <a:t>vBulletin / IPS estándar</a:t>
+                      </a:r>
+                    </a:p>
+                  </a:txBody>
+                  <a:tcPr marL="45000" marR="45000" marT="25000" marB="25000" anchor="ctr">
+                    <a:solidFill>
+                      <a:srgbClr val="FFFFFF"/>
+                    </a:solidFill>
+                  </a:tcPr>
+                </a:tc>
+                <a:tc>
+                  <a:txBody>
+                    <a:bodyPr/>
+                    <a:lstStyle/>
+                    <a:p>
+                      <a:r>
+                        <a:rPr sz="1100" b="0">
+                          <a:solidFill>
+                            <a:srgbClr val="465461"/>
+                          </a:solidFill>
+                          <a:latin typeface="Arial"/>
+                        </a:rPr>
+                        <a:t>Schema documentado, hay parsers, columnas predecibles</a:t>
+                      </a:r>
+                    </a:p>
+                  </a:txBody>
+                  <a:tcPr marL="45000" marR="45000" marT="25000" marB="25000" anchor="ctr">
+                    <a:solidFill>
+                      <a:srgbClr val="FFFFFF"/>
+                    </a:solidFill>
+                  </a:tcPr>
+                </a:tc>
+              </a:tr>
+              <a:tr h="365760">
+                <a:tc>
+                  <a:txBody>
+                    <a:bodyPr/>
+                    <a:lstStyle/>
+                    <a:p>
+                      <a:r>
+                        <a:rPr sz="1100" b="0">
+                          <a:solidFill>
+                            <a:srgbClr val="465461"/>
+                          </a:solidFill>
+                          <a:latin typeface="Arial"/>
+                        </a:rPr>
+                        <a:t>B</a:t>
+                      </a:r>
+                    </a:p>
+                  </a:txBody>
+                  <a:tcPr marL="45000" marR="45000" marT="25000" marB="25000" anchor="ctr">
+                    <a:solidFill>
+                      <a:srgbClr val="F1F2F6"/>
+                    </a:solidFill>
+                  </a:tcPr>
+                </a:tc>
+                <a:tc>
+                  <a:txBody>
+                    <a:bodyPr/>
+                    <a:lstStyle/>
+                    <a:p>
+                      <a:r>
+                        <a:rPr sz="1100" b="0">
+                          <a:solidFill>
+                            <a:srgbClr val="465461"/>
+                          </a:solidFill>
+                          <a:latin typeface="Arial"/>
+                        </a:rPr>
+                        <a:t>vBulletin / IPS con variantes</a:t>
+                      </a:r>
+                    </a:p>
+                  </a:txBody>
+                  <a:tcPr marL="45000" marR="45000" marT="25000" marB="25000" anchor="ctr">
+                    <a:solidFill>
+                      <a:srgbClr val="F1F2F6"/>
+                    </a:solidFill>
+                  </a:tcPr>
+                </a:tc>
+                <a:tc>
+                  <a:txBody>
+                    <a:bodyPr/>
+                    <a:lstStyle/>
+                    <a:p>
+                      <a:r>
+                        <a:rPr sz="1100" b="0">
+                          <a:solidFill>
+                            <a:srgbClr val="465461"/>
+                          </a:solidFill>
+                          <a:latin typeface="Arial"/>
+                        </a:rPr>
+                        <a:t>Requiere detección automática de versión y prefijo</a:t>
+                      </a:r>
+                    </a:p>
+                  </a:txBody>
+                  <a:tcPr marL="45000" marR="45000" marT="25000" marB="25000" anchor="ctr">
+                    <a:solidFill>
+                      <a:srgbClr val="F1F2F6"/>
+                    </a:solidFill>
+                  </a:tcPr>
+                </a:tc>
+              </a:tr>
+              <a:tr h="365760">
+                <a:tc>
+                  <a:txBody>
+                    <a:bodyPr/>
+                    <a:lstStyle/>
+                    <a:p>
+                      <a:r>
+                        <a:rPr sz="1100" b="0">
+                          <a:solidFill>
+                            <a:srgbClr val="465461"/>
+                          </a:solidFill>
+                          <a:latin typeface="Arial"/>
+                        </a:rPr>
+                        <a:t>C</a:t>
+                      </a:r>
+                    </a:p>
+                  </a:txBody>
+                  <a:tcPr marL="45000" marR="45000" marT="25000" marB="25000" anchor="ctr">
+                    <a:solidFill>
+                      <a:srgbClr val="FFFFFF"/>
+                    </a:solidFill>
+                  </a:tcPr>
+                </a:tc>
+                <a:tc>
+                  <a:txBody>
+                    <a:bodyPr/>
+                    <a:lstStyle/>
+                    <a:p>
+                      <a:r>
+                        <a:rPr sz="1100" b="0">
+                          <a:solidFill>
+                            <a:srgbClr val="465461"/>
+                          </a:solidFill>
+                          <a:latin typeface="Arial"/>
+                        </a:rPr>
+                        <a:t>Flat files delimitados</a:t>
+                      </a:r>
+                    </a:p>
+                  </a:txBody>
+                  <a:tcPr marL="45000" marR="45000" marT="25000" marB="25000" anchor="ctr">
+                    <a:solidFill>
+                      <a:srgbClr val="FFFFFF"/>
+                    </a:solidFill>
+                  </a:tcPr>
+                </a:tc>
+                <a:tc>
+                  <a:txBody>
+                    <a:bodyPr/>
+                    <a:lstStyle/>
+                    <a:p>
+                      <a:r>
+                        <a:rPr sz="1100" b="0">
+                          <a:solidFill>
+                            <a:srgbClr val="465461"/>
+                          </a:solidFill>
+                          <a:latin typeface="Arial"/>
+                        </a:rPr>
+                        <a:t>Hay que inferir el schema caso a caso — cada dump es diferente</a:t>
+                      </a:r>
+                    </a:p>
+                  </a:txBody>
+                  <a:tcPr marL="45000" marR="45000" marT="25000" marB="25000" anchor="ctr">
+                    <a:solidFill>
+                      <a:srgbClr val="FFFFFF"/>
+                    </a:solidFill>
+                  </a:tcPr>
+                </a:tc>
+              </a:tr>
+              <a:tr h="365760">
+                <a:tc>
+                  <a:txBody>
+                    <a:bodyPr/>
+                    <a:lstStyle/>
+                    <a:p>
+                      <a:r>
+                        <a:rPr sz="1100" b="0">
+                          <a:solidFill>
+                            <a:srgbClr val="465461"/>
+                          </a:solidFill>
+                          <a:latin typeface="Arial"/>
+                        </a:rPr>
+                        <a:t>D</a:t>
+                      </a:r>
+                    </a:p>
+                  </a:txBody>
+                  <a:tcPr marL="45000" marR="45000" marT="25000" marB="25000" anchor="ctr">
+                    <a:solidFill>
+                      <a:srgbClr val="F1F2F6"/>
+                    </a:solidFill>
+                  </a:tcPr>
+                </a:tc>
+                <a:tc>
+                  <a:txBody>
+                    <a:bodyPr/>
+                    <a:lstStyle/>
+                    <a:p>
+                      <a:r>
+                        <a:rPr sz="1100" b="0">
+                          <a:solidFill>
+                            <a:srgbClr val="465461"/>
+                          </a:solidFill>
+                          <a:latin typeface="Arial"/>
+                        </a:rPr>
+                        <a:t>Dumps custom / propietarios</a:t>
+                      </a:r>
+                    </a:p>
+                  </a:txBody>
+                  <a:tcPr marL="45000" marR="45000" marT="25000" marB="25000" anchor="ctr">
+                    <a:solidFill>
+                      <a:srgbClr val="F1F2F6"/>
+                    </a:solidFill>
+                  </a:tcPr>
+                </a:tc>
+                <a:tc>
+                  <a:txBody>
+                    <a:bodyPr/>
+                    <a:lstStyle/>
+                    <a:p>
+                      <a:r>
+                        <a:rPr sz="1100" b="0">
+                          <a:solidFill>
+                            <a:srgbClr val="465461"/>
+                          </a:solidFill>
+                          <a:latin typeface="Arial"/>
+                        </a:rPr>
+                        <a:t>Sin documentación, requieren ingeniería inversa del schema</a:t>
+                      </a:r>
+                    </a:p>
+                  </a:txBody>
+                  <a:tcPr marL="45000" marR="45000" marT="25000" marB="25000" anchor="ctr">
+                    <a:solidFill>
+                      <a:srgbClr val="F1F2F6"/>
+                    </a:solidFill>
+                  </a:tcPr>
+                </a:tc>
+              </a:tr>
+            </a:tbl>
+          </a:graphicData>
+        </a:graphic>
+      </p:graphicFrame>
     </p:spTree>
   </p:cSld>
   <p:clrMapOvr>

--- a/bloque0_ecosistema/csbc26_b0_ecosistema.pptx
+++ b/bloque0_ecosistema/csbc26_b0_ecosistema.pptx
@@ -6062,9 +6062,9 @@
                 <a:tableStyleId>{5C22544A-7EE6-4342-B048-85BDC9FD1C3A}</a:tableStyleId>
               </a:tblPr>
               <a:tblGrid>
-                <a:gridCol w="3352800"/>
-                <a:gridCol w="3352800"/>
-                <a:gridCol w="3352800"/>
+                <a:gridCol w="822960"/>
+                <a:gridCol w="4617720"/>
+                <a:gridCol w="4617720"/>
               </a:tblGrid>
               <a:tr h="365760">
                 <a:tc>
@@ -6072,6 +6072,7 @@
                     <a:bodyPr/>
                     <a:lstStyle/>
                     <a:p>
+                      <a:pPr algn="ctr"/>
                       <a:r>
                         <a:rPr sz="1200" b="1">
                           <a:solidFill>
@@ -6094,6 +6095,7 @@
                     <a:bodyPr/>
                     <a:lstStyle/>
                     <a:p>
+                      <a:pPr algn="l"/>
                       <a:r>
                         <a:rPr sz="1200" b="1">
                           <a:solidFill>
@@ -6116,6 +6118,7 @@
                     <a:bodyPr/>
                     <a:lstStyle/>
                     <a:p>
+                      <a:pPr algn="l"/>
                       <a:r>
                         <a:rPr sz="1200" b="1">
                           <a:solidFill>
@@ -6140,8 +6143,9 @@
                     <a:bodyPr/>
                     <a:lstStyle/>
                     <a:p>
+                      <a:pPr algn="ctr"/>
                       <a:r>
-                        <a:rPr sz="1100" b="0">
+                        <a:rPr sz="1800" b="1">
                           <a:solidFill>
                             <a:srgbClr val="465461"/>
                           </a:solidFill>
@@ -6153,7 +6157,7 @@
                   </a:txBody>
                   <a:tcPr marL="45000" marR="45000" marT="25000" marB="25000" anchor="ctr">
                     <a:solidFill>
-                      <a:srgbClr val="F1F2F6"/>
+                      <a:srgbClr val="FF7F7F"/>
                     </a:solidFill>
                   </a:tcPr>
                 </a:tc>
@@ -6175,7 +6179,7 @@
                   </a:txBody>
                   <a:tcPr marL="45000" marR="45000" marT="25000" marB="25000" anchor="ctr">
                     <a:solidFill>
-                      <a:srgbClr val="F1F2F6"/>
+                      <a:srgbClr val="FF7F7F"/>
                     </a:solidFill>
                   </a:tcPr>
                 </a:tc>
@@ -6197,7 +6201,7 @@
                   </a:txBody>
                   <a:tcPr marL="45000" marR="45000" marT="25000" marB="25000" anchor="ctr">
                     <a:solidFill>
-                      <a:srgbClr val="F1F2F6"/>
+                      <a:srgbClr val="FF7F7F"/>
                     </a:solidFill>
                   </a:tcPr>
                 </a:tc>
@@ -6208,8 +6212,9 @@
                     <a:bodyPr/>
                     <a:lstStyle/>
                     <a:p>
+                      <a:pPr algn="ctr"/>
                       <a:r>
-                        <a:rPr sz="1100" b="0">
+                        <a:rPr sz="1800" b="1">
                           <a:solidFill>
                             <a:srgbClr val="465461"/>
                           </a:solidFill>
@@ -6221,7 +6226,7 @@
                   </a:txBody>
                   <a:tcPr marL="45000" marR="45000" marT="25000" marB="25000" anchor="ctr">
                     <a:solidFill>
-                      <a:srgbClr val="FFFFFF"/>
+                      <a:srgbClr val="FFBF7F"/>
                     </a:solidFill>
                   </a:tcPr>
                 </a:tc>
@@ -6243,7 +6248,7 @@
                   </a:txBody>
                   <a:tcPr marL="45000" marR="45000" marT="25000" marB="25000" anchor="ctr">
                     <a:solidFill>
-                      <a:srgbClr val="FFFFFF"/>
+                      <a:srgbClr val="FFBF7F"/>
                     </a:solidFill>
                   </a:tcPr>
                 </a:tc>
@@ -6265,7 +6270,7 @@
                   </a:txBody>
                   <a:tcPr marL="45000" marR="45000" marT="25000" marB="25000" anchor="ctr">
                     <a:solidFill>
-                      <a:srgbClr val="FFFFFF"/>
+                      <a:srgbClr val="FFBF7F"/>
                     </a:solidFill>
                   </a:tcPr>
                 </a:tc>
@@ -6276,8 +6281,9 @@
                     <a:bodyPr/>
                     <a:lstStyle/>
                     <a:p>
+                      <a:pPr algn="ctr"/>
                       <a:r>
-                        <a:rPr sz="1100" b="0">
+                        <a:rPr sz="1800" b="1">
                           <a:solidFill>
                             <a:srgbClr val="465461"/>
                           </a:solidFill>
@@ -6289,7 +6295,7 @@
                   </a:txBody>
                   <a:tcPr marL="45000" marR="45000" marT="25000" marB="25000" anchor="ctr">
                     <a:solidFill>
-                      <a:srgbClr val="F1F2F6"/>
+                      <a:srgbClr val="FFDF7F"/>
                     </a:solidFill>
                   </a:tcPr>
                 </a:tc>
@@ -6311,7 +6317,7 @@
                   </a:txBody>
                   <a:tcPr marL="45000" marR="45000" marT="25000" marB="25000" anchor="ctr">
                     <a:solidFill>
-                      <a:srgbClr val="F1F2F6"/>
+                      <a:srgbClr val="FFDF7F"/>
                     </a:solidFill>
                   </a:tcPr>
                 </a:tc>
@@ -6333,7 +6339,7 @@
                   </a:txBody>
                   <a:tcPr marL="45000" marR="45000" marT="25000" marB="25000" anchor="ctr">
                     <a:solidFill>
-                      <a:srgbClr val="F1F2F6"/>
+                      <a:srgbClr val="FFDF7F"/>
                     </a:solidFill>
                   </a:tcPr>
                 </a:tc>
@@ -6344,8 +6350,9 @@
                     <a:bodyPr/>
                     <a:lstStyle/>
                     <a:p>
+                      <a:pPr algn="ctr"/>
                       <a:r>
-                        <a:rPr sz="1100" b="0">
+                        <a:rPr sz="1800" b="1">
                           <a:solidFill>
                             <a:srgbClr val="465461"/>
                           </a:solidFill>
@@ -6357,7 +6364,7 @@
                   </a:txBody>
                   <a:tcPr marL="45000" marR="45000" marT="25000" marB="25000" anchor="ctr">
                     <a:solidFill>
-                      <a:srgbClr val="FFFFFF"/>
+                      <a:srgbClr val="FFFF7F"/>
                     </a:solidFill>
                   </a:tcPr>
                 </a:tc>
@@ -6379,7 +6386,7 @@
                   </a:txBody>
                   <a:tcPr marL="45000" marR="45000" marT="25000" marB="25000" anchor="ctr">
                     <a:solidFill>
-                      <a:srgbClr val="FFFFFF"/>
+                      <a:srgbClr val="FFFF7F"/>
                     </a:solidFill>
                   </a:tcPr>
                 </a:tc>
@@ -6401,7 +6408,7 @@
                   </a:txBody>
                   <a:tcPr marL="45000" marR="45000" marT="25000" marB="25000" anchor="ctr">
                     <a:solidFill>
-                      <a:srgbClr val="FFFFFF"/>
+                      <a:srgbClr val="FFFF7F"/>
                     </a:solidFill>
                   </a:tcPr>
                 </a:tc>
@@ -6674,9 +6681,9 @@
                 <a:tableStyleId>{5C22544A-7EE6-4342-B048-85BDC9FD1C3A}</a:tableStyleId>
               </a:tblPr>
               <a:tblGrid>
-                <a:gridCol w="3352800"/>
-                <a:gridCol w="3352800"/>
-                <a:gridCol w="3352800"/>
+                <a:gridCol w="822960"/>
+                <a:gridCol w="4617720"/>
+                <a:gridCol w="4617720"/>
               </a:tblGrid>
               <a:tr h="365760">
                 <a:tc>
@@ -6684,6 +6691,7 @@
                     <a:bodyPr/>
                     <a:lstStyle/>
                     <a:p>
+                      <a:pPr algn="ctr"/>
                       <a:r>
                         <a:rPr sz="1200" b="1">
                           <a:solidFill>
@@ -6706,6 +6714,7 @@
                     <a:bodyPr/>
                     <a:lstStyle/>
                     <a:p>
+                      <a:pPr algn="l"/>
                       <a:r>
                         <a:rPr sz="1200" b="1">
                           <a:solidFill>
@@ -6728,6 +6737,7 @@
                     <a:bodyPr/>
                     <a:lstStyle/>
                     <a:p>
+                      <a:pPr algn="l"/>
                       <a:r>
                         <a:rPr sz="1200" b="1">
                           <a:solidFill>
@@ -6752,8 +6762,9 @@
                     <a:bodyPr/>
                     <a:lstStyle/>
                     <a:p>
+                      <a:pPr algn="ctr"/>
                       <a:r>
-                        <a:rPr sz="1100" b="0">
+                        <a:rPr sz="1800" b="1">
                           <a:solidFill>
                             <a:srgbClr val="465461"/>
                           </a:solidFill>
@@ -6765,7 +6776,7 @@
                   </a:txBody>
                   <a:tcPr marL="45000" marR="45000" marT="25000" marB="25000" anchor="ctr">
                     <a:solidFill>
-                      <a:srgbClr val="F1F2F6"/>
+                      <a:srgbClr val="FF7F7F"/>
                     </a:solidFill>
                   </a:tcPr>
                 </a:tc>
@@ -6787,7 +6798,7 @@
                   </a:txBody>
                   <a:tcPr marL="45000" marR="45000" marT="25000" marB="25000" anchor="ctr">
                     <a:solidFill>
-                      <a:srgbClr val="F1F2F6"/>
+                      <a:srgbClr val="FF7F7F"/>
                     </a:solidFill>
                   </a:tcPr>
                 </a:tc>
@@ -6809,7 +6820,7 @@
                   </a:txBody>
                   <a:tcPr marL="45000" marR="45000" marT="25000" marB="25000" anchor="ctr">
                     <a:solidFill>
-                      <a:srgbClr val="F1F2F6"/>
+                      <a:srgbClr val="FF7F7F"/>
                     </a:solidFill>
                   </a:tcPr>
                 </a:tc>
@@ -6820,8 +6831,9 @@
                     <a:bodyPr/>
                     <a:lstStyle/>
                     <a:p>
+                      <a:pPr algn="ctr"/>
                       <a:r>
-                        <a:rPr sz="1100" b="0">
+                        <a:rPr sz="1800" b="1">
                           <a:solidFill>
                             <a:srgbClr val="465461"/>
                           </a:solidFill>
@@ -6833,7 +6845,7 @@
                   </a:txBody>
                   <a:tcPr marL="45000" marR="45000" marT="25000" marB="25000" anchor="ctr">
                     <a:solidFill>
-                      <a:srgbClr val="FFFFFF"/>
+                      <a:srgbClr val="FFBF7F"/>
                     </a:solidFill>
                   </a:tcPr>
                 </a:tc>
@@ -6855,7 +6867,7 @@
                   </a:txBody>
                   <a:tcPr marL="45000" marR="45000" marT="25000" marB="25000" anchor="ctr">
                     <a:solidFill>
-                      <a:srgbClr val="FFFFFF"/>
+                      <a:srgbClr val="FFBF7F"/>
                     </a:solidFill>
                   </a:tcPr>
                 </a:tc>
@@ -6877,7 +6889,7 @@
                   </a:txBody>
                   <a:tcPr marL="45000" marR="45000" marT="25000" marB="25000" anchor="ctr">
                     <a:solidFill>
-                      <a:srgbClr val="FFFFFF"/>
+                      <a:srgbClr val="FFBF7F"/>
                     </a:solidFill>
                   </a:tcPr>
                 </a:tc>
@@ -6888,8 +6900,9 @@
                     <a:bodyPr/>
                     <a:lstStyle/>
                     <a:p>
+                      <a:pPr algn="ctr"/>
                       <a:r>
-                        <a:rPr sz="1100" b="0">
+                        <a:rPr sz="1800" b="1">
                           <a:solidFill>
                             <a:srgbClr val="465461"/>
                           </a:solidFill>
@@ -6901,7 +6914,7 @@
                   </a:txBody>
                   <a:tcPr marL="45000" marR="45000" marT="25000" marB="25000" anchor="ctr">
                     <a:solidFill>
-                      <a:srgbClr val="F1F2F6"/>
+                      <a:srgbClr val="FFDF7F"/>
                     </a:solidFill>
                   </a:tcPr>
                 </a:tc>
@@ -6923,7 +6936,7 @@
                   </a:txBody>
                   <a:tcPr marL="45000" marR="45000" marT="25000" marB="25000" anchor="ctr">
                     <a:solidFill>
-                      <a:srgbClr val="F1F2F6"/>
+                      <a:srgbClr val="FFDF7F"/>
                     </a:solidFill>
                   </a:tcPr>
                 </a:tc>
@@ -6945,7 +6958,7 @@
                   </a:txBody>
                   <a:tcPr marL="45000" marR="45000" marT="25000" marB="25000" anchor="ctr">
                     <a:solidFill>
-                      <a:srgbClr val="F1F2F6"/>
+                      <a:srgbClr val="FFDF7F"/>
                     </a:solidFill>
                   </a:tcPr>
                 </a:tc>
@@ -6956,8 +6969,9 @@
                     <a:bodyPr/>
                     <a:lstStyle/>
                     <a:p>
+                      <a:pPr algn="ctr"/>
                       <a:r>
-                        <a:rPr sz="1100" b="0">
+                        <a:rPr sz="1800" b="1">
                           <a:solidFill>
                             <a:srgbClr val="465461"/>
                           </a:solidFill>
@@ -6969,7 +6983,7 @@
                   </a:txBody>
                   <a:tcPr marL="45000" marR="45000" marT="25000" marB="25000" anchor="ctr">
                     <a:solidFill>
-                      <a:srgbClr val="FFFFFF"/>
+                      <a:srgbClr val="FFFF7F"/>
                     </a:solidFill>
                   </a:tcPr>
                 </a:tc>
@@ -6991,7 +7005,7 @@
                   </a:txBody>
                   <a:tcPr marL="45000" marR="45000" marT="25000" marB="25000" anchor="ctr">
                     <a:solidFill>
-                      <a:srgbClr val="FFFFFF"/>
+                      <a:srgbClr val="FFFF7F"/>
                     </a:solidFill>
                   </a:tcPr>
                 </a:tc>
@@ -7013,7 +7027,7 @@
                   </a:txBody>
                   <a:tcPr marL="45000" marR="45000" marT="25000" marB="25000" anchor="ctr">
                     <a:solidFill>
-                      <a:srgbClr val="FFFFFF"/>
+                      <a:srgbClr val="FFFF7F"/>
                     </a:solidFill>
                   </a:tcPr>
                 </a:tc>
@@ -7024,8 +7038,9 @@
                     <a:bodyPr/>
                     <a:lstStyle/>
                     <a:p>
+                      <a:pPr algn="ctr"/>
                       <a:r>
-                        <a:rPr sz="1100" b="0">
+                        <a:rPr sz="1800" b="1">
                           <a:solidFill>
                             <a:srgbClr val="465461"/>
                           </a:solidFill>
@@ -7037,7 +7052,7 @@
                   </a:txBody>
                   <a:tcPr marL="45000" marR="45000" marT="25000" marB="25000" anchor="ctr">
                     <a:solidFill>
-                      <a:srgbClr val="F1F2F6"/>
+                      <a:srgbClr val="BFFF7F"/>
                     </a:solidFill>
                   </a:tcPr>
                 </a:tc>
@@ -7059,7 +7074,7 @@
                   </a:txBody>
                   <a:tcPr marL="45000" marR="45000" marT="25000" marB="25000" anchor="ctr">
                     <a:solidFill>
-                      <a:srgbClr val="F1F2F6"/>
+                      <a:srgbClr val="BFFF7F"/>
                     </a:solidFill>
                   </a:tcPr>
                 </a:tc>
@@ -7081,7 +7096,7 @@
                   </a:txBody>
                   <a:tcPr marL="45000" marR="45000" marT="25000" marB="25000" anchor="ctr">
                     <a:solidFill>
-                      <a:srgbClr val="F1F2F6"/>
+                      <a:srgbClr val="BFFF7F"/>
                     </a:solidFill>
                   </a:tcPr>
                 </a:tc>

--- a/bloque0_ecosistema/csbc26_b0_ecosistema.pptx
+++ b/bloque0_ecosistema/csbc26_b0_ecosistema.pptx
@@ -893,17 +893,17 @@
           </a:p>
           <a:p>
             <a:r>
-              <a:t>BreachForums: mismo destino, dos veces (2023, 2024)</a:t>
-            </a:r>
-          </a:p>
-          <a:p>
-            <a:r>
-              <a:t>Preguntar audiencia: ¿migrarían sabiendo esto?</a:t>
-            </a:r>
-          </a:p>
-          <a:p>
-            <a:r>
-              <a:t>→ handles persisten aunque plataforma muera = oro investigativo</a:t>
+              <a:t>BreachForums: incorporó BD de RaidForums, preservó rangos de usuarios antiguos como gancho de migración</a:t>
+            </a:r>
+          </a:p>
+          <a:p>
+            <a:r>
+              <a:t>Seized dos veces más (2023, 2024)</a:t>
+            </a:r>
+          </a:p>
+          <a:p>
+            <a:r>
+              <a:t>→ monitorizar de forma pasiva, no hace falta operar dentro</a:t>
             </a:r>
           </a:p>
         </p:txBody>
@@ -988,7 +988,7 @@
           </a:p>
           <a:p>
             <a:r>
-              <a:t>Pregunta cierre: ¿cuál priorizar según objetivo?</a:t>
+              <a:t>Ojo: no siempre hay de todo — un dump viejo sin actividad reciente deja las IPs sin valor</a:t>
             </a:r>
           </a:p>
           <a:p>
@@ -1148,17 +1148,17 @@
           <a:lstStyle/>
           <a:p>
             <a:r>
-              <a:t>Clave: quien redistribuye también es brechado</a:t>
-            </a:r>
-          </a:p>
-          <a:p>
-            <a:r>
-              <a:t>Preguntar audiencia: ¿quién filtra al filtrador?</a:t>
-            </a:r>
-          </a:p>
-          <a:p>
-            <a:r>
-              <a:t>Dato en Telegram/paste: ¿fuente original o ya pasó manos?</a:t>
+              <a:t>3 vías, numeradas, cada una con distinta fiabilidad</a:t>
+            </a:r>
+          </a:p>
+          <a:p>
+            <a:r>
+              <a:t>Insider: LockBit 2022, developer vs. liderazgo del grupo</a:t>
+            </a:r>
+          </a:p>
+          <a:p>
+            <a:r>
+              <a:t>Redistribución = mercado de pago, no reparto altruista</a:t>
             </a:r>
           </a:p>
           <a:p>
@@ -1328,7 +1328,7 @@
           </a:p>
           <a:p>
             <a:r>
-              <a:t>Chat log Conti/BlackBasta &gt; dump SQL gigante</a:t>
+              <a:t>S: revela comportamiento, rol, con quién habla, conflictos</a:t>
             </a:r>
           </a:p>
           <a:p>
@@ -1498,22 +1498,22 @@
           <a:lstStyle/>
           <a:p>
             <a:r>
-              <a:t>vBulletin + cp1251 = dolor de cabeza habitual</a:t>
-            </a:r>
-          </a:p>
-          <a:p>
-            <a:r>
-              <a:t>IPS: variantes de schema rompen parsers fijos</a:t>
-            </a:r>
-          </a:p>
-          <a:p>
-            <a:r>
-              <a:t>Frase clave: encodings mixtos, tablas renombradas, backups incompletos</a:t>
-            </a:r>
-          </a:p>
-          <a:p>
-            <a:r>
-              <a:t>→ nunca asumir dump completo solo por abrir sin error</a:t>
+              <a:t>Encoding lo decide el admin, no el motor — cp1251 es cosa de NUESTROS casos (origen ruso), no regla de vBulletin</a:t>
+            </a:r>
+          </a:p>
+          <a:p>
+            <a:r>
+              <a:t>IPS: prefijo variable, detectar versión antes de asumir schema</a:t>
+            </a:r>
+          </a:p>
+          <a:p>
+            <a:r>
+              <a:t>MyBB: prefijo distinto por instalación</a:t>
+            </a:r>
+          </a:p>
+          <a:p>
+            <a:r>
+              <a:t>Un parser por formato en src/parsers/ — auto-detectar antes de elegir</a:t>
             </a:r>
           </a:p>
         </p:txBody>
@@ -1593,12 +1593,7 @@
           </a:p>
           <a:p>
             <a:r>
-              <a:t>JSON gana: schema conocido de antemano</a:t>
-            </a:r>
-          </a:p>
-          <a:p>
-            <a:r>
-              <a:t>Dump custom: ingeniería inversa desde cero</a:t>
+              <a:t>En los casos prácticos verán ambas dimensiones combinadas de formas distintas</a:t>
             </a:r>
           </a:p>
           <a:p>
@@ -1683,12 +1678,12 @@
           </a:p>
           <a:p>
             <a:r>
-              <a:t>cp1251 mal leído como UTF-8 → corrupción silenciosa, ejemplo perfecto</a:t>
-            </a:r>
-          </a:p>
-          <a:p>
-            <a:r>
-              <a:t>Frase resumen: no es limpieza, es arqueología de schemas</a:t>
+              <a:t>cp1251 mal leído como UTF-8 → corrupción silenciosa</a:t>
+            </a:r>
+          </a:p>
+          <a:p>
+            <a:r>
+              <a:t>Primero identificar estructura (tablas/campos), luego limpiar</a:t>
             </a:r>
           </a:p>
           <a:p>
@@ -5312,7 +5307,7 @@
           <a:lstStyle/>
           <a:p>
             <a:r>
-              <a:t>El ecosistema de leaks underground</a:t>
+              <a:t>El ecosistema de leaks</a:t>
             </a:r>
           </a:p>
           <a:p>
@@ -5374,7 +5369,7 @@
           <a:p>
             <a:pPr algn="ctr"/>
             <a:r>
-              <a:rPr sz="1300" b="1">
+              <a:rPr sz="1700" b="1">
                 <a:solidFill>
                   <a:srgbClr val="CD2D37"/>
                 </a:solidFill>
@@ -5454,8 +5449,8 @@
         </p:nvSpPr>
         <p:spPr>
           <a:xfrm>
-            <a:off x="1073427" y="2077576"/>
-            <a:ext cx="10084904" cy="3507298"/>
+            <a:off x="1073427" y="2214736"/>
+            <a:ext cx="10084904" cy="3370138"/>
           </a:xfrm>
         </p:spPr>
         <p:txBody>
@@ -5473,7 +5468,7 @@
           </a:p>
           <a:p>
             <a:r>
-              <a:t>BreachForums reemplazó a RaidForums → fue seized en 2023 y 2024</a:t>
+              <a:t>BreachForums lo reemplazó incorporando las bases de datos oficiales de RaidForums y preservando rangos/roles de los usuarios antiguos como incentivo para migrar — luego fue seized en 2023 y de nuevo en 2024</a:t>
             </a:r>
           </a:p>
           <a:p>
@@ -5488,7 +5483,7 @@
           </a:p>
           <a:p>
             <a:r>
-              <a:t>El ecosistema es autorreferencial: para investigarlo hay que estar dentro de él</a:t>
+              <a:t>No hace falta operar dentro del ecosistema para estudiarlo: basta con monitorizar de forma pasiva los mismos canales que usan sus miembros</a:t>
             </a:r>
           </a:p>
         </p:txBody>
@@ -5557,7 +5552,7 @@
         </p:nvSpPr>
         <p:spPr>
           <a:xfrm>
-            <a:off x="1051560" y="2194560"/>
+            <a:off x="1051560" y="2331720"/>
             <a:ext cx="4846320" cy="411480"/>
           </a:xfrm>
           <a:prstGeom prst="rect">
@@ -5592,8 +5587,8 @@
         </p:nvSpPr>
         <p:spPr>
           <a:xfrm>
-            <a:off x="1051560" y="2651760"/>
-            <a:ext cx="4846320" cy="3337560"/>
+            <a:off x="1051560" y="2788920"/>
+            <a:ext cx="4846320" cy="3200400"/>
           </a:xfrm>
           <a:prstGeom prst="rect">
             <a:avLst/>
@@ -5609,14 +5604,12 @@
             <a:r>
               <a:rPr sz="1600">
                 <a:solidFill>
-                  <a:srgbClr val="465461"/>
+                  <a:srgbClr val="CD2D37"/>
                 </a:solidFill>
                 <a:latin typeface="Arial"/>
               </a:rPr>
-              <a:t>▸  Credenciales activas para acceso</a:t>
-            </a:r>
-          </a:p>
-          <a:p>
+              <a:t>▸  </a:t>
+            </a:r>
             <a:r>
               <a:rPr sz="1600">
                 <a:solidFill>
@@ -5624,10 +5617,19 @@
                 </a:solidFill>
                 <a:latin typeface="Arial"/>
               </a:rPr>
-              <a:t>▸  IPs y dominios de infraestructura</a:t>
-            </a:r>
-          </a:p>
-          <a:p>
+              <a:t>Credenciales activas para acceso</a:t>
+            </a:r>
+          </a:p>
+          <a:p>
+            <a:r>
+              <a:rPr sz="1600">
+                <a:solidFill>
+                  <a:srgbClr val="CD2D37"/>
+                </a:solidFill>
+                <a:latin typeface="Arial"/>
+              </a:rPr>
+              <a:t>▸  </a:t>
+            </a:r>
             <a:r>
               <a:rPr sz="1600">
                 <a:solidFill>
@@ -5635,10 +5637,19 @@
                 </a:solidFill>
                 <a:latin typeface="Arial"/>
               </a:rPr>
-              <a:t>▸  Datos personales para identificación</a:t>
-            </a:r>
-          </a:p>
-          <a:p>
+              <a:t>IPs y dominios de infraestructura</a:t>
+            </a:r>
+          </a:p>
+          <a:p>
+            <a:r>
+              <a:rPr sz="1600">
+                <a:solidFill>
+                  <a:srgbClr val="CD2D37"/>
+                </a:solidFill>
+                <a:latin typeface="Arial"/>
+              </a:rPr>
+              <a:t>▸  </a:t>
+            </a:r>
             <a:r>
               <a:rPr sz="1600">
                 <a:solidFill>
@@ -5646,7 +5657,27 @@
                 </a:solidFill>
                 <a:latin typeface="Arial"/>
               </a:rPr>
-              <a:t>▸  TTPs documentados (cómo operan)</a:t>
+              <a:t>Datos personales para identificación</a:t>
+            </a:r>
+          </a:p>
+          <a:p>
+            <a:r>
+              <a:rPr sz="1600">
+                <a:solidFill>
+                  <a:srgbClr val="CD2D37"/>
+                </a:solidFill>
+                <a:latin typeface="Arial"/>
+              </a:rPr>
+              <a:t>▸  </a:t>
+            </a:r>
+            <a:r>
+              <a:rPr sz="1600">
+                <a:solidFill>
+                  <a:srgbClr val="465461"/>
+                </a:solidFill>
+                <a:latin typeface="Arial"/>
+              </a:rPr>
+              <a:t>TTPs documentados (cómo operan)</a:t>
             </a:r>
           </a:p>
         </p:txBody>
@@ -5659,7 +5690,7 @@
         </p:nvSpPr>
         <p:spPr>
           <a:xfrm>
-            <a:off x="6217920" y="2194560"/>
+            <a:off x="6217920" y="2331720"/>
             <a:ext cx="4846320" cy="411480"/>
           </a:xfrm>
           <a:prstGeom prst="rect">
@@ -5694,8 +5725,8 @@
         </p:nvSpPr>
         <p:spPr>
           <a:xfrm>
-            <a:off x="6217920" y="2651760"/>
-            <a:ext cx="4846320" cy="3337560"/>
+            <a:off x="6217920" y="2788920"/>
+            <a:ext cx="4846320" cy="3200400"/>
           </a:xfrm>
           <a:prstGeom prst="rect">
             <a:avLst/>
@@ -5711,14 +5742,12 @@
             <a:r>
               <a:rPr sz="1600">
                 <a:solidFill>
-                  <a:srgbClr val="465461"/>
+                  <a:srgbClr val="CD2D37"/>
                 </a:solidFill>
                 <a:latin typeface="Arial"/>
               </a:rPr>
-              <a:t>▸  Patrones de comportamiento estables</a:t>
-            </a:r>
-          </a:p>
-          <a:p>
+              <a:t>▸  </a:t>
+            </a:r>
             <a:r>
               <a:rPr sz="1600">
                 <a:solidFill>
@@ -5726,10 +5755,19 @@
                 </a:solidFill>
                 <a:latin typeface="Arial"/>
               </a:rPr>
-              <a:t>▸  Redes de confianza entre actores</a:t>
-            </a:r>
-          </a:p>
-          <a:p>
+              <a:t>Patrones de comportamiento estables</a:t>
+            </a:r>
+          </a:p>
+          <a:p>
+            <a:r>
+              <a:rPr sz="1600">
+                <a:solidFill>
+                  <a:srgbClr val="CD2D37"/>
+                </a:solidFill>
+                <a:latin typeface="Arial"/>
+              </a:rPr>
+              <a:t>▸  </a:t>
+            </a:r>
             <a:r>
               <a:rPr sz="1600">
                 <a:solidFill>
@@ -5737,10 +5775,19 @@
                 </a:solidFill>
                 <a:latin typeface="Arial"/>
               </a:rPr>
-              <a:t>▸  Evolución de vocabulario y técnicas</a:t>
-            </a:r>
-          </a:p>
-          <a:p>
+              <a:t>Redes de confianza entre actores</a:t>
+            </a:r>
+          </a:p>
+          <a:p>
+            <a:r>
+              <a:rPr sz="1600">
+                <a:solidFill>
+                  <a:srgbClr val="CD2D37"/>
+                </a:solidFill>
+                <a:latin typeface="Arial"/>
+              </a:rPr>
+              <a:t>▸  </a:t>
+            </a:r>
             <a:r>
               <a:rPr sz="1600">
                 <a:solidFill>
@@ -5748,7 +5795,62 @@
                 </a:solidFill>
                 <a:latin typeface="Arial"/>
               </a:rPr>
-              <a:t>▸  Identidades cruzadas entre plataformas</a:t>
+              <a:t>Evolución de vocabulario y técnicas</a:t>
+            </a:r>
+          </a:p>
+          <a:p>
+            <a:r>
+              <a:rPr sz="1600">
+                <a:solidFill>
+                  <a:srgbClr val="CD2D37"/>
+                </a:solidFill>
+                <a:latin typeface="Arial"/>
+              </a:rPr>
+              <a:t>▸  </a:t>
+            </a:r>
+            <a:r>
+              <a:rPr sz="1600">
+                <a:solidFill>
+                  <a:srgbClr val="465461"/>
+                </a:solidFill>
+                <a:latin typeface="Arial"/>
+              </a:rPr>
+              <a:t>Identidades cruzadas entre plataformas</a:t>
+            </a:r>
+          </a:p>
+        </p:txBody>
+      </p:sp>
+      <p:sp>
+        <p:nvSpPr>
+          <p:cNvPr id="8" name="TextBox 7"/>
+          <p:cNvSpPr txBox="1"/>
+          <p:nvPr/>
+        </p:nvSpPr>
+        <p:spPr>
+          <a:xfrm>
+            <a:off x="1051560" y="5760720"/>
+            <a:ext cx="10058400" cy="365760"/>
+          </a:xfrm>
+          <a:prstGeom prst="rect">
+            <a:avLst/>
+          </a:prstGeom>
+          <a:noFill/>
+        </p:spPr>
+        <p:txBody>
+          <a:bodyPr wrap="square">
+            <a:spAutoFit/>
+          </a:bodyPr>
+          <a:lstStyle/>
+          <a:p>
+            <a:pPr algn="l"/>
+            <a:r>
+              <a:rPr sz="1100" b="0">
+                <a:solidFill>
+                  <a:srgbClr val="707888"/>
+                </a:solidFill>
+                <a:latin typeface="Arial"/>
+              </a:rPr>
+              <a:t>ℹ  No siempre se dispone de todos estos datos — un dump de hace años sin actividad reciente hace que, por ejemplo, las IPs ya no aporten valor.</a:t>
             </a:r>
           </a:p>
         </p:txBody>
@@ -5788,7 +5890,7 @@
           <a:p>
             <a:pPr algn="ctr"/>
             <a:r>
-              <a:rPr sz="1300" b="1">
+              <a:rPr sz="1700" b="1">
                 <a:solidFill>
                   <a:srgbClr val="CD2D37"/>
                 </a:solidFill>
@@ -5868,8 +5970,8 @@
         </p:nvSpPr>
         <p:spPr>
           <a:xfrm>
-            <a:off x="1073427" y="2077576"/>
-            <a:ext cx="10084904" cy="3507298"/>
+            <a:off x="1073427" y="2214736"/>
+            <a:ext cx="10084904" cy="3370138"/>
           </a:xfrm>
         </p:spPr>
         <p:txBody>
@@ -5877,27 +5979,45 @@
           <a:lstStyle/>
           <a:p>
             <a:r>
-              <a:t>Hackeo directo: explotación de vulnerabilidad en el servidor del foro</a:t>
-            </a:r>
-          </a:p>
-          <a:p>
-            <a:r>
-              <a:t>Filtración interna: miembro descontento, admin que abandona, búsqueda de notoriedad</a:t>
-            </a:r>
-          </a:p>
-          <a:p>
-            <a:r>
-              <a:t>Repositorios de redistribución: plataformas que actúan como mercado de breaches</a:t>
-            </a:r>
-          </a:p>
-          <a:p>
-            <a:r>
-              <a:t>Una vez en circulación: Telegram especializado, foros underground, paste sites, dark web</a:t>
-            </a:r>
-          </a:p>
-          <a:p>
-            <a:r>
-              <a:t>El mismo ecosistema que genera los datos también los redistribuye — y a su vez es brecheado</a:t>
+              <a:t>1. Hackeo directo: explotación de una vulnerabilidad en el servidor del foro</a:t>
+            </a:r>
+          </a:p>
+          <a:p>
+            <a:r>
+              <a:t>2. Filtración interna: alguien con acceso privilegiado saca los datos — ej. el builder de LockBit 3.0 (2022), filtrado por un desarrollador descontento con el liderazgo del grupo</a:t>
+            </a:r>
+          </a:p>
+          <a:p>
+            <a:r>
+              <a:t>3. Repositorios de redistribución: mercados de pago donde se compra y vende acceso a leaks ya en circulación</a:t>
+            </a:r>
+          </a:p>
+          <a:p>
+            <a:pPr lvl="1" marL="274320" indent="-228600">
+              <a:buNone/>
+            </a:pPr>
+            <a:r>
+              <a:rPr sz="1500" b="0">
+                <a:solidFill>
+                  <a:srgbClr val="707888"/>
+                </a:solidFill>
+                <a:latin typeface="Arial"/>
+              </a:rPr>
+              <a:t>·  Una vez en circulación: Telegram especializado, foros underground, paste sites, dark web</a:t>
+            </a:r>
+          </a:p>
+          <a:p>
+            <a:pPr lvl="1" marL="274320" indent="-228600">
+              <a:buNone/>
+            </a:pPr>
+            <a:r>
+              <a:rPr sz="1500" b="0">
+                <a:solidFill>
+                  <a:srgbClr val="707888"/>
+                </a:solidFill>
+                <a:latin typeface="Arial"/>
+              </a:rPr>
+              <a:t>·  El mismo ecosistema que genera los datos también los redistribuye — y a su vez es brecheado</a:t>
             </a:r>
           </a:p>
         </p:txBody>
@@ -5953,8 +6073,8 @@
         </p:nvSpPr>
         <p:spPr>
           <a:xfrm>
-            <a:off x="1073427" y="2077576"/>
-            <a:ext cx="10084904" cy="3507298"/>
+            <a:off x="1073427" y="2214736"/>
+            <a:ext cx="10084904" cy="3370138"/>
           </a:xfrm>
         </p:spPr>
         <p:txBody>
@@ -6052,7 +6172,7 @@
           <p:nvPr/>
         </p:nvGraphicFramePr>
         <p:xfrm>
-          <a:off x="1051560" y="2148840"/>
+          <a:off x="1051560" y="2286000"/>
           <a:ext cx="10058400" cy="1828800"/>
         </p:xfrm>
         <a:graphic>
@@ -6173,7 +6293,7 @@
                           </a:solidFill>
                           <a:latin typeface="Arial"/>
                         </a:rPr>
-                        <a:t>Chat logs internos (Conti, BlackBasta)</a:t>
+                        <a:t>Chat logs internos</a:t>
                       </a:r>
                     </a:p>
                   </a:txBody>
@@ -6195,7 +6315,7 @@
                           </a:solidFill>
                           <a:latin typeface="Arial"/>
                         </a:rPr>
-                        <a:t>Sin filtro entre operadores: estructura, TTPs, roles, conflictos</a:t>
+                        <a:t>Sin filtro entre operadores: revela cómo se comporta cada usuario, qué rol cumple, con quién habla, qué conflictos hay</a:t>
                       </a:r>
                     </a:p>
                   </a:txBody>
@@ -6487,7 +6607,7 @@
           <a:p>
             <a:pPr algn="ctr"/>
             <a:r>
-              <a:rPr sz="1300" b="1">
+              <a:rPr sz="1700" b="1">
                 <a:solidFill>
                   <a:srgbClr val="CD2D37"/>
                 </a:solidFill>
@@ -6550,7 +6670,7 @@
           <a:lstStyle/>
           <a:p>
             <a:r>
-              <a:t>Formatos habituales — lo que nos encontramos realmente</a:t>
+              <a:t>Formatos habituales en la práctica</a:t>
             </a:r>
           </a:p>
         </p:txBody>
@@ -6567,8 +6687,8 @@
         </p:nvSpPr>
         <p:spPr>
           <a:xfrm>
-            <a:off x="1073427" y="2580496"/>
-            <a:ext cx="10084904" cy="3004378"/>
+            <a:off x="1073427" y="2214736"/>
+            <a:ext cx="10084904" cy="3370138"/>
           </a:xfrm>
         </p:spPr>
         <p:txBody>
@@ -6576,32 +6696,41 @@
           <a:lstStyle/>
           <a:p>
             <a:r>
-              <a:t>vBulletin SQL: formato dominante en foros underground 2000-2020, encoding cp1251 (cirílico)</a:t>
-            </a:r>
-          </a:p>
-          <a:p>
-            <a:r>
-              <a:t>IPS (Invision Power Suite): prefijos de tabla variables, varias versiones mayores con schema distinto</a:t>
-            </a:r>
-          </a:p>
-          <a:p>
-            <a:r>
-              <a:t>MyBB: open source, más predecible, pero con variantes de prefijo por instalación</a:t>
-            </a:r>
-          </a:p>
-          <a:p>
-            <a:r>
-              <a:t>JSON estructurado: chat logs modernos (Telegram, Slack/Rocket.Chat) — más limpio pero campo-inconsistente</a:t>
-            </a:r>
-          </a:p>
-          <a:p>
-            <a:r>
-              <a:t>Flat files: sin schema, delimitadores arbitrarios, calidad de dato muy variable</a:t>
-            </a:r>
-          </a:p>
-          <a:p>
-            <a:r>
-              <a:t>En la práctica: encodings mixtos, tablas renombradas, backups incompletos</a:t>
+              <a:t>vBulletin SQL: dominante 2000-2020 — el encoding lo elige quien administra el foro, no el software; cp1251 (cirílico) aparece porque nuestros casos son de origen ruso/euro-oriental</a:t>
+            </a:r>
+          </a:p>
+          <a:p>
+            <a:r>
+              <a:t>IPS (Invision Power Suite): prefijos de tabla variables (ibf_, o ninguno), varias versiones mayores con schema distinto — hay que detectar la versión antes de asumir nombres de tabla</a:t>
+            </a:r>
+          </a:p>
+          <a:p>
+            <a:r>
+              <a:t>MyBB: open source, más predecible, pero el prefijo también varía según cómo lo instaló cada administrador</a:t>
+            </a:r>
+          </a:p>
+          <a:p>
+            <a:r>
+              <a:t>JSON estructurado: chat logs modernos (Telegram, Slack/Rocket.Chat) — se carga directo con pandas, pero los campos cambian entre plataformas</a:t>
+            </a:r>
+          </a:p>
+          <a:p>
+            <a:r>
+              <a:t>Flat files: sin schema, delimitadores arbitrarios — hay que inferirlo a mano, dump a dump</a:t>
+            </a:r>
+          </a:p>
+          <a:p>
+            <a:pPr lvl="1" marL="274320" indent="-228600">
+              <a:buNone/>
+            </a:pPr>
+            <a:r>
+              <a:rPr sz="1500" b="0">
+                <a:solidFill>
+                  <a:srgbClr val="707888"/>
+                </a:solidFill>
+                <a:latin typeface="Arial"/>
+              </a:rPr>
+              <a:t>·  Un parser por formato (src/parsers/: vbulletin.py, ips.py, mybb.py, flat.py) — auto-detectar versión antes de elegir uno</a:t>
             </a:r>
           </a:p>
         </p:txBody>
@@ -6671,7 +6800,7 @@
           <p:nvPr/>
         </p:nvGraphicFramePr>
         <p:xfrm>
-          <a:off x="1051560" y="2148840"/>
+          <a:off x="1051560" y="2286000"/>
           <a:ext cx="10058400" cy="2194560"/>
         </p:xfrm>
         <a:graphic>
@@ -7105,6 +7234,41 @@
           </a:graphicData>
         </a:graphic>
       </p:graphicFrame>
+      <p:sp>
+        <p:nvSpPr>
+          <p:cNvPr id="5" name="TextBox 4"/>
+          <p:cNvSpPr txBox="1"/>
+          <p:nvPr/>
+        </p:nvSpPr>
+        <p:spPr>
+          <a:xfrm>
+            <a:off x="1051560" y="5760720"/>
+            <a:ext cx="10058400" cy="320040"/>
+          </a:xfrm>
+          <a:prstGeom prst="rect">
+            <a:avLst/>
+          </a:prstGeom>
+          <a:noFill/>
+        </p:spPr>
+        <p:txBody>
+          <a:bodyPr wrap="square">
+            <a:spAutoFit/>
+          </a:bodyPr>
+          <a:lstStyle/>
+          <a:p>
+            <a:pPr algn="l"/>
+            <a:r>
+              <a:rPr sz="1000" b="0">
+                <a:solidFill>
+                  <a:srgbClr val="707888"/>
+                </a:solidFill>
+                <a:latin typeface="Arial"/>
+              </a:rPr>
+              <a:t>ℹ  Esta tabla es coste técnico, no valor investigativo — no confundir con la tier list anterior.</a:t>
+            </a:r>
+          </a:p>
+        </p:txBody>
+      </p:sp>
     </p:spTree>
   </p:cSld>
   <p:clrMapOvr>
@@ -7156,8 +7320,8 @@
         </p:nvSpPr>
         <p:spPr>
           <a:xfrm>
-            <a:off x="1073427" y="2077576"/>
-            <a:ext cx="10084904" cy="3507298"/>
+            <a:off x="1073427" y="2214736"/>
+            <a:ext cx="10084904" cy="3370138"/>
           </a:xfrm>
         </p:spPr>
         <p:txBody>
@@ -7175,7 +7339,7 @@
           </a:p>
           <a:p>
             <a:r>
-              <a:t>El encoding importa: cp1251 mal interpretado como UTF-8 → datos corruptos sin error visible</a:t>
+              <a:t>El encoding importa: cp1251 mal interpretado como UTF-8 → datos corruptos sin error visible (mojibake)</a:t>
             </a:r>
           </a:p>
           <a:p>
@@ -7185,7 +7349,7 @@
           </a:p>
           <a:p>
             <a:r>
-              <a:t>La ingeniería de datos en leaks no es limpieza de datos — es arqueología de schemas</a:t>
+              <a:t>Antes de deduplicar o limpiar vacíos, hay que identificar la estructura real del leak: qué tablas tiene, qué campos, cómo se relacionan entre sí</a:t>
             </a:r>
           </a:p>
         </p:txBody>

--- a/bloque0_ecosistema/csbc26_b0_ecosistema.pptx
+++ b/bloque0_ecosistema/csbc26_b0_ecosistema.pptx
@@ -883,27 +883,27 @@
           <a:lstStyle/>
           <a:p>
             <a:r>
-              <a:t>Dato que más sorprende a novatos</a:t>
-            </a:r>
-          </a:p>
-          <a:p>
-            <a:r>
-              <a:t>RaidForums → seized Europol 2022 → su propia BD filtrada</a:t>
-            </a:r>
-          </a:p>
-          <a:p>
-            <a:r>
-              <a:t>BreachForums: incorporó BD de RaidForums, preservó rangos de usuarios antiguos como gancho de migración</a:t>
-            </a:r>
-          </a:p>
-          <a:p>
-            <a:r>
-              <a:t>Seized dos veces más (2023, 2024)</a:t>
-            </a:r>
-          </a:p>
-          <a:p>
-            <a:r>
-              <a:t>→ monitorizar de forma pasiva, no hace falta operar dentro</a:t>
+              <a:t>Idea central: la identidad no muere con la plataforma</a:t>
+            </a:r>
+          </a:p>
+          <a:p>
+            <a:r>
+              <a:t>RaidForums seized 2022 → BreachForums hereda BD, preserva rangos</a:t>
+            </a:r>
+          </a:p>
+          <a:p>
+            <a:r>
+              <a:t>Se repite: BreachForums seized 2023 y 2024, no es único</a:t>
+            </a:r>
+          </a:p>
+          <a:p>
+            <a:r>
+              <a:t>→ foreshadowing directo: esto es pivoting cross-foro, técnica de HackingForums</a:t>
+            </a:r>
+          </a:p>
+          <a:p>
+            <a:r>
+              <a:t>Monitorizar de forma pasiva, no hace falta operar dentro</a:t>
             </a:r>
           </a:p>
         </p:txBody>
@@ -1498,7 +1498,7 @@
           <a:lstStyle/>
           <a:p>
             <a:r>
-              <a:t>Encoding lo decide el admin, no el motor — cp1251 es cosa de NUESTROS casos (origen ruso), no regla de vBulletin</a:t>
+              <a:t>vBulletin domina 2000-2020 — encoding es tema aparte, se explica al hablar</a:t>
             </a:r>
           </a:p>
           <a:p>
@@ -5432,7 +5432,7 @@
           <a:lstStyle/>
           <a:p>
             <a:r>
-              <a:t>La paradoja del ecosistema de leaks</a:t>
+              <a:t>Las identidades sobreviven a las plataformas</a:t>
             </a:r>
           </a:p>
         </p:txBody>
@@ -5458,27 +5458,36 @@
           <a:lstStyle/>
           <a:p>
             <a:r>
-              <a:t>Los foros que distribuyen breaches son ellos mismos brecheados</a:t>
-            </a:r>
-          </a:p>
-          <a:p>
-            <a:r>
-              <a:t>RaidForums distribuía leaks → fue seized por Europol en 2022 → su propia BD fue publicada</a:t>
-            </a:r>
-          </a:p>
-          <a:p>
-            <a:r>
-              <a:t>BreachForums lo reemplazó incorporando las bases de datos oficiales de RaidForums y preservando rangos/roles de los usuarios antiguos como incentivo para migrar — luego fue seized en 2023 y de nuevo en 2024</a:t>
-            </a:r>
-          </a:p>
-          <a:p>
-            <a:r>
-              <a:t>Los operadores migran de plataforma en plataforma — los handles persisten aunque la plataforma muera</a:t>
-            </a:r>
-          </a:p>
-          <a:p>
-            <a:r>
-              <a:t>Esto crea una cadena de datos: el mismo actor puede aparecer en 5 plataformas distintas</a:t>
+              <a:t>Cuando una plataforma cae — brecha, seizure, cierre —, el operador no desaparece: cambia de sitio, y casi siempre se lleva el mismo handle</a:t>
+            </a:r>
+          </a:p>
+          <a:p>
+            <a:r>
+              <a:t>Ejemplo real: RaidForums (seized por Europol en 2022) → BreachForums lo reemplaza incorporando su BD oficial y preservando rangos/roles de los usuarios antiguos como incentivo explícito para migrar</a:t>
+            </a:r>
+          </a:p>
+          <a:p>
+            <a:r>
+              <a:t>El ciclo se repite: BreachForums fue seized a su vez en 2023 y de nuevo en 2024 — no es un caso aislado, es estructural del ecosistema</a:t>
+            </a:r>
+          </a:p>
+          <a:p>
+            <a:r>
+              <a:t>Consecuencia práctica: el mismo actor puede aparecer en 5 plataformas distintas a lo largo de los años, bajo el mismo o parecido nombre</a:t>
+            </a:r>
+          </a:p>
+          <a:p>
+            <a:pPr lvl="1" marL="274320" indent="-228600">
+              <a:buNone/>
+            </a:pPr>
+            <a:r>
+              <a:rPr sz="1500" b="0">
+                <a:solidFill>
+                  <a:srgbClr val="707888"/>
+                </a:solidFill>
+                <a:latin typeface="Arial"/>
+              </a:rPr>
+              <a:t>·  Esta persistencia de identidad es la base técnica del caso HackingForums, donde se convierte en una técnica concreta: pivoting cross-foro</a:t>
             </a:r>
           </a:p>
           <a:p>
@@ -5993,31 +6002,13 @@
             </a:r>
           </a:p>
           <a:p>
-            <a:pPr lvl="1" marL="274320" indent="-228600">
-              <a:buNone/>
-            </a:pPr>
-            <a:r>
-              <a:rPr sz="1500" b="0">
-                <a:solidFill>
-                  <a:srgbClr val="707888"/>
-                </a:solidFill>
-                <a:latin typeface="Arial"/>
-              </a:rPr>
-              <a:t>·  Una vez en circulación: Telegram especializado, foros underground, paste sites, dark web</a:t>
-            </a:r>
-          </a:p>
-          <a:p>
-            <a:pPr lvl="1" marL="274320" indent="-228600">
-              <a:buNone/>
-            </a:pPr>
-            <a:r>
-              <a:rPr sz="1500" b="0">
-                <a:solidFill>
-                  <a:srgbClr val="707888"/>
-                </a:solidFill>
-                <a:latin typeface="Arial"/>
-              </a:rPr>
-              <a:t>·  El mismo ecosistema que genera los datos también los redistribuye — y a su vez es brecheado</a:t>
+            <a:r>
+              <a:t>Una vez en circulación, se difunde por: Telegram especializado, foros underground, paste sites, dark web</a:t>
+            </a:r>
+          </a:p>
+          <a:p>
+            <a:r>
+              <a:t>El mismo ecosistema que genera los datos también los redistribuye — y a su vez es brecheado</a:t>
             </a:r>
           </a:p>
         </p:txBody>
@@ -6696,7 +6687,7 @@
           <a:lstStyle/>
           <a:p>
             <a:r>
-              <a:t>vBulletin SQL: dominante 2000-2020 — el encoding lo elige quien administra el foro, no el software; cp1251 (cirílico) aparece porque nuestros casos son de origen ruso/euro-oriental</a:t>
+              <a:t>vBulletin SQL: formato dominante en foros underground 2000-2020</a:t>
             </a:r>
           </a:p>
           <a:p>
@@ -6720,17 +6711,8 @@
             </a:r>
           </a:p>
           <a:p>
-            <a:pPr lvl="1" marL="274320" indent="-228600">
-              <a:buNone/>
-            </a:pPr>
-            <a:r>
-              <a:rPr sz="1500" b="0">
-                <a:solidFill>
-                  <a:srgbClr val="707888"/>
-                </a:solidFill>
-                <a:latin typeface="Arial"/>
-              </a:rPr>
-              <a:t>·  Un parser por formato (src/parsers/: vbulletin.py, ips.py, mybb.py, flat.py) — auto-detectar versión antes de elegir uno</a:t>
+            <a:r>
+              <a:t>Un parser por formato (src/parsers/: vbulletin.py, ips.py, mybb.py, flat.py) — auto-detectar versión antes de elegir uno</a:t>
             </a:r>
           </a:p>
         </p:txBody>
